--- a/presentation/SBB_Tracker_Praesentation_solo.pptx
+++ b/presentation/SBB_Tracker_Praesentation_solo.pptx
@@ -4,17 +4,26 @@
   <p:sldMasterIdLst>
     <p:sldMasterId id="2147483648" r:id="rId1"/>
   </p:sldMasterIdLst>
+  <p:notesMasterIdLst>
+    <p:notesMasterId r:id="rId24"/>
+  </p:notesMasterIdLst>
   <p:sldIdLst>
-    <p:sldId id="256" r:id="rId7"/>
-    <p:sldId id="257" r:id="rId9"/>
-    <p:sldId id="258" r:id="rId10"/>
-    <p:sldId id="259" r:id="rId11"/>
-    <p:sldId id="260" r:id="rId12"/>
-    <p:sldId id="261" r:id="rId13"/>
-    <p:sldId id="262" r:id="rId14"/>
-    <p:sldId id="263" r:id="rId15"/>
-    <p:sldId id="264" r:id="rId16"/>
-    <p:sldId id="265" r:id="rId17"/>
+    <p:sldId id="256" r:id="rId2"/>
+    <p:sldId id="257" r:id="rId3"/>
+    <p:sldId id="258" r:id="rId4"/>
+    <p:sldId id="259" r:id="rId5"/>
+    <p:sldId id="260" r:id="rId6"/>
+    <p:sldId id="261" r:id="rId7"/>
+    <p:sldId id="262" r:id="rId8"/>
+    <p:sldId id="263" r:id="rId9"/>
+    <p:sldId id="264" r:id="rId10"/>
+    <p:sldId id="265" r:id="rId11"/>
+    <p:sldId id="272" r:id="rId12"/>
+    <p:sldId id="273" r:id="rId13"/>
+    <p:sldId id="274" r:id="rId14"/>
+    <p:sldId id="275" r:id="rId15"/>
+    <p:sldId id="276" r:id="rId16"/>
+    <p:sldId id="277" r:id="rId17"/>
     <p:sldId id="266" r:id="rId18"/>
     <p:sldId id="267" r:id="rId19"/>
     <p:sldId id="268" r:id="rId20"/>
@@ -22,7 +31,7 @@
     <p:sldId id="270" r:id="rId22"/>
     <p:sldId id="271" r:id="rId23"/>
   </p:sldIdLst>
-  <p:sldSz cx="12191695" cy="6858000" type="screen4x3"/>
+  <p:sldSz cx="12192000" cy="6858000"/>
   <p:notesSz cx="6858000" cy="9144000"/>
   <p:defaultTextStyle>
     <a:defPPr>
@@ -119,11 +128,27 @@
       </a:defRPr>
     </a:lvl9pPr>
   </p:defaultTextStyle>
+  <p:extLst>
+    <p:ext uri="{EFAFB233-063F-42B5-8137-9DF3F51BA10A}">
+      <p15:sldGuideLst xmlns:p15="http://schemas.microsoft.com/office/powerpoint/2012/main">
+        <p15:guide id="1" orient="horz" pos="2160">
+          <p15:clr>
+            <a:srgbClr val="A4A3A4"/>
+          </p15:clr>
+        </p15:guide>
+        <p15:guide id="2" pos="2880">
+          <p15:clr>
+            <a:srgbClr val="A4A3A4"/>
+          </p15:clr>
+        </p15:guide>
+      </p15:sldGuideLst>
+    </p:ext>
+  </p:extLst>
 </p:presentation>
 </file>
 
 <file path=ppt/notesMasters/notesMaster1.xml><?xml version="1.0" encoding="utf-8"?>
-<p:notesMaster xmlns:a="http://schemas.openxmlformats.org/drawingml/2006/main" xmlns:p="http://schemas.openxmlformats.org/presentationml/2006/main" xmlns:r="http://schemas.openxmlformats.org/officeDocument/2006/relationships">
+<p:notesMaster xmlns:a="http://schemas.openxmlformats.org/drawingml/2006/main" xmlns:r="http://schemas.openxmlformats.org/officeDocument/2006/relationships" xmlns:p="http://schemas.openxmlformats.org/presentationml/2006/main">
   <p:cSld>
     <p:bg>
       <p:bgRef idx="1001">
@@ -144,241 +169,16 @@
           <a:chExt cx="0" cy="0"/>
         </a:xfrm>
       </p:grpSpPr>
-      <p:sp>
-        <p:nvSpPr>
-          <p:cNvPr id="2" name="Header Placeholder 1"/>
-          <p:cNvSpPr>
-            <a:spLocks noGrp="1"/>
-          </p:cNvSpPr>
-          <p:nvPr>
-            <p:ph type="hdr" sz="quarter"/>
-          </p:nvPr>
-        </p:nvSpPr>
-        <p:spPr>
-          <a:xfrm>
-            <a:off x="0" y="0"/>
-            <a:ext cx="2971800" cy="457200"/>
-          </a:xfrm>
-          <a:prstGeom prst="rect">
-            <a:avLst/>
-          </a:prstGeom>
-        </p:spPr>
-        <p:txBody>
-          <a:bodyPr vert="horz" lIns="91440" tIns="45720" rIns="91440" bIns="45720" rtlCol="0"/>
-          <a:lstStyle>
-            <a:lvl1pPr algn="l">
-              <a:defRPr sz="1200"/>
-            </a:lvl1pPr>
-          </a:lstStyle>
-          <a:p>
-            <a:endParaRPr lang="en-US"/>
-          </a:p>
-        </p:txBody>
-      </p:sp>
-      <p:sp>
-        <p:nvSpPr>
-          <p:cNvPr id="3" name="Date Placeholder 2"/>
-          <p:cNvSpPr>
-            <a:spLocks noGrp="1"/>
-          </p:cNvSpPr>
-          <p:nvPr>
-            <p:ph type="dt" idx="1"/>
-          </p:nvPr>
-        </p:nvSpPr>
-        <p:spPr>
-          <a:xfrm>
-            <a:off x="3884613" y="0"/>
-            <a:ext cx="2971800" cy="457200"/>
-          </a:xfrm>
-          <a:prstGeom prst="rect">
-            <a:avLst/>
-          </a:prstGeom>
-        </p:spPr>
-        <p:txBody>
-          <a:bodyPr vert="horz" lIns="91440" tIns="45720" rIns="91440" bIns="45720" rtlCol="0"/>
-          <a:lstStyle>
-            <a:lvl1pPr algn="r">
-              <a:defRPr sz="1200"/>
-            </a:lvl1pPr>
-          </a:lstStyle>
-          <a:p>
-            <a:fld id="{0F89C1C7-3DCD-1040-A9CF-14679D8B5DDD}" type="datetimeFigureOut">
-              <a:rPr lang="en-US" smtClean="0"/>
-              <a:t>10/17/16</a:t>
-            </a:fld>
-            <a:endParaRPr lang="en-US"/>
-          </a:p>
-        </p:txBody>
-      </p:sp>
-      <p:sp>
-        <p:nvSpPr>
-          <p:cNvPr id="4" name="Slide Image Placeholder 3"/>
-          <p:cNvSpPr>
-            <a:spLocks noGrp="1" noRot="1" noChangeAspect="1"/>
-          </p:cNvSpPr>
-          <p:nvPr>
-            <p:ph type="sldImg" idx="2"/>
-          </p:nvPr>
-        </p:nvSpPr>
-        <p:spPr>
-          <a:xfrm>
-            <a:off x="1143000" y="685800"/>
-            <a:ext cx="4572000" cy="3429000"/>
-          </a:xfrm>
-          <a:prstGeom prst="rect">
-            <a:avLst/>
-          </a:prstGeom>
-          <a:noFill/>
-          <a:ln w="12700">
-            <a:solidFill>
-              <a:prstClr val="black"/>
-            </a:solidFill>
-          </a:ln>
-        </p:spPr>
-        <p:txBody>
-          <a:bodyPr vert="horz" lIns="91440" tIns="45720" rIns="91440" bIns="45720" rtlCol="0" anchor="ctr"/>
-          <a:lstStyle/>
-          <a:p>
-            <a:endParaRPr lang="en-US"/>
-          </a:p>
-        </p:txBody>
-      </p:sp>
-      <p:sp>
-        <p:nvSpPr>
-          <p:cNvPr id="5" name="Notes Placeholder 4"/>
-          <p:cNvSpPr>
-            <a:spLocks noGrp="1"/>
-          </p:cNvSpPr>
-          <p:nvPr>
-            <p:ph type="body" sz="quarter" idx="3"/>
-          </p:nvPr>
-        </p:nvSpPr>
-        <p:spPr>
-          <a:xfrm>
-            <a:off x="685800" y="4343400"/>
-            <a:ext cx="5486400" cy="4114800"/>
-          </a:xfrm>
-          <a:prstGeom prst="rect">
-            <a:avLst/>
-          </a:prstGeom>
-        </p:spPr>
-        <p:txBody>
-          <a:bodyPr vert="horz" lIns="91440" tIns="45720" rIns="91440" bIns="45720" rtlCol="0"/>
-          <a:lstStyle/>
-          <a:p>
-            <a:pPr lvl="0"/>
-            <a:r>
-              <a:rPr lang="en-US" smtClean="0"/>
-              <a:t>Click to edit Master text styles</a:t>
-            </a:r>
-          </a:p>
-          <a:p>
-            <a:pPr lvl="1"/>
-            <a:r>
-              <a:rPr lang="en-US" smtClean="0"/>
-              <a:t>Second level</a:t>
-            </a:r>
-          </a:p>
-          <a:p>
-            <a:pPr lvl="2"/>
-            <a:r>
-              <a:rPr lang="en-US" smtClean="0"/>
-              <a:t>Third level</a:t>
-            </a:r>
-          </a:p>
-          <a:p>
-            <a:pPr lvl="3"/>
-            <a:r>
-              <a:rPr lang="en-US" smtClean="0"/>
-              <a:t>Fourth level</a:t>
-            </a:r>
-          </a:p>
-          <a:p>
-            <a:pPr lvl="4"/>
-            <a:r>
-              <a:rPr lang="en-US" smtClean="0"/>
-              <a:t>Fifth level</a:t>
-            </a:r>
-            <a:endParaRPr lang="en-US"/>
-          </a:p>
-        </p:txBody>
-      </p:sp>
-      <p:sp>
-        <p:nvSpPr>
-          <p:cNvPr id="6" name="Footer Placeholder 5"/>
-          <p:cNvSpPr>
-            <a:spLocks noGrp="1"/>
-          </p:cNvSpPr>
-          <p:nvPr>
-            <p:ph type="ftr" sz="quarter" idx="4"/>
-          </p:nvPr>
-        </p:nvSpPr>
-        <p:spPr>
-          <a:xfrm>
-            <a:off x="0" y="8685213"/>
-            <a:ext cx="2971800" cy="457200"/>
-          </a:xfrm>
-          <a:prstGeom prst="rect">
-            <a:avLst/>
-          </a:prstGeom>
-        </p:spPr>
-        <p:txBody>
-          <a:bodyPr vert="horz" lIns="91440" tIns="45720" rIns="91440" bIns="45720" rtlCol="0" anchor="b"/>
-          <a:lstStyle>
-            <a:lvl1pPr algn="l">
-              <a:defRPr sz="1200"/>
-            </a:lvl1pPr>
-          </a:lstStyle>
-          <a:p>
-            <a:endParaRPr lang="en-US"/>
-          </a:p>
-        </p:txBody>
-      </p:sp>
-      <p:sp>
-        <p:nvSpPr>
-          <p:cNvPr id="7" name="Slide Number Placeholder 6"/>
-          <p:cNvSpPr>
-            <a:spLocks noGrp="1"/>
-          </p:cNvSpPr>
-          <p:nvPr>
-            <p:ph type="sldNum" sz="quarter" idx="5"/>
-          </p:nvPr>
-        </p:nvSpPr>
-        <p:spPr>
-          <a:xfrm>
-            <a:off x="3884613" y="8685213"/>
-            <a:ext cx="2971800" cy="457200"/>
-          </a:xfrm>
-          <a:prstGeom prst="rect">
-            <a:avLst/>
-          </a:prstGeom>
-        </p:spPr>
-        <p:txBody>
-          <a:bodyPr vert="horz" lIns="91440" tIns="45720" rIns="91440" bIns="45720" rtlCol="0" anchor="b"/>
-          <a:lstStyle>
-            <a:lvl1pPr algn="r">
-              <a:defRPr sz="1200"/>
-            </a:lvl1pPr>
-          </a:lstStyle>
-          <a:p>
-            <a:fld id="{BB5E49A5-4136-284D-997B-48E1D791AD67}" type="slidenum">
-              <a:rPr lang="en-US" smtClean="0"/>
-              <a:t>‹#›</a:t>
-            </a:fld>
-            <a:endParaRPr lang="en-US"/>
-          </a:p>
-        </p:txBody>
-      </p:sp>
     </p:spTree>
     <p:extLst>
       <p:ext uri="{BB962C8B-B14F-4D97-AF65-F5344CB8AC3E}">
-        <p14:creationId xmlns:p14="http://schemas.microsoft.com/office/powerpoint/2010/main" val="2623252185"/>
+        <p14:creationId xmlns:p14="http://schemas.microsoft.com/office/powerpoint/2010/main" val="915295249"/>
       </p:ext>
     </p:extLst>
   </p:cSld>
   <p:clrMap bg1="lt1" tx1="dk1" bg2="lt2" tx2="dk2" accent1="accent1" accent2="accent2" accent3="accent3" accent4="accent4" accent5="accent5" accent6="accent6" hlink="hlink" folHlink="folHlink"/>
   <p:notesStyle>
-    <a:lvl1pPr marL="0" algn="l" defTabSz="457200" rtl="0" eaLnBrk="1" latinLnBrk="0" hangingPunct="1">
+    <a:lvl1pPr marL="0" algn="l" defTabSz="914400" rtl="0" eaLnBrk="1" latinLnBrk="0" hangingPunct="1">
       <a:defRPr sz="1200" kern="1200">
         <a:solidFill>
           <a:schemeClr val="tx1"/>
@@ -388,7 +188,7 @@
         <a:cs typeface="+mn-cs"/>
       </a:defRPr>
     </a:lvl1pPr>
-    <a:lvl2pPr marL="457200" algn="l" defTabSz="457200" rtl="0" eaLnBrk="1" latinLnBrk="0" hangingPunct="1">
+    <a:lvl2pPr marL="457200" algn="l" defTabSz="914400" rtl="0" eaLnBrk="1" latinLnBrk="0" hangingPunct="1">
       <a:defRPr sz="1200" kern="1200">
         <a:solidFill>
           <a:schemeClr val="tx1"/>
@@ -398,7 +198,7 @@
         <a:cs typeface="+mn-cs"/>
       </a:defRPr>
     </a:lvl2pPr>
-    <a:lvl3pPr marL="914400" algn="l" defTabSz="457200" rtl="0" eaLnBrk="1" latinLnBrk="0" hangingPunct="1">
+    <a:lvl3pPr marL="914400" algn="l" defTabSz="914400" rtl="0" eaLnBrk="1" latinLnBrk="0" hangingPunct="1">
       <a:defRPr sz="1200" kern="1200">
         <a:solidFill>
           <a:schemeClr val="tx1"/>
@@ -408,7 +208,7 @@
         <a:cs typeface="+mn-cs"/>
       </a:defRPr>
     </a:lvl3pPr>
-    <a:lvl4pPr marL="1371600" algn="l" defTabSz="457200" rtl="0" eaLnBrk="1" latinLnBrk="0" hangingPunct="1">
+    <a:lvl4pPr marL="1371600" algn="l" defTabSz="914400" rtl="0" eaLnBrk="1" latinLnBrk="0" hangingPunct="1">
       <a:defRPr sz="1200" kern="1200">
         <a:solidFill>
           <a:schemeClr val="tx1"/>
@@ -418,7 +218,7 @@
         <a:cs typeface="+mn-cs"/>
       </a:defRPr>
     </a:lvl4pPr>
-    <a:lvl5pPr marL="1828800" algn="l" defTabSz="457200" rtl="0" eaLnBrk="1" latinLnBrk="0" hangingPunct="1">
+    <a:lvl5pPr marL="1828800" algn="l" defTabSz="914400" rtl="0" eaLnBrk="1" latinLnBrk="0" hangingPunct="1">
       <a:defRPr sz="1200" kern="1200">
         <a:solidFill>
           <a:schemeClr val="tx1"/>
@@ -428,7 +228,7 @@
         <a:cs typeface="+mn-cs"/>
       </a:defRPr>
     </a:lvl5pPr>
-    <a:lvl6pPr marL="2286000" algn="l" defTabSz="457200" rtl="0" eaLnBrk="1" latinLnBrk="0" hangingPunct="1">
+    <a:lvl6pPr marL="2286000" algn="l" defTabSz="914400" rtl="0" eaLnBrk="1" latinLnBrk="0" hangingPunct="1">
       <a:defRPr sz="1200" kern="1200">
         <a:solidFill>
           <a:schemeClr val="tx1"/>
@@ -438,7 +238,7 @@
         <a:cs typeface="+mn-cs"/>
       </a:defRPr>
     </a:lvl6pPr>
-    <a:lvl7pPr marL="2743200" algn="l" defTabSz="457200" rtl="0" eaLnBrk="1" latinLnBrk="0" hangingPunct="1">
+    <a:lvl7pPr marL="2743200" algn="l" defTabSz="914400" rtl="0" eaLnBrk="1" latinLnBrk="0" hangingPunct="1">
       <a:defRPr sz="1200" kern="1200">
         <a:solidFill>
           <a:schemeClr val="tx1"/>
@@ -448,7 +248,7 @@
         <a:cs typeface="+mn-cs"/>
       </a:defRPr>
     </a:lvl7pPr>
-    <a:lvl8pPr marL="3200400" algn="l" defTabSz="457200" rtl="0" eaLnBrk="1" latinLnBrk="0" hangingPunct="1">
+    <a:lvl8pPr marL="3200400" algn="l" defTabSz="914400" rtl="0" eaLnBrk="1" latinLnBrk="0" hangingPunct="1">
       <a:defRPr sz="1200" kern="1200">
         <a:solidFill>
           <a:schemeClr val="tx1"/>
@@ -458,7 +258,7 @@
         <a:cs typeface="+mn-cs"/>
       </a:defRPr>
     </a:lvl8pPr>
-    <a:lvl9pPr marL="3657600" algn="l" defTabSz="457200" rtl="0" eaLnBrk="1" latinLnBrk="0" hangingPunct="1">
+    <a:lvl9pPr marL="3657600" algn="l" defTabSz="914400" rtl="0" eaLnBrk="1" latinLnBrk="0" hangingPunct="1">
       <a:defRPr sz="1200" kern="1200">
         <a:solidFill>
           <a:schemeClr val="tx1"/>
@@ -473,7 +273,7 @@
 </file>
 
 <file path=ppt/notesSlides/notesSlide1.xml><?xml version="1.0" encoding="utf-8"?>
-<p:notes xmlns:a="http://schemas.openxmlformats.org/drawingml/2006/main" xmlns:p="http://schemas.openxmlformats.org/presentationml/2006/main" xmlns:r="http://schemas.openxmlformats.org/officeDocument/2006/relationships">
+<p:notes xmlns:a="http://schemas.openxmlformats.org/drawingml/2006/main" xmlns:r="http://schemas.openxmlformats.org/officeDocument/2006/relationships" xmlns:p="http://schemas.openxmlformats.org/presentationml/2006/main">
   <p:cSld>
     <p:spTree>
       <p:nvGrpSpPr>
@@ -493,7 +293,7 @@
         <p:nvSpPr>
           <p:cNvPr id="2" name="Slide Image Placeholder 1"/>
           <p:cNvSpPr>
-            <a:spLocks noGrp="1"/>
+            <a:spLocks noGrp="1" noRot="1" noChangeAspect="1"/>
           </p:cNvSpPr>
           <p:nvPr>
             <p:ph type="sldImg" idx="2"/>
@@ -508,7 +308,7 @@
             <a:spLocks noGrp="1"/>
           </p:cNvSpPr>
           <p:nvPr>
-            <p:ph type="body" idx="3" sz="quarter"/>
+            <p:ph type="body" sz="quarter" idx="3"/>
           </p:nvPr>
         </p:nvSpPr>
         <p:spPr/>
@@ -523,13 +323,19 @@
           <a:p/>
           <a:p>
             <a:r>
-              <a:t>HINWEIS (nur für dich): Du präsentierst durchgehend allein. In der Referentenansicht siehst du diese Notizen, das Publikum nicht. Achte auf die vorgegebene Gesamtlänge (Anzahl Studierende × 5 Min).</a:t>
+              <a:t>HINWEIS (nur für dich): Du präsentierst durchgehend allein. In der Referentenansicht siehst du diese Notizen, das Publikum nicht. Achte auf die vorgegebene Gesamtlänge (Anzahl Studierende × 5 Min ≈ 10 Min).</a:t>
             </a:r>
           </a:p>
           <a:p/>
           <a:p>
             <a:r>
-              <a:t>TON: ruhig, nicht ablesen. Kernbotschaft: Die Effekte sind statistisch klar, aber praktisch klein — und du gehst ehrlich damit um.</a:t>
+              <a:t>WORKFLOW: Vollbild präsentieren; beim Demo-Teil (Story-Schritte + Webapp) per Alt-Tab in die offene Live-App wechseln, klicken, dann zurück zu den Folien.</a:t>
+            </a:r>
+          </a:p>
+          <a:p/>
+          <a:p>
+            <a:r>
+              <a:t>TON: ruhig, nicht ablesen. Kernbotschaft: Effekte statistisch klar, aber praktisch klein — und du gehst ehrlich damit um.</a:t>
             </a:r>
           </a:p>
         </p:txBody>
@@ -541,7 +347,7 @@
             <a:spLocks noGrp="1"/>
           </p:cNvSpPr>
           <p:nvPr>
-            <p:ph type="sldNum" idx="5" sz="quarter"/>
+            <p:ph type="sldNum" sz="quarter" idx="5"/>
           </p:nvPr>
         </p:nvSpPr>
         <p:spPr/>
@@ -555,7 +361,7 @@
 </file>
 
 <file path=ppt/notesSlides/notesSlide10.xml><?xml version="1.0" encoding="utf-8"?>
-<p:notes xmlns:a="http://schemas.openxmlformats.org/drawingml/2006/main" xmlns:p="http://schemas.openxmlformats.org/presentationml/2006/main" xmlns:r="http://schemas.openxmlformats.org/officeDocument/2006/relationships">
+<p:notes xmlns:a="http://schemas.openxmlformats.org/drawingml/2006/main" xmlns:r="http://schemas.openxmlformats.org/officeDocument/2006/relationships" xmlns:p="http://schemas.openxmlformats.org/presentationml/2006/main">
   <p:cSld>
     <p:spTree>
       <p:nvGrpSpPr>
@@ -575,7 +381,7 @@
         <p:nvSpPr>
           <p:cNvPr id="2" name="Slide Image Placeholder 1"/>
           <p:cNvSpPr>
-            <a:spLocks noGrp="1"/>
+            <a:spLocks noGrp="1" noRot="1" noChangeAspect="1"/>
           </p:cNvSpPr>
           <p:nvPr>
             <p:ph type="sldImg" idx="2"/>
@@ -590,7 +396,7 @@
             <a:spLocks noGrp="1"/>
           </p:cNvSpPr>
           <p:nvPr>
-            <p:ph type="body" idx="3" sz="quarter"/>
+            <p:ph type="body" sz="quarter" idx="3"/>
           </p:nvPr>
         </p:nvSpPr>
         <p:spPr/>
@@ -602,13 +408,17 @@
               <a:t>SPRECHTEXT: «Diese Heatmap zeigt, WANN es kritisch wird: dunkle Felder morgens und abends an Werktagen — die klassische Rush-Hour. Genau diese Erkenntnis bauen wir in der Webapp interaktiv nach.»</a:t>
             </a:r>
           </a:p>
-          <a:p/>
+          <a:p>
+            <a:endParaRPr/>
+          </a:p>
           <a:p>
             <a:r>
               <a:t>GRAFIK ERKLÄREN: Zeilen = Wochentage (Mo–So), Spalten = Stunde 0–23, Farbe = durchschnittliche Verspätung. Je dunkler/röter, desto verspäteter. So sieht man Muster auf einen Blick statt in einer Zahlentabelle.</a:t>
             </a:r>
           </a:p>
-          <a:p/>
+          <a:p>
+            <a:endParaRPr/>
+          </a:p>
           <a:p>
             <a:r>
               <a:t>Überleitung zur Demo: «Schauen wir uns das jetzt live in unserer Webapp an.»</a:t>
@@ -623,7 +433,7 @@
             <a:spLocks noGrp="1"/>
           </p:cNvSpPr>
           <p:nvPr>
-            <p:ph type="sldNum" idx="5" sz="quarter"/>
+            <p:ph type="sldNum" sz="quarter" idx="5"/>
           </p:nvPr>
         </p:nvSpPr>
         <p:spPr/>
@@ -637,7 +447,7 @@
 </file>
 
 <file path=ppt/notesSlides/notesSlide11.xml><?xml version="1.0" encoding="utf-8"?>
-<p:notes xmlns:a="http://schemas.openxmlformats.org/drawingml/2006/main" xmlns:p="http://schemas.openxmlformats.org/presentationml/2006/main" xmlns:r="http://schemas.openxmlformats.org/officeDocument/2006/relationships">
+<p:notes xmlns:a="http://schemas.openxmlformats.org/drawingml/2006/main" xmlns:r="http://schemas.openxmlformats.org/officeDocument/2006/relationships" xmlns:p="http://schemas.openxmlformats.org/presentationml/2006/main">
   <p:cSld>
     <p:spTree>
       <p:nvGrpSpPr>
@@ -657,7 +467,7 @@
         <p:nvSpPr>
           <p:cNvPr id="2" name="Slide Image Placeholder 1"/>
           <p:cNvSpPr>
-            <a:spLocks noGrp="1"/>
+            <a:spLocks noGrp="1" noRot="1" noChangeAspect="1"/>
           </p:cNvSpPr>
           <p:nvPr>
             <p:ph type="sldImg" idx="2"/>
@@ -672,7 +482,7 @@
             <a:spLocks noGrp="1"/>
           </p:cNvSpPr>
           <p:nvPr>
-            <p:ph type="body" idx="3" sz="quarter"/>
+            <p:ph type="body" sz="quarter" idx="3"/>
           </p:nvPr>
         </p:nvSpPr>
         <p:spPr/>
@@ -681,39 +491,7 @@
           <a:lstStyle/>
           <a:p>
             <a:r>
-              <a:t>LIVE-DEMO (nicht nur die Folie zeigen, App wirklich bedienen!):</a:t>
-            </a:r>
-          </a:p>
-          <a:p>
-            <a:r>
-              <a:t>1. App vorher starten: 'streamlit run app/streamlit_app.py'.</a:t>
-            </a:r>
-          </a:p>
-          <a:p>
-            <a:r>
-              <a:t>2. «Jeder Punkt ist ein Bahnhof, die Farbe zeigt die mittlere Verspätung.»</a:t>
-            </a:r>
-          </a:p>
-          <a:p>
-            <a:r>
-              <a:t>3. Den rechten Regler 'Nur Hotspots' langsam hochziehen — die Karte dünnt aus, bis nur noch die rotesten Bahnhöfe übrig sind.</a:t>
-            </a:r>
-          </a:p>
-          <a:p>
-            <a:r>
-              <a:t>4. «Auffällig: die Hotspots liegen an den Grenzen — Buchs SG, St. Margrethen — weil internationale Züge ihre Verspätung importieren.»</a:t>
-            </a:r>
-          </a:p>
-          <a:p/>
-          <a:p>
-            <a:r>
-              <a:t>BEGRIFFE: 'Folium' = Python-Bibliothek für interaktive Landkarten. Der linke Regler blendet Bahnhöfe mit zu wenigen Daten aus (statistisch unsicher).</a:t>
-            </a:r>
-          </a:p>
-          <a:p/>
-          <a:p>
-            <a:r>
-              <a:t>Falls die Live-Demo hakt: dieser Screenshot dient als Fallback.</a:t>
+              <a:t>Überleitung in die Live-Demo: «Statt nur Zahlen zu zeigen, gehen wir die App einmal aus Sicht echter Nutzer durch.» Grossi (89) war als junge Frau Au-pair in Lausanne, lernte am Schloss Chillon den Maler Luc kennen; ihr Traum ist die Rückkehr. Ihr Enkel Thomas will ihr das schenken — möglichst stressfrei, mit wenig Gedränge. Genau dafür nutzen sie unsere App.</a:t>
             </a:r>
           </a:p>
         </p:txBody>
@@ -725,7 +503,7 @@
             <a:spLocks noGrp="1"/>
           </p:cNvSpPr>
           <p:nvPr>
-            <p:ph type="sldNum" idx="5" sz="quarter"/>
+            <p:ph type="sldNum" sz="quarter" idx="5"/>
           </p:nvPr>
         </p:nvSpPr>
         <p:spPr/>
@@ -739,7 +517,7 @@
 </file>
 
 <file path=ppt/notesSlides/notesSlide12.xml><?xml version="1.0" encoding="utf-8"?>
-<p:notes xmlns:a="http://schemas.openxmlformats.org/drawingml/2006/main" xmlns:p="http://schemas.openxmlformats.org/presentationml/2006/main" xmlns:r="http://schemas.openxmlformats.org/officeDocument/2006/relationships">
+<p:notes xmlns:a="http://schemas.openxmlformats.org/drawingml/2006/main" xmlns:r="http://schemas.openxmlformats.org/officeDocument/2006/relationships" xmlns:p="http://schemas.openxmlformats.org/presentationml/2006/main">
   <p:cSld>
     <p:spTree>
       <p:nvGrpSpPr>
@@ -759,7 +537,7 @@
         <p:nvSpPr>
           <p:cNvPr id="2" name="Slide Image Placeholder 1"/>
           <p:cNvSpPr>
-            <a:spLocks noGrp="1"/>
+            <a:spLocks noGrp="1" noRot="1" noChangeAspect="1"/>
           </p:cNvSpPr>
           <p:nvPr>
             <p:ph type="sldImg" idx="2"/>
@@ -774,7 +552,7 @@
             <a:spLocks noGrp="1"/>
           </p:cNvSpPr>
           <p:nvPr>
-            <p:ph type="body" idx="3" sz="quarter"/>
+            <p:ph type="body" sz="quarter" idx="3"/>
           </p:nvPr>
         </p:nvSpPr>
         <p:spPr/>
@@ -783,49 +561,7 @@
           <a:lstStyle/>
           <a:p>
             <a:r>
-              <a:t>LIVE-DEMO:</a:t>
-            </a:r>
-          </a:p>
-          <a:p>
-            <a:r>
-              <a:t>1. Eine Beispielfrage anklicken oder tippen, z. B. 'Wann erwische ich am ehesten einen pünktlichen Zug?'.</a:t>
-            </a:r>
-          </a:p>
-          <a:p>
-            <a:r>
-              <a:t>2. «Das Sprachmodell bekommt unsere Statistik als Kontext mitgeliefert und darf NUR damit antworten — es soll nichts erfinden.»</a:t>
-            </a:r>
-          </a:p>
-          <a:p>
-            <a:r>
-              <a:t>3. Auf den Ausklapp-Bereich 'Welche Daten hat das Modell gesehen?' zeigen — das macht es transparent und überprüfbar.</a:t>
-            </a:r>
-          </a:p>
-          <a:p/>
-          <a:p>
-            <a:r>
-              <a:t>BEGRIFFE EINFACH:</a:t>
-            </a:r>
-          </a:p>
-          <a:p>
-            <a:r>
-              <a:t>• Sprachmodell / LLM = ein KI-Modell (hier Claude Sonnet 4.6), das Texte versteht und formuliert.</a:t>
-            </a:r>
-          </a:p>
-          <a:p>
-            <a:r>
-              <a:t>• 'Kontext mitgeben' = wir hängen die relevanten Zahlen an die Frage an, damit die Antwort auf unseren Daten basiert und nicht auf Allgemeinwissen.</a:t>
-            </a:r>
-          </a:p>
-          <a:p>
-            <a:r>
-              <a:t>• 'Halluzination' = wenn ein Modell plausibel klingende, aber falsche Dinge erfindet. Wir verhindern das durch klare Anweisung und mitgelieferte Fakten.</a:t>
-            </a:r>
-          </a:p>
-          <a:p/>
-          <a:p>
-            <a:r>
-              <a:t>MÖGLICHE FRAGE: 'Woher weiss man, dass es nicht doch erfindet?' — Wir geben die Datenbasis transparent aus und weisen das Modell explizit an, nur vorhandene Zahlen zu nennen.</a:t>
+              <a:t>Kurz die zwei Personen vorstellen. Sympathisch, knapp halten — die Details kommen über die Sprechblasen auf der nächsten Folie. Wichtig fürs Publikum: das Ziel ist «möglichst stressfrei, möglichst wenig Leute im Zug».</a:t>
             </a:r>
           </a:p>
         </p:txBody>
@@ -837,7 +573,7 @@
             <a:spLocks noGrp="1"/>
           </p:cNvSpPr>
           <p:nvPr>
-            <p:ph type="sldNum" idx="5" sz="quarter"/>
+            <p:ph type="sldNum" sz="quarter" idx="5"/>
           </p:nvPr>
         </p:nvSpPr>
         <p:spPr/>
@@ -851,7 +587,7 @@
 </file>
 
 <file path=ppt/notesSlides/notesSlide13.xml><?xml version="1.0" encoding="utf-8"?>
-<p:notes xmlns:a="http://schemas.openxmlformats.org/drawingml/2006/main" xmlns:p="http://schemas.openxmlformats.org/presentationml/2006/main" xmlns:r="http://schemas.openxmlformats.org/officeDocument/2006/relationships">
+<p:notes xmlns:a="http://schemas.openxmlformats.org/drawingml/2006/main" xmlns:r="http://schemas.openxmlformats.org/officeDocument/2006/relationships" xmlns:p="http://schemas.openxmlformats.org/presentationml/2006/main">
   <p:cSld>
     <p:spTree>
       <p:nvGrpSpPr>
@@ -871,7 +607,7 @@
         <p:nvSpPr>
           <p:cNvPr id="2" name="Slide Image Placeholder 1"/>
           <p:cNvSpPr>
-            <a:spLocks noGrp="1"/>
+            <a:spLocks noGrp="1" noRot="1" noChangeAspect="1"/>
           </p:cNvSpPr>
           <p:nvPr>
             <p:ph type="sldImg" idx="2"/>
@@ -886,7 +622,7 @@
             <a:spLocks noGrp="1"/>
           </p:cNvSpPr>
           <p:nvPr>
-            <p:ph type="body" idx="3" sz="quarter"/>
+            <p:ph type="body" sz="quarter" idx="3"/>
           </p:nvPr>
         </p:nvSpPr>
         <p:spPr/>
@@ -895,34 +631,7 @@
           <a:lstStyle/>
           <a:p>
             <a:r>
-              <a:t>SPRECHTEXT: «Zusätzlich lassen wir das Sprachmodell die zehn schlimmsten Tage einordnen — also eine mögliche Ursache vorschlagen. Wir kommunizieren klar, dass das Hypothesen sind, keine bewiesenen Fakten.»</a:t>
-            </a:r>
-          </a:p>
-          <a:p/>
-          <a:p>
-            <a:r>
-              <a:t>BEGRIFFE EINFACH:</a:t>
-            </a:r>
-          </a:p>
-          <a:p>
-            <a:r>
-              <a:t>• 'Temperatur' beim Sprachmodell = Kreativitäts-Regler von 0 bis 1. Niedrig (0.2) = vorsichtig, faktentreu, wenig Fantasie. Genau das wollen wir hier.</a:t>
-            </a:r>
-          </a:p>
-          <a:p>
-            <a:r>
-              <a:t>• 'Feste Taxonomie' = wir geben eine vorgegebene Liste möglicher Ursachen vor, statt das Modell frei raten zu lassen.</a:t>
-            </a:r>
-          </a:p>
-          <a:p>
-            <a:r>
-              <a:t>• 'Konfidenz' = das Modell gibt selbst an, wie sicher es ist (hoch/mittel/niedrig). Achtung: das ist eine Selbsteinschätzung, nicht kalibriert.</a:t>
-            </a:r>
-          </a:p>
-          <a:p/>
-          <a:p>
-            <a:r>
-              <a:t>MÖGLICHE FRAGE: 'Ist das wissenschaftlich?' — Als qualitative Ergänzung ja, solange man es ehrlich als Hypothese kennzeichnet — was wir tun.</a:t>
+              <a:t>Der emotionale Aufhänger. Hier laut die zwei Sätze vorlesen — das gibt der Demo einen roten Faden. Dann auf die App wechseln: «Schauen wir, was die App dazu sagt.»</a:t>
             </a:r>
           </a:p>
         </p:txBody>
@@ -934,7 +643,7 @@
             <a:spLocks noGrp="1"/>
           </p:cNvSpPr>
           <p:nvPr>
-            <p:ph type="sldNum" idx="5" sz="quarter"/>
+            <p:ph type="sldNum" sz="quarter" idx="5"/>
           </p:nvPr>
         </p:nvSpPr>
         <p:spPr/>
@@ -948,7 +657,7 @@
 </file>
 
 <file path=ppt/notesSlides/notesSlide14.xml><?xml version="1.0" encoding="utf-8"?>
-<p:notes xmlns:a="http://schemas.openxmlformats.org/drawingml/2006/main" xmlns:p="http://schemas.openxmlformats.org/presentationml/2006/main" xmlns:r="http://schemas.openxmlformats.org/officeDocument/2006/relationships">
+<p:notes xmlns:a="http://schemas.openxmlformats.org/drawingml/2006/main" xmlns:r="http://schemas.openxmlformats.org/officeDocument/2006/relationships" xmlns:p="http://schemas.openxmlformats.org/presentationml/2006/main">
   <p:cSld>
     <p:spTree>
       <p:nvGrpSpPr>
@@ -968,7 +677,7 @@
         <p:nvSpPr>
           <p:cNvPr id="2" name="Slide Image Placeholder 1"/>
           <p:cNvSpPr>
-            <a:spLocks noGrp="1"/>
+            <a:spLocks noGrp="1" noRot="1" noChangeAspect="1"/>
           </p:cNvSpPr>
           <p:nvPr>
             <p:ph type="sldImg" idx="2"/>
@@ -983,7 +692,7 @@
             <a:spLocks noGrp="1"/>
           </p:cNvSpPr>
           <p:nvPr>
-            <p:ph type="body" idx="3" sz="quarter"/>
+            <p:ph type="body" sz="quarter" idx="3"/>
           </p:nvPr>
         </p:nvSpPr>
         <p:spPr/>
@@ -992,34 +701,7 @@
           <a:lstStyle/>
           <a:p>
             <a:r>
-              <a:t>SPRECHTEXT: «Zur Ehrlichkeit gehören die Grenzen. Der wichtigste Punkt: unsere Beobachtungen sind nicht unabhängig voneinander. Das macht rohe p-Werte zu optimistisch — deshalb der Tagesmittel-Gegencheck und der Fokus auf Effektstärken.»</a:t>
-            </a:r>
-          </a:p>
-          <a:p/>
-          <a:p>
-            <a:r>
-              <a:t>BEGRIFFE EINFACH:</a:t>
-            </a:r>
-          </a:p>
-          <a:p>
-            <a:r>
-              <a:t>• Pseudoreplikation = man tut so, als hätte man Millionen unabhängige Messungen, obwohl viele zusammenhängen (derselbe Zug an vielen Halten). Dann wirken Ergebnisse sicherer als sie sind.</a:t>
-            </a:r>
-          </a:p>
-          <a:p>
-            <a:r>
-              <a:t>• Saisonalität = jahreszeitliche Muster; wir haben nur Frühling, also keine Aussage über Winter.</a:t>
-            </a:r>
-          </a:p>
-          <a:p>
-            <a:r>
-              <a:t>• Korrelation ≠ Kausalität = zwei Dinge hängen zusammen, heisst nicht, dass eins das andere VERURSACHT (z. B. Sturm UND Bauarbeiten am selben Tag).</a:t>
-            </a:r>
-          </a:p>
-          <a:p/>
-          <a:p>
-            <a:r>
-              <a:t>Diese Slide ist ein PLUS, kein Schwächeeingeständnis: Wer Limitationen sauber benennt, zeigt methodisches Verständnis.</a:t>
+              <a:t>LIVE-DEMO Karte: 1) App ist offen, Ladeanimation kurz zeigen (Grossi-Reaktion einbauen). 2) «Jeder Punkt ein Bahnhof, Farbe zeigt die mittlere Verspätung.» 3) Den Regler 'Nur Hotspots' hochziehen — Grenzbahnhöfe bleiben. 4) Auf Zürich HB und Bern klicken, Verspätung vergleichen: für den Umstieg ist tendenziell einer ruhiger. Diese Folie ist der Fallback, wenn die Live-Demo hakt.</a:t>
             </a:r>
           </a:p>
         </p:txBody>
@@ -1031,7 +713,7 @@
             <a:spLocks noGrp="1"/>
           </p:cNvSpPr>
           <p:nvPr>
-            <p:ph type="sldNum" idx="5" sz="quarter"/>
+            <p:ph type="sldNum" sz="quarter" idx="5"/>
           </p:nvPr>
         </p:nvSpPr>
         <p:spPr/>
@@ -1045,7 +727,7 @@
 </file>
 
 <file path=ppt/notesSlides/notesSlide15.xml><?xml version="1.0" encoding="utf-8"?>
-<p:notes xmlns:a="http://schemas.openxmlformats.org/drawingml/2006/main" xmlns:p="http://schemas.openxmlformats.org/presentationml/2006/main" xmlns:r="http://schemas.openxmlformats.org/officeDocument/2006/relationships">
+<p:notes xmlns:a="http://schemas.openxmlformats.org/drawingml/2006/main" xmlns:r="http://schemas.openxmlformats.org/officeDocument/2006/relationships" xmlns:p="http://schemas.openxmlformats.org/presentationml/2006/main">
   <p:cSld>
     <p:spTree>
       <p:nvGrpSpPr>
@@ -1065,7 +747,7 @@
         <p:nvSpPr>
           <p:cNvPr id="2" name="Slide Image Placeholder 1"/>
           <p:cNvSpPr>
-            <a:spLocks noGrp="1"/>
+            <a:spLocks noGrp="1" noRot="1" noChangeAspect="1"/>
           </p:cNvSpPr>
           <p:nvPr>
             <p:ph type="sldImg" idx="2"/>
@@ -1080,7 +762,7 @@
             <a:spLocks noGrp="1"/>
           </p:cNvSpPr>
           <p:nvPr>
-            <p:ph type="body" idx="3" sz="quarter"/>
+            <p:ph type="body" sz="quarter" idx="3"/>
           </p:nvPr>
         </p:nvSpPr>
         <p:spPr/>
@@ -1089,13 +771,7 @@
           <a:lstStyle/>
           <a:p>
             <a:r>
-              <a:t>SPRECHTEXT: «Zusammengefasst: Die SBB ist sehr pünktlich. Die Effekte, die wir finden, sind echt, aber klein. Der grösste Teil der Verspätung ist Zufall im Einzelfall. Und die schlimmsten Bahnhöfe liegen an der Grenze. Unser Beitrag ist, diese Daten transparent und interaktiv zugänglich zu machen.»</a:t>
-            </a:r>
-          </a:p>
-          <a:p/>
-          <a:p>
-            <a:r>
-              <a:t>Das ist die Stelle, an der die rote Linie zusammenläuft: ehrlicher Umgang mit kleinen Effekten ist die methodische Stärke der Arbeit. Mit Selbstvertrauen sagen.</a:t>
+              <a:t>LIVE-DEMO Tageszeit: 1) Heatmap zeigen, «dunkler = verspäteter». 2) Erklären, dass sie ein ruhiges Fenster ausserhalb der Rush-Hour suchen, aber nicht nachts. 3) Wunschdatum im Filter darunter eingeben. 4) Erwähnen: 2-Tages-Reise mit Übernachtung, weil die Strecke für Grossi sonst zu lang wäre.</a:t>
             </a:r>
           </a:p>
         </p:txBody>
@@ -1107,7 +783,7 @@
             <a:spLocks noGrp="1"/>
           </p:cNvSpPr>
           <p:nvPr>
-            <p:ph type="sldNum" idx="5" sz="quarter"/>
+            <p:ph type="sldNum" sz="quarter" idx="5"/>
           </p:nvPr>
         </p:nvSpPr>
         <p:spPr/>
@@ -1121,7 +797,7 @@
 </file>
 
 <file path=ppt/notesSlides/notesSlide16.xml><?xml version="1.0" encoding="utf-8"?>
-<p:notes xmlns:a="http://schemas.openxmlformats.org/drawingml/2006/main" xmlns:p="http://schemas.openxmlformats.org/presentationml/2006/main" xmlns:r="http://schemas.openxmlformats.org/officeDocument/2006/relationships">
+<p:notes xmlns:a="http://schemas.openxmlformats.org/drawingml/2006/main" xmlns:r="http://schemas.openxmlformats.org/officeDocument/2006/relationships" xmlns:p="http://schemas.openxmlformats.org/presentationml/2006/main">
   <p:cSld>
     <p:spTree>
       <p:nvGrpSpPr>
@@ -1141,7 +817,7 @@
         <p:nvSpPr>
           <p:cNvPr id="2" name="Slide Image Placeholder 1"/>
           <p:cNvSpPr>
-            <a:spLocks noGrp="1"/>
+            <a:spLocks noGrp="1" noRot="1" noChangeAspect="1"/>
           </p:cNvSpPr>
           <p:nvPr>
             <p:ph type="sldImg" idx="2"/>
@@ -1156,7 +832,7 @@
             <a:spLocks noGrp="1"/>
           </p:cNvSpPr>
           <p:nvPr>
-            <p:ph type="body" idx="3" sz="quarter"/>
+            <p:ph type="body" sz="quarter" idx="3"/>
           </p:nvPr>
         </p:nvSpPr>
         <p:spPr/>
@@ -1165,13 +841,7 @@
           <a:lstStyle/>
           <a:p>
             <a:r>
-              <a:t>SPRECHTEXT: «Alle Daten sind offen, der gesamte Code liegt öffentlich auf GitHub und ist reproduzierbar. Vielen Dank fürs Zuschauen.»</a:t>
-            </a:r>
-          </a:p>
-          <a:p/>
-          <a:p>
-            <a:r>
-              <a:t>Ruhig abschliessen, kurze Pause am Ende lassen.</a:t>
+              <a:t>LIVE-DEMO Pendler-Insight: 1) Zuerst eine vorgefertigte Bubble-Frage anklicken — Ladeanimation (Zug) zeigen. 2) Antwort vorlesen, betonen: das Modell nutzt NUR unsere Statistik-Daten (kein Halluzinieren), Transparenz-Aufklapper kurz zeigen. 3) Dann selbst eine eigene Frage tippen, z.B. zur Strecke Winterthur–Lausanne. 4) Zum Abschluss kurz in den Über-Tab: Datenquellen + CC-BY-Lizenzen — zeigt Wissenschaftlichkeit und Transparenz. Danach Übergang zurück zu den Schlussfolgerungen.</a:t>
             </a:r>
           </a:p>
         </p:txBody>
@@ -1183,7 +853,7 @@
             <a:spLocks noGrp="1"/>
           </p:cNvSpPr>
           <p:nvPr>
-            <p:ph type="sldNum" idx="5" sz="quarter"/>
+            <p:ph type="sldNum" sz="quarter" idx="5"/>
           </p:nvPr>
         </p:nvSpPr>
         <p:spPr/>
@@ -1196,8 +866,8 @@
 </p:notes>
 </file>
 
-<file path=ppt/notesSlides/notesSlide2.xml><?xml version="1.0" encoding="utf-8"?>
-<p:notes xmlns:a="http://schemas.openxmlformats.org/drawingml/2006/main" xmlns:p="http://schemas.openxmlformats.org/presentationml/2006/main" xmlns:r="http://schemas.openxmlformats.org/officeDocument/2006/relationships">
+<file path=ppt/notesSlides/notesSlide17.xml><?xml version="1.0" encoding="utf-8"?>
+<p:notes xmlns:a="http://schemas.openxmlformats.org/drawingml/2006/main" xmlns:r="http://schemas.openxmlformats.org/officeDocument/2006/relationships" xmlns:p="http://schemas.openxmlformats.org/presentationml/2006/main">
   <p:cSld>
     <p:spTree>
       <p:nvGrpSpPr>
@@ -1217,7 +887,7 @@
         <p:nvSpPr>
           <p:cNvPr id="2" name="Slide Image Placeholder 1"/>
           <p:cNvSpPr>
-            <a:spLocks noGrp="1"/>
+            <a:spLocks noGrp="1" noRot="1" noChangeAspect="1"/>
           </p:cNvSpPr>
           <p:nvPr>
             <p:ph type="sldImg" idx="2"/>
@@ -1232,7 +902,7 @@
             <a:spLocks noGrp="1"/>
           </p:cNvSpPr>
           <p:nvPr>
-            <p:ph type="body" idx="3" sz="quarter"/>
+            <p:ph type="body" sz="quarter" idx="3"/>
           </p:nvPr>
         </p:nvSpPr>
         <p:spPr/>
@@ -1241,13 +911,43 @@
           <a:lstStyle/>
           <a:p>
             <a:r>
-              <a:t>SPRECHTEXT: «Kurz der Fahrplan: erst das Warum und die Datenbasis, dann die Methodik, dann die Ergebnisse, eine Live-Demo, und am Schluss ehrlich die Grenzen.»</a:t>
-            </a:r>
-          </a:p>
-          <a:p/>
-          <a:p>
-            <a:r>
-              <a:t>Nicht vorlesen — nur in einem Satz überfliegen. Schwerpunkt ansagen: Ergebnisse und Demo.</a:t>
+              <a:t>LIVE-DEMO (nicht nur die Folie zeigen, App wirklich bedienen!):</a:t>
+            </a:r>
+          </a:p>
+          <a:p>
+            <a:r>
+              <a:t>1. App vorher starten: 'streamlit run app/streamlit_app.py'.</a:t>
+            </a:r>
+          </a:p>
+          <a:p>
+            <a:r>
+              <a:t>2. «Jeder Punkt ist ein Bahnhof, die Farbe zeigt die mittlere Verspätung.»</a:t>
+            </a:r>
+          </a:p>
+          <a:p>
+            <a:r>
+              <a:t>3. Den rechten Regler 'Nur Hotspots' langsam hochziehen — die Karte dünnt aus, bis nur noch die rotesten Bahnhöfe übrig sind.</a:t>
+            </a:r>
+          </a:p>
+          <a:p>
+            <a:r>
+              <a:t>4. «Auffällig: die Hotspots liegen an den Grenzen — Buchs SG, St. Margrethen — weil internationale Züge ihre Verspätung importieren.»</a:t>
+            </a:r>
+          </a:p>
+          <a:p>
+            <a:endParaRPr/>
+          </a:p>
+          <a:p>
+            <a:r>
+              <a:t>BEGRIFFE: 'Folium' = Python-Bibliothek für interaktive Landkarten. Der linke Regler blendet Bahnhöfe mit zu wenigen Daten aus (statistisch unsicher).</a:t>
+            </a:r>
+          </a:p>
+          <a:p>
+            <a:endParaRPr/>
+          </a:p>
+          <a:p>
+            <a:r>
+              <a:t>Falls die Live-Demo hakt: dieser Screenshot dient als Fallback.</a:t>
             </a:r>
           </a:p>
         </p:txBody>
@@ -1259,7 +959,7 @@
             <a:spLocks noGrp="1"/>
           </p:cNvSpPr>
           <p:nvPr>
-            <p:ph type="sldNum" idx="5" sz="quarter"/>
+            <p:ph type="sldNum" sz="quarter" idx="5"/>
           </p:nvPr>
         </p:nvSpPr>
         <p:spPr/>
@@ -1272,8 +972,8 @@
 </p:notes>
 </file>
 
-<file path=ppt/notesSlides/notesSlide3.xml><?xml version="1.0" encoding="utf-8"?>
-<p:notes xmlns:a="http://schemas.openxmlformats.org/drawingml/2006/main" xmlns:p="http://schemas.openxmlformats.org/presentationml/2006/main" xmlns:r="http://schemas.openxmlformats.org/officeDocument/2006/relationships">
+<file path=ppt/notesSlides/notesSlide18.xml><?xml version="1.0" encoding="utf-8"?>
+<p:notes xmlns:a="http://schemas.openxmlformats.org/drawingml/2006/main" xmlns:r="http://schemas.openxmlformats.org/officeDocument/2006/relationships" xmlns:p="http://schemas.openxmlformats.org/presentationml/2006/main">
   <p:cSld>
     <p:spTree>
       <p:nvGrpSpPr>
@@ -1293,7 +993,7 @@
         <p:nvSpPr>
           <p:cNvPr id="2" name="Slide Image Placeholder 1"/>
           <p:cNvSpPr>
-            <a:spLocks noGrp="1"/>
+            <a:spLocks noGrp="1" noRot="1" noChangeAspect="1"/>
           </p:cNvSpPr>
           <p:nvPr>
             <p:ph type="sldImg" idx="2"/>
@@ -1308,7 +1008,7 @@
             <a:spLocks noGrp="1"/>
           </p:cNvSpPr>
           <p:nvPr>
-            <p:ph type="body" idx="3" sz="quarter"/>
+            <p:ph type="body" sz="quarter" idx="3"/>
           </p:nvPr>
         </p:nvSpPr>
         <p:spPr/>
@@ -1317,19 +1017,53 @@
           <a:lstStyle/>
           <a:p>
             <a:r>
-              <a:t>SPRECHTEXT: «Die SBB nennt eine Gesamt-Pünktlichkeit von 92.5 Prozent. Das ist ein Durchschnitt über alles und sagt mir wenig, wenn ich wissen will, wann und wo es konkret hakt. Deshalb diese vier Fragen.»</a:t>
-            </a:r>
-          </a:p>
-          <a:p/>
-          <a:p>
-            <a:r>
-              <a:t>HINTERGRUND, falls gefragt: 'Pünktlich' heisst bei der SBB &lt;3 Minuten Verspätung. Genau diese 3-Minuten-Schwelle benutzen wir auch.</a:t>
-            </a:r>
-          </a:p>
-          <a:p/>
-          <a:p>
-            <a:r>
-              <a:t>Die vier Fragen sind unser roter Faden — jede wird später mit einem eigenen Test beantwortet.</a:t>
+              <a:t>LIVE-DEMO:</a:t>
+            </a:r>
+          </a:p>
+          <a:p>
+            <a:r>
+              <a:t>1. Eine Beispielfrage anklicken oder tippen, z. B. 'Wann erwische ich am ehesten einen pünktlichen Zug?'.</a:t>
+            </a:r>
+          </a:p>
+          <a:p>
+            <a:r>
+              <a:t>2. «Das Sprachmodell bekommt unsere Statistik als Kontext mitgeliefert und darf NUR damit antworten — es soll nichts erfinden.»</a:t>
+            </a:r>
+          </a:p>
+          <a:p>
+            <a:r>
+              <a:t>3. Auf den Ausklapp-Bereich 'Welche Daten hat das Modell gesehen?' zeigen — das macht es transparent und überprüfbar.</a:t>
+            </a:r>
+          </a:p>
+          <a:p>
+            <a:endParaRPr/>
+          </a:p>
+          <a:p>
+            <a:r>
+              <a:t>BEGRIFFE EINFACH:</a:t>
+            </a:r>
+          </a:p>
+          <a:p>
+            <a:r>
+              <a:t>• Sprachmodell / LLM = ein KI-Modell (hier Claude Sonnet 4.6), das Texte versteht und formuliert.</a:t>
+            </a:r>
+          </a:p>
+          <a:p>
+            <a:r>
+              <a:t>• 'Kontext mitgeben' = wir hängen die relevanten Zahlen an die Frage an, damit die Antwort auf unseren Daten basiert und nicht auf Allgemeinwissen.</a:t>
+            </a:r>
+          </a:p>
+          <a:p>
+            <a:r>
+              <a:t>• 'Halluzination' = wenn ein Modell plausibel klingende, aber falsche Dinge erfindet. Wir verhindern das durch klare Anweisung und mitgelieferte Fakten.</a:t>
+            </a:r>
+          </a:p>
+          <a:p>
+            <a:endParaRPr/>
+          </a:p>
+          <a:p>
+            <a:r>
+              <a:t>MÖGLICHE FRAGE: 'Woher weiss man, dass es nicht doch erfindet?' — Wir geben die Datenbasis transparent aus und weisen das Modell explizit an, nur vorhandene Zahlen zu nennen.</a:t>
             </a:r>
           </a:p>
         </p:txBody>
@@ -1341,7 +1075,7 @@
             <a:spLocks noGrp="1"/>
           </p:cNvSpPr>
           <p:nvPr>
-            <p:ph type="sldNum" idx="5" sz="quarter"/>
+            <p:ph type="sldNum" sz="quarter" idx="5"/>
           </p:nvPr>
         </p:nvSpPr>
         <p:spPr/>
@@ -1354,8 +1088,8 @@
 </p:notes>
 </file>
 
-<file path=ppt/notesSlides/notesSlide4.xml><?xml version="1.0" encoding="utf-8"?>
-<p:notes xmlns:a="http://schemas.openxmlformats.org/drawingml/2006/main" xmlns:p="http://schemas.openxmlformats.org/presentationml/2006/main" xmlns:r="http://schemas.openxmlformats.org/officeDocument/2006/relationships">
+<file path=ppt/notesSlides/notesSlide19.xml><?xml version="1.0" encoding="utf-8"?>
+<p:notes xmlns:a="http://schemas.openxmlformats.org/drawingml/2006/main" xmlns:r="http://schemas.openxmlformats.org/officeDocument/2006/relationships" xmlns:p="http://schemas.openxmlformats.org/presentationml/2006/main">
   <p:cSld>
     <p:spTree>
       <p:nvGrpSpPr>
@@ -1375,7 +1109,7 @@
         <p:nvSpPr>
           <p:cNvPr id="2" name="Slide Image Placeholder 1"/>
           <p:cNvSpPr>
-            <a:spLocks noGrp="1"/>
+            <a:spLocks noGrp="1" noRot="1" noChangeAspect="1"/>
           </p:cNvSpPr>
           <p:nvPr>
             <p:ph type="sldImg" idx="2"/>
@@ -1390,7 +1124,7 @@
             <a:spLocks noGrp="1"/>
           </p:cNvSpPr>
           <p:nvPr>
-            <p:ph type="body" idx="3" sz="quarter"/>
+            <p:ph type="body" sz="quarter" idx="3"/>
           </p:nvPr>
         </p:nvSpPr>
         <p:spPr/>
@@ -1399,10 +1133,12 @@
           <a:lstStyle/>
           <a:p>
             <a:r>
-              <a:t>SPRECHTEXT: «Basis sind 2.74 Millionen einzelne Zug-Halte über 48 Tage, aus drei offenen Quellen. Wir haben uns bewusst für Detailtiefe statt lange Zeitspanne entschieden: lieber 48 Tage ganz fein als Jahre an groben Summen — nur so kann man nach Stunde, Bahnhof und Wetter auswerten.»</a:t>
-            </a:r>
-          </a:p>
-          <a:p/>
+              <a:t>SPRECHTEXT: «Zusätzlich lassen wir das Sprachmodell die zehn schlimmsten Tage einordnen — also eine mögliche Ursache vorschlagen. Wir kommunizieren klar, dass das Hypothesen sind, keine bewiesenen Fakten.»</a:t>
+            </a:r>
+          </a:p>
+          <a:p>
+            <a:endParaRPr/>
+          </a:p>
           <a:p>
             <a:r>
               <a:t>BEGRIFFE EINFACH:</a:t>
@@ -1410,23 +1146,25 @@
           </a:p>
           <a:p>
             <a:r>
-              <a:t>• 'Halt' = ein einzelner Halt eines Zuges an einem Bahnhof. Ein Zug auf seiner Fahrt erzeugt viele Halte.</a:t>
-            </a:r>
-          </a:p>
-          <a:p>
-            <a:r>
-              <a:t>• 'Status REAL' = tatsächlich gemessene Ankunftszeit (keine Prognose).</a:t>
-            </a:r>
-          </a:p>
-          <a:p>
-            <a:r>
-              <a:t>• 'Betriebstag' = der Fahrplantag; ein Nachtzug um 00:30 zählt zum Vortag.</a:t>
-            </a:r>
-          </a:p>
-          <a:p/>
-          <a:p>
-            <a:r>
-              <a:t>MÖGLICHE FRAGE: 'Warum nur 48 Tage?' — Die kompletten Daten von 2019–2025 wären rund 1.1 Terabyte. 48 Tage in voller Auflösung sind aussagekräftiger für unsere Fragen als grobe Jahres-Aggregate.</a:t>
+              <a:t>• 'Temperatur' beim Sprachmodell = Kreativitäts-Regler von 0 bis 1. Niedrig (0.2) = vorsichtig, faktentreu, wenig Fantasie. Genau das wollen wir hier.</a:t>
+            </a:r>
+          </a:p>
+          <a:p>
+            <a:r>
+              <a:t>• 'Feste Taxonomie' = wir geben eine vorgegebene Liste möglicher Ursachen vor, statt das Modell frei raten zu lassen.</a:t>
+            </a:r>
+          </a:p>
+          <a:p>
+            <a:r>
+              <a:t>• 'Konfidenz' = das Modell gibt selbst an, wie sicher es ist (hoch/mittel/niedrig). Achtung: das ist eine Selbsteinschätzung, nicht kalibriert.</a:t>
+            </a:r>
+          </a:p>
+          <a:p>
+            <a:endParaRPr/>
+          </a:p>
+          <a:p>
+            <a:r>
+              <a:t>MÖGLICHE FRAGE: 'Ist das wissenschaftlich?' — Als qualitative Ergänzung ja, solange man es ehrlich als Hypothese kennzeichnet — was wir tun.</a:t>
             </a:r>
           </a:p>
         </p:txBody>
@@ -1438,7 +1176,7 @@
             <a:spLocks noGrp="1"/>
           </p:cNvSpPr>
           <p:nvPr>
-            <p:ph type="sldNum" idx="5" sz="quarter"/>
+            <p:ph type="sldNum" sz="quarter" idx="5"/>
           </p:nvPr>
         </p:nvSpPr>
         <p:spPr/>
@@ -1451,8 +1189,8 @@
 </p:notes>
 </file>
 
-<file path=ppt/notesSlides/notesSlide5.xml><?xml version="1.0" encoding="utf-8"?>
-<p:notes xmlns:a="http://schemas.openxmlformats.org/drawingml/2006/main" xmlns:p="http://schemas.openxmlformats.org/presentationml/2006/main" xmlns:r="http://schemas.openxmlformats.org/officeDocument/2006/relationships">
+<file path=ppt/notesSlides/notesSlide2.xml><?xml version="1.0" encoding="utf-8"?>
+<p:notes xmlns:a="http://schemas.openxmlformats.org/drawingml/2006/main" xmlns:r="http://schemas.openxmlformats.org/officeDocument/2006/relationships" xmlns:p="http://schemas.openxmlformats.org/presentationml/2006/main">
   <p:cSld>
     <p:spTree>
       <p:nvGrpSpPr>
@@ -1472,7 +1210,7 @@
         <p:nvSpPr>
           <p:cNvPr id="2" name="Slide Image Placeholder 1"/>
           <p:cNvSpPr>
-            <a:spLocks noGrp="1"/>
+            <a:spLocks noGrp="1" noRot="1" noChangeAspect="1"/>
           </p:cNvSpPr>
           <p:nvPr>
             <p:ph type="sldImg" idx="2"/>
@@ -1487,7 +1225,7 @@
             <a:spLocks noGrp="1"/>
           </p:cNvSpPr>
           <p:nvPr>
-            <p:ph type="body" idx="3" sz="quarter"/>
+            <p:ph type="body" sz="quarter" idx="3"/>
           </p:nvPr>
         </p:nvSpPr>
         <p:spPr/>
@@ -1496,29 +1234,15 @@
           <a:lstStyle/>
           <a:p>
             <a:r>
-              <a:t>SPRECHTEXT: «Die Daten laufen durch eine Pipeline in eine SQLite-Datenbank und werden pro Halt um Zeit- und Wetter-Infos ergänzt. Darauf rechnen wir vier Tests. Wichtig: Wir berichten nie nur den p-Wert, sondern immer auch die Effektstärke.»</a:t>
-            </a:r>
-          </a:p>
-          <a:p/>
-          <a:p>
-            <a:r>
-              <a:t>DAS WICHTIGSTE KONZEPT (unbedingt verstehen):</a:t>
-            </a:r>
-          </a:p>
-          <a:p>
-            <a:r>
-              <a:t>• p-Wert = Wie wahrscheinlich wäre dieses Ergebnis, wenn es in Wirklichkeit KEINEN Unterschied gäbe? Klein (&lt; 0.05) heisst 'wahrscheinlich kein Zufall' = statistisch signifikant.</a:t>
-            </a:r>
-          </a:p>
-          <a:p>
-            <a:r>
-              <a:t>• ABER: Bei riesigen Datenmengen wird fast ALLES signifikant, auch winzige Unterschiede. Deshalb die Effektstärke: sie misst, wie GROSS der Unterschied praktisch ist. Genau das ist unsere Kernbotschaft.</a:t>
-            </a:r>
-          </a:p>
-          <a:p/>
-          <a:p>
-            <a:r>
-              <a:t>Die vier Tests sind nur Werkzeuge für je eine der vier Fragen — Details kommen auf den nächsten Slides.</a:t>
+              <a:t>SPRECHTEXT: «Kurz der Fahrplan: erst das Warum und die Datenbasis, dann die Methodik, dann die Ergebnisse, eine Live-Demo, und am Schluss ehrlich die Grenzen.»</a:t>
+            </a:r>
+          </a:p>
+          <a:p>
+            <a:endParaRPr/>
+          </a:p>
+          <a:p>
+            <a:r>
+              <a:t>Nicht vorlesen — nur in einem Satz überfliegen. Schwerpunkt ansagen: Ergebnisse und Demo.</a:t>
             </a:r>
           </a:p>
         </p:txBody>
@@ -1530,7 +1254,7 @@
             <a:spLocks noGrp="1"/>
           </p:cNvSpPr>
           <p:nvPr>
-            <p:ph type="sldNum" idx="5" sz="quarter"/>
+            <p:ph type="sldNum" sz="quarter" idx="5"/>
           </p:nvPr>
         </p:nvSpPr>
         <p:spPr/>
@@ -1543,8 +1267,8 @@
 </p:notes>
 </file>
 
-<file path=ppt/notesSlides/notesSlide6.xml><?xml version="1.0" encoding="utf-8"?>
-<p:notes xmlns:a="http://schemas.openxmlformats.org/drawingml/2006/main" xmlns:p="http://schemas.openxmlformats.org/presentationml/2006/main" xmlns:r="http://schemas.openxmlformats.org/officeDocument/2006/relationships">
+<file path=ppt/notesSlides/notesSlide20.xml><?xml version="1.0" encoding="utf-8"?>
+<p:notes xmlns:a="http://schemas.openxmlformats.org/drawingml/2006/main" xmlns:r="http://schemas.openxmlformats.org/officeDocument/2006/relationships" xmlns:p="http://schemas.openxmlformats.org/presentationml/2006/main">
   <p:cSld>
     <p:spTree>
       <p:nvGrpSpPr>
@@ -1564,7 +1288,7 @@
         <p:nvSpPr>
           <p:cNvPr id="2" name="Slide Image Placeholder 1"/>
           <p:cNvSpPr>
-            <a:spLocks noGrp="1"/>
+            <a:spLocks noGrp="1" noRot="1" noChangeAspect="1"/>
           </p:cNvSpPr>
           <p:nvPr>
             <p:ph type="sldImg" idx="2"/>
@@ -1579,7 +1303,7 @@
             <a:spLocks noGrp="1"/>
           </p:cNvSpPr>
           <p:nvPr>
-            <p:ph type="body" idx="3" sz="quarter"/>
+            <p:ph type="body" sz="quarter" idx="3"/>
           </p:nvPr>
         </p:nvSpPr>
         <p:spPr/>
@@ -1588,10 +1312,12 @@
           <a:lstStyle/>
           <a:p>
             <a:r>
-              <a:t>SPRECHTEXT: «Werktage sind im Schnitt rund 15 Sekunden unpünktlicher als Wochenenden. Statistisch ist das glasklar. Aber 15 Sekunden merkt im Alltag niemand — die Effektstärke Cohen's d ist mit 0.12 klein. Genau dieser Unterschied zwischen 'signifikant' und 'relevant' zieht sich durch unsere ganze Arbeit.»</a:t>
-            </a:r>
-          </a:p>
-          <a:p/>
+              <a:t>SPRECHTEXT: «Zur Ehrlichkeit gehören die Grenzen. Der wichtigste Punkt: unsere Beobachtungen sind nicht unabhängig voneinander. Das macht rohe p-Werte zu optimistisch — deshalb der Tagesmittel-Gegencheck und der Fokus auf Effektstärken.»</a:t>
+            </a:r>
+          </a:p>
+          <a:p>
+            <a:endParaRPr/>
+          </a:p>
           <a:p>
             <a:r>
               <a:t>BEGRIFFE EINFACH:</a:t>
@@ -1599,28 +1325,25 @@
           </a:p>
           <a:p>
             <a:r>
-              <a:t>• Welch-t-Test = vergleicht zwei Mittelwerte und verträgt, dass die beiden Gruppen unterschiedlich stark streuen.</a:t>
-            </a:r>
-          </a:p>
-          <a:p>
-            <a:r>
-              <a:t>• Cohen's d = wie gross der Unterschied in 'Streuungs-Einheiten' ist. Faustregel: 0.2 klein, 0.5 mittel, 0.8 gross. Unser 0.12 ist also sehr klein.</a:t>
-            </a:r>
-          </a:p>
-          <a:p>
-            <a:r>
-              <a:t>• Konfidenzintervall = der Bereich, in dem der wahre Wert mit 95 % Sicherheit liegt. Hier sehr eng, weil wir so viele Daten haben.</a:t>
-            </a:r>
-          </a:p>
-          <a:p>
-            <a:r>
-              <a:t>• Mann-Whitney = ein Test, der keine Normalverteilung voraussetzt (arbeitet mit Rängen statt Werten) — als Gegenprobe.</a:t>
-            </a:r>
-          </a:p>
-          <a:p/>
-          <a:p>
-            <a:r>
-              <a:t>WARUM TAGESMITTEL? Unsere Millionen Halte sind nicht unabhängig (derselbe Zug, Bahnhof, Tag). Deshalb haben wir den Test auch nur auf den 48 Tagesdurchschnitten gerechnet — der Effekt bleibt. Das zeigt: er ist echt, kein Artefakt der grossen Zahl.</a:t>
+              <a:t>• Pseudoreplikation = man tut so, als hätte man Millionen unabhängige Messungen, obwohl viele zusammenhängen (derselbe Zug an vielen Halten). Dann wirken Ergebnisse sicherer als sie sind.</a:t>
+            </a:r>
+          </a:p>
+          <a:p>
+            <a:r>
+              <a:t>• Saisonalität = jahreszeitliche Muster; wir haben nur Frühling, also keine Aussage über Winter.</a:t>
+            </a:r>
+          </a:p>
+          <a:p>
+            <a:r>
+              <a:t>• Korrelation ≠ Kausalität = zwei Dinge hängen zusammen, heisst nicht, dass eins das andere VERURSACHT (z. B. Sturm UND Bauarbeiten am selben Tag).</a:t>
+            </a:r>
+          </a:p>
+          <a:p>
+            <a:endParaRPr/>
+          </a:p>
+          <a:p>
+            <a:r>
+              <a:t>Diese Slide ist ein PLUS, kein Schwächeeingeständnis: Wer Limitationen sauber benennt, zeigt methodisches Verständnis.</a:t>
             </a:r>
           </a:p>
         </p:txBody>
@@ -1632,7 +1355,7 @@
             <a:spLocks noGrp="1"/>
           </p:cNvSpPr>
           <p:nvPr>
-            <p:ph type="sldNum" idx="5" sz="quarter"/>
+            <p:ph type="sldNum" sz="quarter" idx="5"/>
           </p:nvPr>
         </p:nvSpPr>
         <p:spPr/>
@@ -1645,8 +1368,8 @@
 </p:notes>
 </file>
 
-<file path=ppt/notesSlides/notesSlide7.xml><?xml version="1.0" encoding="utf-8"?>
-<p:notes xmlns:a="http://schemas.openxmlformats.org/drawingml/2006/main" xmlns:p="http://schemas.openxmlformats.org/presentationml/2006/main" xmlns:r="http://schemas.openxmlformats.org/officeDocument/2006/relationships">
+<file path=ppt/notesSlides/notesSlide21.xml><?xml version="1.0" encoding="utf-8"?>
+<p:notes xmlns:a="http://schemas.openxmlformats.org/drawingml/2006/main" xmlns:r="http://schemas.openxmlformats.org/officeDocument/2006/relationships" xmlns:p="http://schemas.openxmlformats.org/presentationml/2006/main">
   <p:cSld>
     <p:spTree>
       <p:nvGrpSpPr>
@@ -1666,7 +1389,7 @@
         <p:nvSpPr>
           <p:cNvPr id="2" name="Slide Image Placeholder 1"/>
           <p:cNvSpPr>
-            <a:spLocks noGrp="1"/>
+            <a:spLocks noGrp="1" noRot="1" noChangeAspect="1"/>
           </p:cNvSpPr>
           <p:nvPr>
             <p:ph type="sldImg" idx="2"/>
@@ -1681,7 +1404,7 @@
             <a:spLocks noGrp="1"/>
           </p:cNvSpPr>
           <p:nvPr>
-            <p:ph type="body" idx="3" sz="quarter"/>
+            <p:ph type="body" sz="quarter" idx="3"/>
           </p:nvPr>
         </p:nvSpPr>
         <p:spPr/>
@@ -1690,39 +1413,15 @@
           <a:lstStyle/>
           <a:p>
             <a:r>
-              <a:t>SPRECHTEXT: «Der Linientyp macht einen Unterschied — auch hier hochsignifikant, aber mit η² rund 0.04 wieder ein kleiner Effekt. Die eigentliche Geschichte: Internationale Züge wie TGV, EuroCity und RailJet sammeln im Ausland Verspätung und bringen sie in die Schweiz. Die inländischen IC und IR sind dagegen sehr pünktlich, um die 30 Sekunden.»</a:t>
-            </a:r>
-          </a:p>
-          <a:p/>
-          <a:p>
-            <a:r>
-              <a:t>BEGRIFFE EINFACH:</a:t>
-            </a:r>
-          </a:p>
-          <a:p>
-            <a:r>
-              <a:t>• ANOVA (Varianzanalyse) = vergleicht die Mittelwerte von MEHR als zwei Gruppen gleichzeitig (hier die Linientypen). Antwortet auf: 'Gibt es überhaupt irgendwo einen Unterschied?'</a:t>
-            </a:r>
-          </a:p>
-          <a:p>
-            <a:r>
-              <a:t>• F-Wert = die Test-Kennzahl der ANOVA; gross = die Gruppen unterscheiden sich deutlich relativ zur Streuung innerhalb der Gruppen.</a:t>
-            </a:r>
-          </a:p>
-          <a:p>
-            <a:r>
-              <a:t>• η² (eta-Quadrat) = Effektstärke der ANOVA: Anteil der Verspätungs-Schwankung, der durch den Linientyp erklärt wird. 0.04 = nur ~4 %.</a:t>
-            </a:r>
-          </a:p>
-          <a:p>
-            <a:r>
-              <a:t>• Tukey-HSD (im Notebook) = sagt zusätzlich, WELCHE Paare sich konkret unterscheiden, nicht nur dass es Unterschiede gibt.</a:t>
-            </a:r>
-          </a:p>
-          <a:p/>
-          <a:p>
-            <a:r>
-              <a:t>GRAFIK ERKLÄREN: Boxplot. Die Box ist der Bereich der mittleren 50 % der Werte, der Strich darin der Median. Je höher, desto verspäteter.</a:t>
+              <a:t>SPRECHTEXT: «Zusammengefasst: Die SBB ist sehr pünktlich. Die Effekte, die wir finden, sind echt, aber klein. Der grösste Teil der Verspätung ist Zufall im Einzelfall. Und die schlimmsten Bahnhöfe liegen an der Grenze. Unser Beitrag ist, diese Daten transparent und interaktiv zugänglich zu machen.»</a:t>
+            </a:r>
+          </a:p>
+          <a:p>
+            <a:endParaRPr/>
+          </a:p>
+          <a:p>
+            <a:r>
+              <a:t>Das ist die Stelle, an der die rote Linie zusammenläuft: ehrlicher Umgang mit kleinen Effekten ist die methodische Stärke der Arbeit. Mit Selbstvertrauen sagen.</a:t>
             </a:r>
           </a:p>
         </p:txBody>
@@ -1734,7 +1433,7 @@
             <a:spLocks noGrp="1"/>
           </p:cNvSpPr>
           <p:nvPr>
-            <p:ph type="sldNum" idx="5" sz="quarter"/>
+            <p:ph type="sldNum" sz="quarter" idx="5"/>
           </p:nvPr>
         </p:nvSpPr>
         <p:spPr/>
@@ -1747,8 +1446,8 @@
 </p:notes>
 </file>
 
-<file path=ppt/notesSlides/notesSlide8.xml><?xml version="1.0" encoding="utf-8"?>
-<p:notes xmlns:a="http://schemas.openxmlformats.org/drawingml/2006/main" xmlns:p="http://schemas.openxmlformats.org/presentationml/2006/main" xmlns:r="http://schemas.openxmlformats.org/officeDocument/2006/relationships">
+<file path=ppt/notesSlides/notesSlide22.xml><?xml version="1.0" encoding="utf-8"?>
+<p:notes xmlns:a="http://schemas.openxmlformats.org/drawingml/2006/main" xmlns:r="http://schemas.openxmlformats.org/officeDocument/2006/relationships" xmlns:p="http://schemas.openxmlformats.org/presentationml/2006/main">
   <p:cSld>
     <p:spTree>
       <p:nvGrpSpPr>
@@ -1768,7 +1467,7 @@
         <p:nvSpPr>
           <p:cNvPr id="2" name="Slide Image Placeholder 1"/>
           <p:cNvSpPr>
-            <a:spLocks noGrp="1"/>
+            <a:spLocks noGrp="1" noRot="1" noChangeAspect="1"/>
           </p:cNvSpPr>
           <p:nvPr>
             <p:ph type="sldImg" idx="2"/>
@@ -1783,7 +1482,7 @@
             <a:spLocks noGrp="1"/>
           </p:cNvSpPr>
           <p:nvPr>
-            <p:ph type="body" idx="3" sz="quarter"/>
+            <p:ph type="body" sz="quarter" idx="3"/>
           </p:nvPr>
         </p:nvSpPr>
         <p:spPr/>
@@ -1792,34 +1491,13 @@
           <a:lstStyle/>
           <a:p>
             <a:r>
-              <a:t>SPRECHTEXT: «Wetter wirkt in die erwartete Richtung — mehr Regen, etwas mehr Verspätung. Aber der Zusammenhang ist extrem schwach. Wieder ein Lehrstück: Bei 2.7 Millionen Beobachtungen wird selbst ein winziger Zusammenhang hochsignifikant. Die Korrelation r liegt aber unter 0.04 — praktisch bedeutungslos.»</a:t>
+              <a:t>SPRECHTEXT: «Alle Daten sind offen, der gesamte Code liegt öffentlich auf GitHub und ist reproduzierbar. Vielen Dank fürs Zuschauen.»</a:t>
             </a:r>
           </a:p>
           <a:p/>
           <a:p>
             <a:r>
-              <a:t>BEGRIFFE EINFACH:</a:t>
-            </a:r>
-          </a:p>
-          <a:p>
-            <a:r>
-              <a:t>• Korrelation r = Mass für den Zusammenhang zweier Grössen, zwischen -1 und +1. 0 = kein Zusammenhang, ±1 = perfekter. Unsere Werte ~0.02–0.04 sind quasi null.</a:t>
-            </a:r>
-          </a:p>
-          <a:p>
-            <a:r>
-              <a:t>• Pearson = misst LINEAREN Zusammenhang. Spearman = misst, ob es generell rauf/runter geht (monoton), über Ränge. Dass beide ähnlich klein sind, bestätigt: da ist einfach wenig.</a:t>
-            </a:r>
-          </a:p>
-          <a:p>
-            <a:r>
-              <a:t>• 'erklärt &lt; 0.3 % der Varianz' = r² (das Quadrat von r) als Anteil.</a:t>
-            </a:r>
-          </a:p>
-          <a:p/>
-          <a:p>
-            <a:r>
-              <a:t>MÖGLICHE FRAGE: 'Warum überhaupt zeigen, wenn der Effekt null ist?' — Weil es methodisch ehrlich ist und genau den Unterschied signifikant/relevant demonstriert. Negative bzw. Null-Ergebnisse sauber zu berichten ist Teil guter Wissenschaft.</a:t>
+              <a:t>Ruhig abschliessen, kurze Pause am Ende lassen.</a:t>
             </a:r>
           </a:p>
         </p:txBody>
@@ -1831,7 +1509,7 @@
             <a:spLocks noGrp="1"/>
           </p:cNvSpPr>
           <p:nvPr>
-            <p:ph type="sldNum" idx="5" sz="quarter"/>
+            <p:ph type="sldNum" sz="quarter" idx="5"/>
           </p:nvPr>
         </p:nvSpPr>
         <p:spPr/>
@@ -1844,8 +1522,8 @@
 </p:notes>
 </file>
 
-<file path=ppt/notesSlides/notesSlide9.xml><?xml version="1.0" encoding="utf-8"?>
-<p:notes xmlns:a="http://schemas.openxmlformats.org/drawingml/2006/main" xmlns:p="http://schemas.openxmlformats.org/presentationml/2006/main" xmlns:r="http://schemas.openxmlformats.org/officeDocument/2006/relationships">
+<file path=ppt/notesSlides/notesSlide3.xml><?xml version="1.0" encoding="utf-8"?>
+<p:notes xmlns:a="http://schemas.openxmlformats.org/drawingml/2006/main" xmlns:r="http://schemas.openxmlformats.org/officeDocument/2006/relationships" xmlns:p="http://schemas.openxmlformats.org/presentationml/2006/main">
   <p:cSld>
     <p:spTree>
       <p:nvGrpSpPr>
@@ -1865,7 +1543,7 @@
         <p:nvSpPr>
           <p:cNvPr id="2" name="Slide Image Placeholder 1"/>
           <p:cNvSpPr>
-            <a:spLocks noGrp="1"/>
+            <a:spLocks noGrp="1" noRot="1" noChangeAspect="1"/>
           </p:cNvSpPr>
           <p:nvPr>
             <p:ph type="sldImg" idx="2"/>
@@ -1880,7 +1558,7 @@
             <a:spLocks noGrp="1"/>
           </p:cNvSpPr>
           <p:nvPr>
-            <p:ph type="body" idx="3" sz="quarter"/>
+            <p:ph type="body" sz="quarter" idx="3"/>
           </p:nvPr>
         </p:nvSpPr>
         <p:spPr/>
@@ -1889,44 +1567,23 @@
           <a:lstStyle/>
           <a:p>
             <a:r>
-              <a:t>SPRECHTEXT: «Zum Schluss kombinieren wir alle Faktoren in einem Modell. Es erklärt nur rund 4 Prozent der Verspätung. Das klingt wenig, ist aber eine ehrliche und wichtige Erkenntnis: Verspätung entsteht überwiegend aus einzelnen, zufälligen Ereignissen — Defekte, Störungen — und nicht aus Tag, Linientyp oder Wetter.»</a:t>
-            </a:r>
-          </a:p>
-          <a:p/>
-          <a:p>
-            <a:r>
-              <a:t>BEGRIFFE EINFACH:</a:t>
-            </a:r>
-          </a:p>
-          <a:p>
-            <a:r>
-              <a:t>• OLS-Regression = ein Modell, das die Verspätung gleichzeitig durch mehrere Einflussgrössen (Rush-Hour, Wochenende, Linientyp, Wetter) vorhersagt.</a:t>
-            </a:r>
-          </a:p>
-          <a:p>
-            <a:r>
-              <a:t>• Koeffizient = der Effekt eines Faktors in Sekunden. Beispiel: Rush-Hour +10 s heisst, zur Stosszeit kommen im Schnitt 10 s Verspätung dazu.</a:t>
-            </a:r>
-          </a:p>
-          <a:p>
-            <a:r>
-              <a:t>• R² = Anteil der Verspätungs-Schwankung, den das Modell erklärt. 0.043 = ~4 %. Der Rest ist nicht erklärt = idiosynkratisch (Einzelfälle).</a:t>
-            </a:r>
-          </a:p>
-          <a:p>
-            <a:r>
-              <a:t>• Heteroskedastizität (Breusch-Pagan-Test) = die Streuung der Fehler ist nicht konstant (bei grossen Verspätungen grösser). Wir benennen das offen.</a:t>
-            </a:r>
-          </a:p>
-          <a:p>
-            <a:r>
-              <a:t>• VIF = prüft, ob sich Einflussgrössen gegenseitig zu stark überlappen (Multikollinearität). Bei uns unauffällig.</a:t>
-            </a:r>
-          </a:p>
-          <a:p/>
-          <a:p>
-            <a:r>
-              <a:t>GRAFIK: Residuen-Plot. Jeder Punkt ist ein Halt; x = Vorhersage, y = Fehler. Die Trichterform nach rechts ist genau die Heteroskedastizität.</a:t>
+              <a:t>SPRECHTEXT: «Die SBB nennt eine Gesamt-Pünktlichkeit von 92.5 Prozent. Das ist ein Durchschnitt über alles und sagt mir wenig, wenn ich wissen will, wann und wo es konkret hakt. Deshalb diese vier Fragen.»</a:t>
+            </a:r>
+          </a:p>
+          <a:p>
+            <a:endParaRPr/>
+          </a:p>
+          <a:p>
+            <a:r>
+              <a:t>HINTERGRUND, falls gefragt: 'Pünktlich' heisst bei der SBB &lt;3 Minuten Verspätung. Genau diese 3-Minuten-Schwelle benutzen wir auch.</a:t>
+            </a:r>
+          </a:p>
+          <a:p>
+            <a:endParaRPr/>
+          </a:p>
+          <a:p>
+            <a:r>
+              <a:t>Die vier Fragen sind unser roter Faden — jede wird später mit einem eigenen Test beantwortet.</a:t>
             </a:r>
           </a:p>
         </p:txBody>
@@ -1938,7 +1595,628 @@
             <a:spLocks noGrp="1"/>
           </p:cNvSpPr>
           <p:nvPr>
-            <p:ph type="sldNum" idx="5" sz="quarter"/>
+            <p:ph type="sldNum" sz="quarter" idx="5"/>
+          </p:nvPr>
+        </p:nvSpPr>
+        <p:spPr/>
+      </p:sp>
+    </p:spTree>
+  </p:cSld>
+  <p:clrMapOvr>
+    <a:masterClrMapping/>
+  </p:clrMapOvr>
+</p:notes>
+</file>
+
+<file path=ppt/notesSlides/notesSlide4.xml><?xml version="1.0" encoding="utf-8"?>
+<p:notes xmlns:a="http://schemas.openxmlformats.org/drawingml/2006/main" xmlns:r="http://schemas.openxmlformats.org/officeDocument/2006/relationships" xmlns:p="http://schemas.openxmlformats.org/presentationml/2006/main">
+  <p:cSld>
+    <p:spTree>
+      <p:nvGrpSpPr>
+        <p:cNvPr id="1" name=""/>
+        <p:cNvGrpSpPr/>
+        <p:nvPr/>
+      </p:nvGrpSpPr>
+      <p:grpSpPr>
+        <a:xfrm>
+          <a:off x="0" y="0"/>
+          <a:ext cx="0" cy="0"/>
+          <a:chOff x="0" y="0"/>
+          <a:chExt cx="0" cy="0"/>
+        </a:xfrm>
+      </p:grpSpPr>
+      <p:sp>
+        <p:nvSpPr>
+          <p:cNvPr id="2" name="Slide Image Placeholder 1"/>
+          <p:cNvSpPr>
+            <a:spLocks noGrp="1" noRot="1" noChangeAspect="1"/>
+          </p:cNvSpPr>
+          <p:nvPr>
+            <p:ph type="sldImg" idx="2"/>
+          </p:nvPr>
+        </p:nvSpPr>
+        <p:spPr/>
+      </p:sp>
+      <p:sp>
+        <p:nvSpPr>
+          <p:cNvPr id="3" name="Notes Placeholder 2"/>
+          <p:cNvSpPr>
+            <a:spLocks noGrp="1"/>
+          </p:cNvSpPr>
+          <p:nvPr>
+            <p:ph type="body" sz="quarter" idx="3"/>
+          </p:nvPr>
+        </p:nvSpPr>
+        <p:spPr/>
+        <p:txBody>
+          <a:bodyPr/>
+          <a:lstStyle/>
+          <a:p>
+            <a:r>
+              <a:t>SPRECHTEXT: «Basis sind 2.74 Millionen einzelne Zug-Halte über 48 Tage, aus drei offenen Quellen. Wir haben uns bewusst für Detailtiefe statt lange Zeitspanne entschieden: lieber 48 Tage ganz fein als Jahre an groben Summen — nur so kann man nach Stunde, Bahnhof und Wetter auswerten.»</a:t>
+            </a:r>
+          </a:p>
+          <a:p>
+            <a:endParaRPr/>
+          </a:p>
+          <a:p>
+            <a:r>
+              <a:t>BEGRIFFE EINFACH:</a:t>
+            </a:r>
+          </a:p>
+          <a:p>
+            <a:r>
+              <a:t>• 'Halt' = ein einzelner Halt eines Zuges an einem Bahnhof. Ein Zug auf seiner Fahrt erzeugt viele Halte.</a:t>
+            </a:r>
+          </a:p>
+          <a:p>
+            <a:r>
+              <a:t>• 'Status REAL' = tatsächlich gemessene Ankunftszeit (keine Prognose).</a:t>
+            </a:r>
+          </a:p>
+          <a:p>
+            <a:r>
+              <a:t>• 'Betriebstag' = der Fahrplantag; ein Nachtzug um 00:30 zählt zum Vortag.</a:t>
+            </a:r>
+          </a:p>
+          <a:p>
+            <a:endParaRPr/>
+          </a:p>
+          <a:p>
+            <a:r>
+              <a:t>MÖGLICHE FRAGE: 'Warum nur 48 Tage?' — Die kompletten Daten von 2019–2025 wären rund 1.1 Terabyte. 48 Tage in voller Auflösung sind aussagekräftiger für unsere Fragen als grobe Jahres-Aggregate.</a:t>
+            </a:r>
+          </a:p>
+        </p:txBody>
+      </p:sp>
+      <p:sp>
+        <p:nvSpPr>
+          <p:cNvPr id="4" name="Slide Number Placeholder 3"/>
+          <p:cNvSpPr>
+            <a:spLocks noGrp="1"/>
+          </p:cNvSpPr>
+          <p:nvPr>
+            <p:ph type="sldNum" sz="quarter" idx="5"/>
+          </p:nvPr>
+        </p:nvSpPr>
+        <p:spPr/>
+      </p:sp>
+    </p:spTree>
+  </p:cSld>
+  <p:clrMapOvr>
+    <a:masterClrMapping/>
+  </p:clrMapOvr>
+</p:notes>
+</file>
+
+<file path=ppt/notesSlides/notesSlide5.xml><?xml version="1.0" encoding="utf-8"?>
+<p:notes xmlns:a="http://schemas.openxmlformats.org/drawingml/2006/main" xmlns:r="http://schemas.openxmlformats.org/officeDocument/2006/relationships" xmlns:p="http://schemas.openxmlformats.org/presentationml/2006/main">
+  <p:cSld>
+    <p:spTree>
+      <p:nvGrpSpPr>
+        <p:cNvPr id="1" name=""/>
+        <p:cNvGrpSpPr/>
+        <p:nvPr/>
+      </p:nvGrpSpPr>
+      <p:grpSpPr>
+        <a:xfrm>
+          <a:off x="0" y="0"/>
+          <a:ext cx="0" cy="0"/>
+          <a:chOff x="0" y="0"/>
+          <a:chExt cx="0" cy="0"/>
+        </a:xfrm>
+      </p:grpSpPr>
+      <p:sp>
+        <p:nvSpPr>
+          <p:cNvPr id="2" name="Slide Image Placeholder 1"/>
+          <p:cNvSpPr>
+            <a:spLocks noGrp="1" noRot="1" noChangeAspect="1"/>
+          </p:cNvSpPr>
+          <p:nvPr>
+            <p:ph type="sldImg" idx="2"/>
+          </p:nvPr>
+        </p:nvSpPr>
+        <p:spPr/>
+      </p:sp>
+      <p:sp>
+        <p:nvSpPr>
+          <p:cNvPr id="3" name="Notes Placeholder 2"/>
+          <p:cNvSpPr>
+            <a:spLocks noGrp="1"/>
+          </p:cNvSpPr>
+          <p:nvPr>
+            <p:ph type="body" sz="quarter" idx="3"/>
+          </p:nvPr>
+        </p:nvSpPr>
+        <p:spPr/>
+        <p:txBody>
+          <a:bodyPr/>
+          <a:lstStyle/>
+          <a:p>
+            <a:r>
+              <a:t>SPRECHTEXT: «Die Daten laufen durch eine Pipeline in eine SQLite-Datenbank und werden pro Halt um Zeit- und Wetter-Infos ergänzt. Darauf rechnen wir vier Tests. Wichtig: Wir berichten nie nur den p-Wert, sondern immer auch die Effektstärke.»</a:t>
+            </a:r>
+          </a:p>
+          <a:p>
+            <a:endParaRPr/>
+          </a:p>
+          <a:p>
+            <a:r>
+              <a:t>DAS WICHTIGSTE KONZEPT (unbedingt verstehen):</a:t>
+            </a:r>
+          </a:p>
+          <a:p>
+            <a:r>
+              <a:t>• p-Wert = Wie wahrscheinlich wäre dieses Ergebnis, wenn es in Wirklichkeit KEINEN Unterschied gäbe? Klein (&lt; 0.05) heisst 'wahrscheinlich kein Zufall' = statistisch signifikant.</a:t>
+            </a:r>
+          </a:p>
+          <a:p>
+            <a:r>
+              <a:t>• ABER: Bei riesigen Datenmengen wird fast ALLES signifikant, auch winzige Unterschiede. Deshalb die Effektstärke: sie misst, wie GROSS der Unterschied praktisch ist. Genau das ist unsere Kernbotschaft.</a:t>
+            </a:r>
+          </a:p>
+          <a:p>
+            <a:endParaRPr/>
+          </a:p>
+          <a:p>
+            <a:r>
+              <a:t>Die vier Tests sind nur Werkzeuge für je eine der vier Fragen — Details kommen auf den nächsten Slides.</a:t>
+            </a:r>
+          </a:p>
+        </p:txBody>
+      </p:sp>
+      <p:sp>
+        <p:nvSpPr>
+          <p:cNvPr id="4" name="Slide Number Placeholder 3"/>
+          <p:cNvSpPr>
+            <a:spLocks noGrp="1"/>
+          </p:cNvSpPr>
+          <p:nvPr>
+            <p:ph type="sldNum" sz="quarter" idx="5"/>
+          </p:nvPr>
+        </p:nvSpPr>
+        <p:spPr/>
+      </p:sp>
+    </p:spTree>
+  </p:cSld>
+  <p:clrMapOvr>
+    <a:masterClrMapping/>
+  </p:clrMapOvr>
+</p:notes>
+</file>
+
+<file path=ppt/notesSlides/notesSlide6.xml><?xml version="1.0" encoding="utf-8"?>
+<p:notes xmlns:a="http://schemas.openxmlformats.org/drawingml/2006/main" xmlns:r="http://schemas.openxmlformats.org/officeDocument/2006/relationships" xmlns:p="http://schemas.openxmlformats.org/presentationml/2006/main">
+  <p:cSld>
+    <p:spTree>
+      <p:nvGrpSpPr>
+        <p:cNvPr id="1" name=""/>
+        <p:cNvGrpSpPr/>
+        <p:nvPr/>
+      </p:nvGrpSpPr>
+      <p:grpSpPr>
+        <a:xfrm>
+          <a:off x="0" y="0"/>
+          <a:ext cx="0" cy="0"/>
+          <a:chOff x="0" y="0"/>
+          <a:chExt cx="0" cy="0"/>
+        </a:xfrm>
+      </p:grpSpPr>
+      <p:sp>
+        <p:nvSpPr>
+          <p:cNvPr id="2" name="Slide Image Placeholder 1"/>
+          <p:cNvSpPr>
+            <a:spLocks noGrp="1" noRot="1" noChangeAspect="1"/>
+          </p:cNvSpPr>
+          <p:nvPr>
+            <p:ph type="sldImg" idx="2"/>
+          </p:nvPr>
+        </p:nvSpPr>
+        <p:spPr/>
+      </p:sp>
+      <p:sp>
+        <p:nvSpPr>
+          <p:cNvPr id="3" name="Notes Placeholder 2"/>
+          <p:cNvSpPr>
+            <a:spLocks noGrp="1"/>
+          </p:cNvSpPr>
+          <p:nvPr>
+            <p:ph type="body" sz="quarter" idx="3"/>
+          </p:nvPr>
+        </p:nvSpPr>
+        <p:spPr/>
+        <p:txBody>
+          <a:bodyPr/>
+          <a:lstStyle/>
+          <a:p>
+            <a:r>
+              <a:t>SPRECHTEXT: «Werktage sind im Schnitt rund 15 Sekunden unpünktlicher als Wochenenden. Statistisch ist das glasklar. Aber 15 Sekunden merkt im Alltag niemand — die Effektstärke Cohen's d ist mit 0.12 klein. Genau dieser Unterschied zwischen 'signifikant' und 'relevant' zieht sich durch unsere ganze Arbeit.»</a:t>
+            </a:r>
+          </a:p>
+          <a:p>
+            <a:endParaRPr/>
+          </a:p>
+          <a:p>
+            <a:r>
+              <a:t>BEGRIFFE EINFACH:</a:t>
+            </a:r>
+          </a:p>
+          <a:p>
+            <a:r>
+              <a:t>• Welch-t-Test = vergleicht zwei Mittelwerte und verträgt, dass die beiden Gruppen unterschiedlich stark streuen.</a:t>
+            </a:r>
+          </a:p>
+          <a:p>
+            <a:r>
+              <a:t>• Cohen's d = wie gross der Unterschied in 'Streuungs-Einheiten' ist. Faustregel: 0.2 klein, 0.5 mittel, 0.8 gross. Unser 0.12 ist also sehr klein.</a:t>
+            </a:r>
+          </a:p>
+          <a:p>
+            <a:r>
+              <a:t>• Konfidenzintervall = der Bereich, in dem der wahre Wert mit 95 % Sicherheit liegt. Hier sehr eng, weil wir so viele Daten haben.</a:t>
+            </a:r>
+          </a:p>
+          <a:p>
+            <a:r>
+              <a:t>• Mann-Whitney = ein Test, der keine Normalverteilung voraussetzt (arbeitet mit Rängen statt Werten) — als Gegenprobe.</a:t>
+            </a:r>
+          </a:p>
+          <a:p>
+            <a:endParaRPr/>
+          </a:p>
+          <a:p>
+            <a:r>
+              <a:t>WARUM TAGESMITTEL? Unsere Millionen Halte sind nicht unabhängig (derselbe Zug, Bahnhof, Tag). Deshalb haben wir den Test auch nur auf den 48 Tagesdurchschnitten gerechnet — der Effekt bleibt. Das zeigt: er ist echt, kein Artefakt der grossen Zahl.</a:t>
+            </a:r>
+          </a:p>
+        </p:txBody>
+      </p:sp>
+      <p:sp>
+        <p:nvSpPr>
+          <p:cNvPr id="4" name="Slide Number Placeholder 3"/>
+          <p:cNvSpPr>
+            <a:spLocks noGrp="1"/>
+          </p:cNvSpPr>
+          <p:nvPr>
+            <p:ph type="sldNum" sz="quarter" idx="5"/>
+          </p:nvPr>
+        </p:nvSpPr>
+        <p:spPr/>
+      </p:sp>
+    </p:spTree>
+  </p:cSld>
+  <p:clrMapOvr>
+    <a:masterClrMapping/>
+  </p:clrMapOvr>
+</p:notes>
+</file>
+
+<file path=ppt/notesSlides/notesSlide7.xml><?xml version="1.0" encoding="utf-8"?>
+<p:notes xmlns:a="http://schemas.openxmlformats.org/drawingml/2006/main" xmlns:r="http://schemas.openxmlformats.org/officeDocument/2006/relationships" xmlns:p="http://schemas.openxmlformats.org/presentationml/2006/main">
+  <p:cSld>
+    <p:spTree>
+      <p:nvGrpSpPr>
+        <p:cNvPr id="1" name=""/>
+        <p:cNvGrpSpPr/>
+        <p:nvPr/>
+      </p:nvGrpSpPr>
+      <p:grpSpPr>
+        <a:xfrm>
+          <a:off x="0" y="0"/>
+          <a:ext cx="0" cy="0"/>
+          <a:chOff x="0" y="0"/>
+          <a:chExt cx="0" cy="0"/>
+        </a:xfrm>
+      </p:grpSpPr>
+      <p:sp>
+        <p:nvSpPr>
+          <p:cNvPr id="2" name="Slide Image Placeholder 1"/>
+          <p:cNvSpPr>
+            <a:spLocks noGrp="1" noRot="1" noChangeAspect="1"/>
+          </p:cNvSpPr>
+          <p:nvPr>
+            <p:ph type="sldImg" idx="2"/>
+          </p:nvPr>
+        </p:nvSpPr>
+        <p:spPr/>
+      </p:sp>
+      <p:sp>
+        <p:nvSpPr>
+          <p:cNvPr id="3" name="Notes Placeholder 2"/>
+          <p:cNvSpPr>
+            <a:spLocks noGrp="1"/>
+          </p:cNvSpPr>
+          <p:nvPr>
+            <p:ph type="body" sz="quarter" idx="3"/>
+          </p:nvPr>
+        </p:nvSpPr>
+        <p:spPr/>
+        <p:txBody>
+          <a:bodyPr/>
+          <a:lstStyle/>
+          <a:p>
+            <a:r>
+              <a:t>SPRECHTEXT: «Der Linientyp macht einen Unterschied — auch hier hochsignifikant, aber mit η² rund 0.04 wieder ein kleiner Effekt. Die eigentliche Geschichte: Internationale Züge wie TGV, EuroCity und RailJet sammeln im Ausland Verspätung und bringen sie in die Schweiz. Die inländischen IC und IR sind dagegen sehr pünktlich, um die 30 Sekunden.»</a:t>
+            </a:r>
+          </a:p>
+          <a:p>
+            <a:endParaRPr/>
+          </a:p>
+          <a:p>
+            <a:r>
+              <a:t>BEGRIFFE EINFACH:</a:t>
+            </a:r>
+          </a:p>
+          <a:p>
+            <a:r>
+              <a:t>• ANOVA (Varianzanalyse) = vergleicht die Mittelwerte von MEHR als zwei Gruppen gleichzeitig (hier die Linientypen). Antwortet auf: 'Gibt es überhaupt irgendwo einen Unterschied?'</a:t>
+            </a:r>
+          </a:p>
+          <a:p>
+            <a:r>
+              <a:t>• F-Wert = die Test-Kennzahl der ANOVA; gross = die Gruppen unterscheiden sich deutlich relativ zur Streuung innerhalb der Gruppen.</a:t>
+            </a:r>
+          </a:p>
+          <a:p>
+            <a:r>
+              <a:t>• η² (eta-Quadrat) = Effektstärke der ANOVA: Anteil der Verspätungs-Schwankung, der durch den Linientyp erklärt wird. 0.04 = nur ~4 %.</a:t>
+            </a:r>
+          </a:p>
+          <a:p>
+            <a:r>
+              <a:t>• Tukey-HSD (im Notebook) = sagt zusätzlich, WELCHE Paare sich konkret unterscheiden, nicht nur dass es Unterschiede gibt.</a:t>
+            </a:r>
+          </a:p>
+          <a:p>
+            <a:endParaRPr/>
+          </a:p>
+          <a:p>
+            <a:r>
+              <a:t>GRAFIK ERKLÄREN: Boxplot. Die Box ist der Bereich der mittleren 50 % der Werte, der Strich darin der Median. Je höher, desto verspäteter.</a:t>
+            </a:r>
+          </a:p>
+        </p:txBody>
+      </p:sp>
+      <p:sp>
+        <p:nvSpPr>
+          <p:cNvPr id="4" name="Slide Number Placeholder 3"/>
+          <p:cNvSpPr>
+            <a:spLocks noGrp="1"/>
+          </p:cNvSpPr>
+          <p:nvPr>
+            <p:ph type="sldNum" sz="quarter" idx="5"/>
+          </p:nvPr>
+        </p:nvSpPr>
+        <p:spPr/>
+      </p:sp>
+    </p:spTree>
+  </p:cSld>
+  <p:clrMapOvr>
+    <a:masterClrMapping/>
+  </p:clrMapOvr>
+</p:notes>
+</file>
+
+<file path=ppt/notesSlides/notesSlide8.xml><?xml version="1.0" encoding="utf-8"?>
+<p:notes xmlns:a="http://schemas.openxmlformats.org/drawingml/2006/main" xmlns:r="http://schemas.openxmlformats.org/officeDocument/2006/relationships" xmlns:p="http://schemas.openxmlformats.org/presentationml/2006/main">
+  <p:cSld>
+    <p:spTree>
+      <p:nvGrpSpPr>
+        <p:cNvPr id="1" name=""/>
+        <p:cNvGrpSpPr/>
+        <p:nvPr/>
+      </p:nvGrpSpPr>
+      <p:grpSpPr>
+        <a:xfrm>
+          <a:off x="0" y="0"/>
+          <a:ext cx="0" cy="0"/>
+          <a:chOff x="0" y="0"/>
+          <a:chExt cx="0" cy="0"/>
+        </a:xfrm>
+      </p:grpSpPr>
+      <p:sp>
+        <p:nvSpPr>
+          <p:cNvPr id="2" name="Slide Image Placeholder 1"/>
+          <p:cNvSpPr>
+            <a:spLocks noGrp="1" noRot="1" noChangeAspect="1"/>
+          </p:cNvSpPr>
+          <p:nvPr>
+            <p:ph type="sldImg" idx="2"/>
+          </p:nvPr>
+        </p:nvSpPr>
+        <p:spPr/>
+      </p:sp>
+      <p:sp>
+        <p:nvSpPr>
+          <p:cNvPr id="3" name="Notes Placeholder 2"/>
+          <p:cNvSpPr>
+            <a:spLocks noGrp="1"/>
+          </p:cNvSpPr>
+          <p:nvPr>
+            <p:ph type="body" sz="quarter" idx="3"/>
+          </p:nvPr>
+        </p:nvSpPr>
+        <p:spPr/>
+        <p:txBody>
+          <a:bodyPr/>
+          <a:lstStyle/>
+          <a:p>
+            <a:r>
+              <a:t>SPRECHTEXT: «Wetter wirkt in die erwartete Richtung — mehr Regen, etwas mehr Verspätung. Aber der Zusammenhang ist extrem schwach. Wieder ein Lehrstück: Bei 2.7 Millionen Beobachtungen wird selbst ein winziger Zusammenhang hochsignifikant. Die Korrelation r liegt aber unter 0.04 — praktisch bedeutungslos.»</a:t>
+            </a:r>
+          </a:p>
+          <a:p>
+            <a:endParaRPr/>
+          </a:p>
+          <a:p>
+            <a:r>
+              <a:t>BEGRIFFE EINFACH:</a:t>
+            </a:r>
+          </a:p>
+          <a:p>
+            <a:r>
+              <a:t>• Korrelation r = Mass für den Zusammenhang zweier Grössen, zwischen -1 und +1. 0 = kein Zusammenhang, ±1 = perfekter. Unsere Werte ~0.02–0.04 sind quasi null.</a:t>
+            </a:r>
+          </a:p>
+          <a:p>
+            <a:r>
+              <a:t>• Pearson = misst LINEAREN Zusammenhang. Spearman = misst, ob es generell rauf/runter geht (monoton), über Ränge. Dass beide ähnlich klein sind, bestätigt: da ist einfach wenig.</a:t>
+            </a:r>
+          </a:p>
+          <a:p>
+            <a:r>
+              <a:t>• 'erklärt &lt; 0.3 % der Varianz' = r² (das Quadrat von r) als Anteil.</a:t>
+            </a:r>
+          </a:p>
+          <a:p>
+            <a:endParaRPr/>
+          </a:p>
+          <a:p>
+            <a:r>
+              <a:t>MÖGLICHE FRAGE: 'Warum überhaupt zeigen, wenn der Effekt null ist?' — Weil es methodisch ehrlich ist und genau den Unterschied signifikant/relevant demonstriert. Negative bzw. Null-Ergebnisse sauber zu berichten ist Teil guter Wissenschaft.</a:t>
+            </a:r>
+          </a:p>
+        </p:txBody>
+      </p:sp>
+      <p:sp>
+        <p:nvSpPr>
+          <p:cNvPr id="4" name="Slide Number Placeholder 3"/>
+          <p:cNvSpPr>
+            <a:spLocks noGrp="1"/>
+          </p:cNvSpPr>
+          <p:nvPr>
+            <p:ph type="sldNum" sz="quarter" idx="5"/>
+          </p:nvPr>
+        </p:nvSpPr>
+        <p:spPr/>
+      </p:sp>
+    </p:spTree>
+  </p:cSld>
+  <p:clrMapOvr>
+    <a:masterClrMapping/>
+  </p:clrMapOvr>
+</p:notes>
+</file>
+
+<file path=ppt/notesSlides/notesSlide9.xml><?xml version="1.0" encoding="utf-8"?>
+<p:notes xmlns:a="http://schemas.openxmlformats.org/drawingml/2006/main" xmlns:r="http://schemas.openxmlformats.org/officeDocument/2006/relationships" xmlns:p="http://schemas.openxmlformats.org/presentationml/2006/main">
+  <p:cSld>
+    <p:spTree>
+      <p:nvGrpSpPr>
+        <p:cNvPr id="1" name=""/>
+        <p:cNvGrpSpPr/>
+        <p:nvPr/>
+      </p:nvGrpSpPr>
+      <p:grpSpPr>
+        <a:xfrm>
+          <a:off x="0" y="0"/>
+          <a:ext cx="0" cy="0"/>
+          <a:chOff x="0" y="0"/>
+          <a:chExt cx="0" cy="0"/>
+        </a:xfrm>
+      </p:grpSpPr>
+      <p:sp>
+        <p:nvSpPr>
+          <p:cNvPr id="2" name="Slide Image Placeholder 1"/>
+          <p:cNvSpPr>
+            <a:spLocks noGrp="1" noRot="1" noChangeAspect="1"/>
+          </p:cNvSpPr>
+          <p:nvPr>
+            <p:ph type="sldImg" idx="2"/>
+          </p:nvPr>
+        </p:nvSpPr>
+        <p:spPr/>
+      </p:sp>
+      <p:sp>
+        <p:nvSpPr>
+          <p:cNvPr id="3" name="Notes Placeholder 2"/>
+          <p:cNvSpPr>
+            <a:spLocks noGrp="1"/>
+          </p:cNvSpPr>
+          <p:nvPr>
+            <p:ph type="body" sz="quarter" idx="3"/>
+          </p:nvPr>
+        </p:nvSpPr>
+        <p:spPr/>
+        <p:txBody>
+          <a:bodyPr/>
+          <a:lstStyle/>
+          <a:p>
+            <a:r>
+              <a:t>SPRECHTEXT: «Zum Schluss kombinieren wir alle Faktoren in einem Modell. Es erklärt nur rund 4 Prozent der Verspätung. Das klingt wenig, ist aber eine ehrliche und wichtige Erkenntnis: Verspätung entsteht überwiegend aus einzelnen, zufälligen Ereignissen — Defekte, Störungen — und nicht aus Tag, Linientyp oder Wetter.»</a:t>
+            </a:r>
+          </a:p>
+          <a:p>
+            <a:endParaRPr/>
+          </a:p>
+          <a:p>
+            <a:r>
+              <a:t>BEGRIFFE EINFACH:</a:t>
+            </a:r>
+          </a:p>
+          <a:p>
+            <a:r>
+              <a:t>• OLS-Regression = ein Modell, das die Verspätung gleichzeitig durch mehrere Einflussgrössen (Rush-Hour, Wochenende, Linientyp, Wetter) vorhersagt.</a:t>
+            </a:r>
+          </a:p>
+          <a:p>
+            <a:r>
+              <a:t>• Koeffizient = der Effekt eines Faktors in Sekunden. Beispiel: Rush-Hour +10 s heisst, zur Stosszeit kommen im Schnitt 10 s Verspätung dazu.</a:t>
+            </a:r>
+          </a:p>
+          <a:p>
+            <a:r>
+              <a:t>• R² = Anteil der Verspätungs-Schwankung, den das Modell erklärt. 0.043 = ~4 %. Der Rest ist nicht erklärt = idiosynkratisch (Einzelfälle).</a:t>
+            </a:r>
+          </a:p>
+          <a:p>
+            <a:r>
+              <a:t>• Heteroskedastizität (Breusch-Pagan-Test) = die Streuung der Fehler ist nicht konstant (bei grossen Verspätungen grösser). Wir benennen das offen.</a:t>
+            </a:r>
+          </a:p>
+          <a:p>
+            <a:r>
+              <a:t>• VIF = prüft, ob sich Einflussgrössen gegenseitig zu stark überlappen (Multikollinearität). Bei uns unauffällig.</a:t>
+            </a:r>
+          </a:p>
+          <a:p>
+            <a:endParaRPr/>
+          </a:p>
+          <a:p>
+            <a:r>
+              <a:t>GRAFIK: Residuen-Plot. Jeder Punkt ist ein Halt; x = Vorhersage, y = Fehler. Die Trichterform nach rechts ist genau die Heteroskedastizität.</a:t>
+            </a:r>
+          </a:p>
+        </p:txBody>
+      </p:sp>
+      <p:sp>
+        <p:nvSpPr>
+          <p:cNvPr id="4" name="Slide Number Placeholder 3"/>
+          <p:cNvSpPr>
+            <a:spLocks noGrp="1"/>
+          </p:cNvSpPr>
+          <p:nvPr>
+            <p:ph type="sldNum" sz="quarter" idx="5"/>
           </p:nvPr>
         </p:nvSpPr>
         <p:spPr/>
@@ -1989,10 +2267,9 @@
           <a:lstStyle/>
           <a:p>
             <a:r>
-              <a:rPr lang="en-US" smtClean="0"/>
+              <a:rPr lang="en-US"/>
               <a:t>Click to edit Master title style</a:t>
             </a:r>
-            <a:endParaRPr lang="en-US"/>
           </a:p>
         </p:txBody>
       </p:sp>
@@ -2108,10 +2385,9 @@
           </a:lstStyle>
           <a:p>
             <a:r>
-              <a:rPr lang="en-US" smtClean="0"/>
+              <a:rPr lang="en-US"/>
               <a:t>Click to edit Master subtitle style</a:t>
             </a:r>
-            <a:endParaRPr lang="en-US"/>
           </a:p>
         </p:txBody>
       </p:sp>
@@ -2132,7 +2408,7 @@
           <a:p>
             <a:fld id="{5BCAD085-E8A6-8845-BD4E-CB4CCA059FC4}" type="datetimeFigureOut">
               <a:rPr lang="en-US" smtClean="0"/>
-              <a:t>1/27/13</a:t>
+              <a:t>5/22/2026</a:t>
             </a:fld>
             <a:endParaRPr lang="en-US"/>
           </a:p>
@@ -2174,7 +2450,7 @@
           <a:p>
             <a:fld id="{C1FF6DA9-008F-8B48-92A6-B652298478BF}" type="slidenum">
               <a:rPr lang="en-US" smtClean="0"/>
-              <a:t>‹#›</a:t>
+              <a:t>‹Nr.›</a:t>
             </a:fld>
             <a:endParaRPr lang="en-US"/>
           </a:p>
@@ -2226,10 +2502,9 @@
           <a:lstStyle/>
           <a:p>
             <a:r>
-              <a:rPr lang="en-US" smtClean="0"/>
+              <a:rPr lang="en-US"/>
               <a:t>Click to edit Master title style</a:t>
             </a:r>
-            <a:endParaRPr lang="en-US"/>
           </a:p>
         </p:txBody>
       </p:sp>
@@ -2250,38 +2525,37 @@
           <a:p>
             <a:pPr lvl="0"/>
             <a:r>
-              <a:rPr lang="en-US" smtClean="0"/>
+              <a:rPr lang="en-US"/>
               <a:t>Click to edit Master text styles</a:t>
             </a:r>
           </a:p>
           <a:p>
             <a:pPr lvl="1"/>
             <a:r>
-              <a:rPr lang="en-US" smtClean="0"/>
+              <a:rPr lang="en-US"/>
               <a:t>Second level</a:t>
             </a:r>
           </a:p>
           <a:p>
             <a:pPr lvl="2"/>
             <a:r>
-              <a:rPr lang="en-US" smtClean="0"/>
+              <a:rPr lang="en-US"/>
               <a:t>Third level</a:t>
             </a:r>
           </a:p>
           <a:p>
             <a:pPr lvl="3"/>
             <a:r>
-              <a:rPr lang="en-US" smtClean="0"/>
+              <a:rPr lang="en-US"/>
               <a:t>Fourth level</a:t>
             </a:r>
           </a:p>
           <a:p>
             <a:pPr lvl="4"/>
             <a:r>
-              <a:rPr lang="en-US" smtClean="0"/>
+              <a:rPr lang="en-US"/>
               <a:t>Fifth level</a:t>
             </a:r>
-            <a:endParaRPr lang="en-US"/>
           </a:p>
         </p:txBody>
       </p:sp>
@@ -2302,7 +2576,7 @@
           <a:p>
             <a:fld id="{5BCAD085-E8A6-8845-BD4E-CB4CCA059FC4}" type="datetimeFigureOut">
               <a:rPr lang="en-US" smtClean="0"/>
-              <a:t>1/27/13</a:t>
+              <a:t>5/22/2026</a:t>
             </a:fld>
             <a:endParaRPr lang="en-US"/>
           </a:p>
@@ -2344,7 +2618,7 @@
           <a:p>
             <a:fld id="{C1FF6DA9-008F-8B48-92A6-B652298478BF}" type="slidenum">
               <a:rPr lang="en-US" smtClean="0"/>
-              <a:t>‹#›</a:t>
+              <a:t>‹Nr.›</a:t>
             </a:fld>
             <a:endParaRPr lang="en-US"/>
           </a:p>
@@ -2401,10 +2675,9 @@
           <a:lstStyle/>
           <a:p>
             <a:r>
-              <a:rPr lang="en-US" smtClean="0"/>
+              <a:rPr lang="en-US"/>
               <a:t>Click to edit Master title style</a:t>
             </a:r>
-            <a:endParaRPr lang="en-US"/>
           </a:p>
         </p:txBody>
       </p:sp>
@@ -2430,38 +2703,37 @@
           <a:p>
             <a:pPr lvl="0"/>
             <a:r>
-              <a:rPr lang="en-US" smtClean="0"/>
+              <a:rPr lang="en-US"/>
               <a:t>Click to edit Master text styles</a:t>
             </a:r>
           </a:p>
           <a:p>
             <a:pPr lvl="1"/>
             <a:r>
-              <a:rPr lang="en-US" smtClean="0"/>
+              <a:rPr lang="en-US"/>
               <a:t>Second level</a:t>
             </a:r>
           </a:p>
           <a:p>
             <a:pPr lvl="2"/>
             <a:r>
-              <a:rPr lang="en-US" smtClean="0"/>
+              <a:rPr lang="en-US"/>
               <a:t>Third level</a:t>
             </a:r>
           </a:p>
           <a:p>
             <a:pPr lvl="3"/>
             <a:r>
-              <a:rPr lang="en-US" smtClean="0"/>
+              <a:rPr lang="en-US"/>
               <a:t>Fourth level</a:t>
             </a:r>
           </a:p>
           <a:p>
             <a:pPr lvl="4"/>
             <a:r>
-              <a:rPr lang="en-US" smtClean="0"/>
+              <a:rPr lang="en-US"/>
               <a:t>Fifth level</a:t>
             </a:r>
-            <a:endParaRPr lang="en-US"/>
           </a:p>
         </p:txBody>
       </p:sp>
@@ -2482,7 +2754,7 @@
           <a:p>
             <a:fld id="{5BCAD085-E8A6-8845-BD4E-CB4CCA059FC4}" type="datetimeFigureOut">
               <a:rPr lang="en-US" smtClean="0"/>
-              <a:t>1/27/13</a:t>
+              <a:t>5/22/2026</a:t>
             </a:fld>
             <a:endParaRPr lang="en-US"/>
           </a:p>
@@ -2524,7 +2796,7 @@
           <a:p>
             <a:fld id="{C1FF6DA9-008F-8B48-92A6-B652298478BF}" type="slidenum">
               <a:rPr lang="en-US" smtClean="0"/>
-              <a:t>‹#›</a:t>
+              <a:t>‹Nr.›</a:t>
             </a:fld>
             <a:endParaRPr lang="en-US"/>
           </a:p>
@@ -2576,10 +2848,9 @@
           <a:lstStyle/>
           <a:p>
             <a:r>
-              <a:rPr lang="en-US" smtClean="0"/>
+              <a:rPr lang="en-US"/>
               <a:t>Click to edit Master title style</a:t>
             </a:r>
-            <a:endParaRPr lang="en-US"/>
           </a:p>
         </p:txBody>
       </p:sp>
@@ -2600,38 +2871,37 @@
           <a:p>
             <a:pPr lvl="0"/>
             <a:r>
-              <a:rPr lang="en-US" smtClean="0"/>
+              <a:rPr lang="en-US"/>
               <a:t>Click to edit Master text styles</a:t>
             </a:r>
           </a:p>
           <a:p>
             <a:pPr lvl="1"/>
             <a:r>
-              <a:rPr lang="en-US" smtClean="0"/>
+              <a:rPr lang="en-US"/>
               <a:t>Second level</a:t>
             </a:r>
           </a:p>
           <a:p>
             <a:pPr lvl="2"/>
             <a:r>
-              <a:rPr lang="en-US" smtClean="0"/>
+              <a:rPr lang="en-US"/>
               <a:t>Third level</a:t>
             </a:r>
           </a:p>
           <a:p>
             <a:pPr lvl="3"/>
             <a:r>
-              <a:rPr lang="en-US" smtClean="0"/>
+              <a:rPr lang="en-US"/>
               <a:t>Fourth level</a:t>
             </a:r>
           </a:p>
           <a:p>
             <a:pPr lvl="4"/>
             <a:r>
-              <a:rPr lang="en-US" smtClean="0"/>
+              <a:rPr lang="en-US"/>
               <a:t>Fifth level</a:t>
             </a:r>
-            <a:endParaRPr lang="en-US"/>
           </a:p>
         </p:txBody>
       </p:sp>
@@ -2652,7 +2922,7 @@
           <a:p>
             <a:fld id="{5BCAD085-E8A6-8845-BD4E-CB4CCA059FC4}" type="datetimeFigureOut">
               <a:rPr lang="en-US" smtClean="0"/>
-              <a:t>1/27/13</a:t>
+              <a:t>5/22/2026</a:t>
             </a:fld>
             <a:endParaRPr lang="en-US"/>
           </a:p>
@@ -2694,7 +2964,7 @@
           <a:p>
             <a:fld id="{C1FF6DA9-008F-8B48-92A6-B652298478BF}" type="slidenum">
               <a:rPr lang="en-US" smtClean="0"/>
-              <a:t>‹#›</a:t>
+              <a:t>‹Nr.›</a:t>
             </a:fld>
             <a:endParaRPr lang="en-US"/>
           </a:p>
@@ -2755,10 +3025,9 @@
           </a:lstStyle>
           <a:p>
             <a:r>
-              <a:rPr lang="en-US" smtClean="0"/>
+              <a:rPr lang="en-US"/>
               <a:t>Click to edit Master title style</a:t>
             </a:r>
-            <a:endParaRPr lang="en-US"/>
           </a:p>
         </p:txBody>
       </p:sp>
@@ -2875,7 +3144,7 @@
           <a:p>
             <a:pPr lvl="0"/>
             <a:r>
-              <a:rPr lang="en-US" smtClean="0"/>
+              <a:rPr lang="en-US"/>
               <a:t>Click to edit Master text styles</a:t>
             </a:r>
           </a:p>
@@ -2898,7 +3167,7 @@
           <a:p>
             <a:fld id="{5BCAD085-E8A6-8845-BD4E-CB4CCA059FC4}" type="datetimeFigureOut">
               <a:rPr lang="en-US" smtClean="0"/>
-              <a:t>1/27/13</a:t>
+              <a:t>5/22/2026</a:t>
             </a:fld>
             <a:endParaRPr lang="en-US"/>
           </a:p>
@@ -2940,7 +3209,7 @@
           <a:p>
             <a:fld id="{C1FF6DA9-008F-8B48-92A6-B652298478BF}" type="slidenum">
               <a:rPr lang="en-US" smtClean="0"/>
-              <a:t>‹#›</a:t>
+              <a:t>‹Nr.›</a:t>
             </a:fld>
             <a:endParaRPr lang="en-US"/>
           </a:p>
@@ -2992,10 +3261,9 @@
           <a:lstStyle/>
           <a:p>
             <a:r>
-              <a:rPr lang="en-US" smtClean="0"/>
+              <a:rPr lang="en-US"/>
               <a:t>Click to edit Master title style</a:t>
             </a:r>
-            <a:endParaRPr lang="en-US"/>
           </a:p>
         </p:txBody>
       </p:sp>
@@ -3049,38 +3317,37 @@
           <a:p>
             <a:pPr lvl="0"/>
             <a:r>
-              <a:rPr lang="en-US" smtClean="0"/>
+              <a:rPr lang="en-US"/>
               <a:t>Click to edit Master text styles</a:t>
             </a:r>
           </a:p>
           <a:p>
             <a:pPr lvl="1"/>
             <a:r>
-              <a:rPr lang="en-US" smtClean="0"/>
+              <a:rPr lang="en-US"/>
               <a:t>Second level</a:t>
             </a:r>
           </a:p>
           <a:p>
             <a:pPr lvl="2"/>
             <a:r>
-              <a:rPr lang="en-US" smtClean="0"/>
+              <a:rPr lang="en-US"/>
               <a:t>Third level</a:t>
             </a:r>
           </a:p>
           <a:p>
             <a:pPr lvl="3"/>
             <a:r>
-              <a:rPr lang="en-US" smtClean="0"/>
+              <a:rPr lang="en-US"/>
               <a:t>Fourth level</a:t>
             </a:r>
           </a:p>
           <a:p>
             <a:pPr lvl="4"/>
             <a:r>
-              <a:rPr lang="en-US" smtClean="0"/>
+              <a:rPr lang="en-US"/>
               <a:t>Fifth level</a:t>
             </a:r>
-            <a:endParaRPr lang="en-US"/>
           </a:p>
         </p:txBody>
       </p:sp>
@@ -3134,38 +3401,37 @@
           <a:p>
             <a:pPr lvl="0"/>
             <a:r>
-              <a:rPr lang="en-US" smtClean="0"/>
+              <a:rPr lang="en-US"/>
               <a:t>Click to edit Master text styles</a:t>
             </a:r>
           </a:p>
           <a:p>
             <a:pPr lvl="1"/>
             <a:r>
-              <a:rPr lang="en-US" smtClean="0"/>
+              <a:rPr lang="en-US"/>
               <a:t>Second level</a:t>
             </a:r>
           </a:p>
           <a:p>
             <a:pPr lvl="2"/>
             <a:r>
-              <a:rPr lang="en-US" smtClean="0"/>
+              <a:rPr lang="en-US"/>
               <a:t>Third level</a:t>
             </a:r>
           </a:p>
           <a:p>
             <a:pPr lvl="3"/>
             <a:r>
-              <a:rPr lang="en-US" smtClean="0"/>
+              <a:rPr lang="en-US"/>
               <a:t>Fourth level</a:t>
             </a:r>
           </a:p>
           <a:p>
             <a:pPr lvl="4"/>
             <a:r>
-              <a:rPr lang="en-US" smtClean="0"/>
+              <a:rPr lang="en-US"/>
               <a:t>Fifth level</a:t>
             </a:r>
-            <a:endParaRPr lang="en-US"/>
           </a:p>
         </p:txBody>
       </p:sp>
@@ -3186,7 +3452,7 @@
           <a:p>
             <a:fld id="{5BCAD085-E8A6-8845-BD4E-CB4CCA059FC4}" type="datetimeFigureOut">
               <a:rPr lang="en-US" smtClean="0"/>
-              <a:t>1/27/13</a:t>
+              <a:t>5/22/2026</a:t>
             </a:fld>
             <a:endParaRPr lang="en-US"/>
           </a:p>
@@ -3228,7 +3494,7 @@
           <a:p>
             <a:fld id="{C1FF6DA9-008F-8B48-92A6-B652298478BF}" type="slidenum">
               <a:rPr lang="en-US" smtClean="0"/>
-              <a:t>‹#›</a:t>
+              <a:t>‹Nr.›</a:t>
             </a:fld>
             <a:endParaRPr lang="en-US"/>
           </a:p>
@@ -3284,10 +3550,9 @@
           </a:lstStyle>
           <a:p>
             <a:r>
-              <a:rPr lang="en-US" smtClean="0"/>
+              <a:rPr lang="en-US"/>
               <a:t>Click to edit Master title style</a:t>
             </a:r>
-            <a:endParaRPr lang="en-US"/>
           </a:p>
         </p:txBody>
       </p:sp>
@@ -3350,7 +3615,7 @@
           <a:p>
             <a:pPr lvl="0"/>
             <a:r>
-              <a:rPr lang="en-US" smtClean="0"/>
+              <a:rPr lang="en-US"/>
               <a:t>Click to edit Master text styles</a:t>
             </a:r>
           </a:p>
@@ -3406,38 +3671,37 @@
           <a:p>
             <a:pPr lvl="0"/>
             <a:r>
-              <a:rPr lang="en-US" smtClean="0"/>
+              <a:rPr lang="en-US"/>
               <a:t>Click to edit Master text styles</a:t>
             </a:r>
           </a:p>
           <a:p>
             <a:pPr lvl="1"/>
             <a:r>
-              <a:rPr lang="en-US" smtClean="0"/>
+              <a:rPr lang="en-US"/>
               <a:t>Second level</a:t>
             </a:r>
           </a:p>
           <a:p>
             <a:pPr lvl="2"/>
             <a:r>
-              <a:rPr lang="en-US" smtClean="0"/>
+              <a:rPr lang="en-US"/>
               <a:t>Third level</a:t>
             </a:r>
           </a:p>
           <a:p>
             <a:pPr lvl="3"/>
             <a:r>
-              <a:rPr lang="en-US" smtClean="0"/>
+              <a:rPr lang="en-US"/>
               <a:t>Fourth level</a:t>
             </a:r>
           </a:p>
           <a:p>
             <a:pPr lvl="4"/>
             <a:r>
-              <a:rPr lang="en-US" smtClean="0"/>
+              <a:rPr lang="en-US"/>
               <a:t>Fifth level</a:t>
             </a:r>
-            <a:endParaRPr lang="en-US"/>
           </a:p>
         </p:txBody>
       </p:sp>
@@ -3500,7 +3764,7 @@
           <a:p>
             <a:pPr lvl="0"/>
             <a:r>
-              <a:rPr lang="en-US" smtClean="0"/>
+              <a:rPr lang="en-US"/>
               <a:t>Click to edit Master text styles</a:t>
             </a:r>
           </a:p>
@@ -3556,38 +3820,37 @@
           <a:p>
             <a:pPr lvl="0"/>
             <a:r>
-              <a:rPr lang="en-US" smtClean="0"/>
+              <a:rPr lang="en-US"/>
               <a:t>Click to edit Master text styles</a:t>
             </a:r>
           </a:p>
           <a:p>
             <a:pPr lvl="1"/>
             <a:r>
-              <a:rPr lang="en-US" smtClean="0"/>
+              <a:rPr lang="en-US"/>
               <a:t>Second level</a:t>
             </a:r>
           </a:p>
           <a:p>
             <a:pPr lvl="2"/>
             <a:r>
-              <a:rPr lang="en-US" smtClean="0"/>
+              <a:rPr lang="en-US"/>
               <a:t>Third level</a:t>
             </a:r>
           </a:p>
           <a:p>
             <a:pPr lvl="3"/>
             <a:r>
-              <a:rPr lang="en-US" smtClean="0"/>
+              <a:rPr lang="en-US"/>
               <a:t>Fourth level</a:t>
             </a:r>
           </a:p>
           <a:p>
             <a:pPr lvl="4"/>
             <a:r>
-              <a:rPr lang="en-US" smtClean="0"/>
+              <a:rPr lang="en-US"/>
               <a:t>Fifth level</a:t>
             </a:r>
-            <a:endParaRPr lang="en-US"/>
           </a:p>
         </p:txBody>
       </p:sp>
@@ -3608,7 +3871,7 @@
           <a:p>
             <a:fld id="{5BCAD085-E8A6-8845-BD4E-CB4CCA059FC4}" type="datetimeFigureOut">
               <a:rPr lang="en-US" smtClean="0"/>
-              <a:t>1/27/13</a:t>
+              <a:t>5/22/2026</a:t>
             </a:fld>
             <a:endParaRPr lang="en-US"/>
           </a:p>
@@ -3650,7 +3913,7 @@
           <a:p>
             <a:fld id="{C1FF6DA9-008F-8B48-92A6-B652298478BF}" type="slidenum">
               <a:rPr lang="en-US" smtClean="0"/>
-              <a:t>‹#›</a:t>
+              <a:t>‹Nr.›</a:t>
             </a:fld>
             <a:endParaRPr lang="en-US"/>
           </a:p>
@@ -3702,10 +3965,9 @@
           <a:lstStyle/>
           <a:p>
             <a:r>
-              <a:rPr lang="en-US" smtClean="0"/>
+              <a:rPr lang="en-US"/>
               <a:t>Click to edit Master title style</a:t>
             </a:r>
-            <a:endParaRPr lang="en-US"/>
           </a:p>
         </p:txBody>
       </p:sp>
@@ -3726,7 +3988,7 @@
           <a:p>
             <a:fld id="{5BCAD085-E8A6-8845-BD4E-CB4CCA059FC4}" type="datetimeFigureOut">
               <a:rPr lang="en-US" smtClean="0"/>
-              <a:t>1/27/13</a:t>
+              <a:t>5/22/2026</a:t>
             </a:fld>
             <a:endParaRPr lang="en-US"/>
           </a:p>
@@ -3768,7 +4030,7 @@
           <a:p>
             <a:fld id="{C1FF6DA9-008F-8B48-92A6-B652298478BF}" type="slidenum">
               <a:rPr lang="en-US" smtClean="0"/>
-              <a:t>‹#›</a:t>
+              <a:t>‹Nr.›</a:t>
             </a:fld>
             <a:endParaRPr lang="en-US"/>
           </a:p>
@@ -3821,7 +4083,7 @@
           <a:p>
             <a:fld id="{5BCAD085-E8A6-8845-BD4E-CB4CCA059FC4}" type="datetimeFigureOut">
               <a:rPr lang="en-US" smtClean="0"/>
-              <a:t>1/27/13</a:t>
+              <a:t>5/22/2026</a:t>
             </a:fld>
             <a:endParaRPr lang="en-US"/>
           </a:p>
@@ -3863,7 +4125,7 @@
           <a:p>
             <a:fld id="{C1FF6DA9-008F-8B48-92A6-B652298478BF}" type="slidenum">
               <a:rPr lang="en-US" smtClean="0"/>
-              <a:t>‹#›</a:t>
+              <a:t>‹Nr.›</a:t>
             </a:fld>
             <a:endParaRPr lang="en-US"/>
           </a:p>
@@ -3924,10 +4186,9 @@
           </a:lstStyle>
           <a:p>
             <a:r>
-              <a:rPr lang="en-US" smtClean="0"/>
+              <a:rPr lang="en-US"/>
               <a:t>Click to edit Master title style</a:t>
             </a:r>
-            <a:endParaRPr lang="en-US"/>
           </a:p>
         </p:txBody>
       </p:sp>
@@ -3981,38 +4242,37 @@
           <a:p>
             <a:pPr lvl="0"/>
             <a:r>
-              <a:rPr lang="en-US" smtClean="0"/>
+              <a:rPr lang="en-US"/>
               <a:t>Click to edit Master text styles</a:t>
             </a:r>
           </a:p>
           <a:p>
             <a:pPr lvl="1"/>
             <a:r>
-              <a:rPr lang="en-US" smtClean="0"/>
+              <a:rPr lang="en-US"/>
               <a:t>Second level</a:t>
             </a:r>
           </a:p>
           <a:p>
             <a:pPr lvl="2"/>
             <a:r>
-              <a:rPr lang="en-US" smtClean="0"/>
+              <a:rPr lang="en-US"/>
               <a:t>Third level</a:t>
             </a:r>
           </a:p>
           <a:p>
             <a:pPr lvl="3"/>
             <a:r>
-              <a:rPr lang="en-US" smtClean="0"/>
+              <a:rPr lang="en-US"/>
               <a:t>Fourth level</a:t>
             </a:r>
           </a:p>
           <a:p>
             <a:pPr lvl="4"/>
             <a:r>
-              <a:rPr lang="en-US" smtClean="0"/>
+              <a:rPr lang="en-US"/>
               <a:t>Fifth level</a:t>
             </a:r>
-            <a:endParaRPr lang="en-US"/>
           </a:p>
         </p:txBody>
       </p:sp>
@@ -4075,7 +4335,7 @@
           <a:p>
             <a:pPr lvl="0"/>
             <a:r>
-              <a:rPr lang="en-US" smtClean="0"/>
+              <a:rPr lang="en-US"/>
               <a:t>Click to edit Master text styles</a:t>
             </a:r>
           </a:p>
@@ -4098,7 +4358,7 @@
           <a:p>
             <a:fld id="{5BCAD085-E8A6-8845-BD4E-CB4CCA059FC4}" type="datetimeFigureOut">
               <a:rPr lang="en-US" smtClean="0"/>
-              <a:t>1/27/13</a:t>
+              <a:t>5/22/2026</a:t>
             </a:fld>
             <a:endParaRPr lang="en-US"/>
           </a:p>
@@ -4140,7 +4400,7 @@
           <a:p>
             <a:fld id="{C1FF6DA9-008F-8B48-92A6-B652298478BF}" type="slidenum">
               <a:rPr lang="en-US" smtClean="0"/>
-              <a:t>‹#›</a:t>
+              <a:t>‹Nr.›</a:t>
             </a:fld>
             <a:endParaRPr lang="en-US"/>
           </a:p>
@@ -4201,10 +4461,9 @@
           </a:lstStyle>
           <a:p>
             <a:r>
-              <a:rPr lang="en-US" smtClean="0"/>
+              <a:rPr lang="en-US"/>
               <a:t>Click to edit Master title style</a:t>
             </a:r>
-            <a:endParaRPr lang="en-US"/>
           </a:p>
         </p:txBody>
       </p:sp>
@@ -4328,7 +4587,7 @@
           <a:p>
             <a:pPr lvl="0"/>
             <a:r>
-              <a:rPr lang="en-US" smtClean="0"/>
+              <a:rPr lang="en-US"/>
               <a:t>Click to edit Master text styles</a:t>
             </a:r>
           </a:p>
@@ -4351,7 +4610,7 @@
           <a:p>
             <a:fld id="{5BCAD085-E8A6-8845-BD4E-CB4CCA059FC4}" type="datetimeFigureOut">
               <a:rPr lang="en-US" smtClean="0"/>
-              <a:t>1/27/13</a:t>
+              <a:t>5/22/2026</a:t>
             </a:fld>
             <a:endParaRPr lang="en-US"/>
           </a:p>
@@ -4393,7 +4652,7 @@
           <a:p>
             <a:fld id="{C1FF6DA9-008F-8B48-92A6-B652298478BF}" type="slidenum">
               <a:rPr lang="en-US" smtClean="0"/>
-              <a:t>‹#›</a:t>
+              <a:t>‹Nr.›</a:t>
             </a:fld>
             <a:endParaRPr lang="en-US"/>
           </a:p>
@@ -4460,10 +4719,9 @@
           <a:lstStyle/>
           <a:p>
             <a:r>
-              <a:rPr lang="en-US" smtClean="0"/>
+              <a:rPr lang="en-US"/>
               <a:t>Click to edit Master title style</a:t>
             </a:r>
-            <a:endParaRPr lang="en-US"/>
           </a:p>
         </p:txBody>
       </p:sp>
@@ -4494,38 +4752,37 @@
           <a:p>
             <a:pPr lvl="0"/>
             <a:r>
-              <a:rPr lang="en-US" smtClean="0"/>
+              <a:rPr lang="en-US"/>
               <a:t>Click to edit Master text styles</a:t>
             </a:r>
           </a:p>
           <a:p>
             <a:pPr lvl="1"/>
             <a:r>
-              <a:rPr lang="en-US" smtClean="0"/>
+              <a:rPr lang="en-US"/>
               <a:t>Second level</a:t>
             </a:r>
           </a:p>
           <a:p>
             <a:pPr lvl="2"/>
             <a:r>
-              <a:rPr lang="en-US" smtClean="0"/>
+              <a:rPr lang="en-US"/>
               <a:t>Third level</a:t>
             </a:r>
           </a:p>
           <a:p>
             <a:pPr lvl="3"/>
             <a:r>
-              <a:rPr lang="en-US" smtClean="0"/>
+              <a:rPr lang="en-US"/>
               <a:t>Fourth level</a:t>
             </a:r>
           </a:p>
           <a:p>
             <a:pPr lvl="4"/>
             <a:r>
-              <a:rPr lang="en-US" smtClean="0"/>
+              <a:rPr lang="en-US"/>
               <a:t>Fifth level</a:t>
             </a:r>
-            <a:endParaRPr lang="en-US"/>
           </a:p>
         </p:txBody>
       </p:sp>
@@ -4564,7 +4821,7 @@
           <a:p>
             <a:fld id="{5BCAD085-E8A6-8845-BD4E-CB4CCA059FC4}" type="datetimeFigureOut">
               <a:rPr lang="en-US" smtClean="0"/>
-              <a:t>1/27/13</a:t>
+              <a:t>5/22/2026</a:t>
             </a:fld>
             <a:endParaRPr lang="en-US"/>
           </a:p>
@@ -4642,7 +4899,7 @@
           <a:p>
             <a:fld id="{C1FF6DA9-008F-8B48-92A6-B652298478BF}" type="slidenum">
               <a:rPr lang="en-US" smtClean="0"/>
-              <a:t>‹#›</a:t>
+              <a:t>‹Nr.›</a:t>
             </a:fld>
             <a:endParaRPr lang="en-US"/>
           </a:p>
@@ -4923,7 +5180,7 @@
 </file>
 
 <file path=ppt/slides/slide1.xml><?xml version="1.0" encoding="utf-8"?>
-<p:sld xmlns:a="http://schemas.openxmlformats.org/drawingml/2006/main" xmlns:p="http://schemas.openxmlformats.org/presentationml/2006/main" xmlns:r="http://schemas.openxmlformats.org/officeDocument/2006/relationships">
+<p:sld xmlns:a="http://schemas.openxmlformats.org/drawingml/2006/main" xmlns:r="http://schemas.openxmlformats.org/officeDocument/2006/relationships" xmlns:p="http://schemas.openxmlformats.org/presentationml/2006/main">
   <p:cSld>
     <p:bg>
       <p:bgPr>
@@ -4939,7 +5196,14 @@
         <p:cNvGrpSpPr/>
         <p:nvPr/>
       </p:nvGrpSpPr>
-      <p:grpSpPr/>
+      <p:grpSpPr>
+        <a:xfrm>
+          <a:off x="0" y="0"/>
+          <a:ext cx="0" cy="0"/>
+          <a:chOff x="0" y="0"/>
+          <a:chExt cx="0" cy="0"/>
+        </a:xfrm>
+      </p:grpSpPr>
       <p:sp>
         <p:nvSpPr>
           <p:cNvPr id="2" name="Rectangle 1"/>
@@ -4981,6 +5245,7 @@
           <a:lstStyle/>
           <a:p>
             <a:pPr algn="ctr"/>
+            <a:endParaRPr/>
           </a:p>
         </p:txBody>
       </p:sp>
@@ -5142,7 +5407,7 @@
 </file>
 
 <file path=ppt/slides/slide10.xml><?xml version="1.0" encoding="utf-8"?>
-<p:sld xmlns:a="http://schemas.openxmlformats.org/drawingml/2006/main" xmlns:p="http://schemas.openxmlformats.org/presentationml/2006/main" xmlns:r="http://schemas.openxmlformats.org/officeDocument/2006/relationships">
+<p:sld xmlns:a="http://schemas.openxmlformats.org/drawingml/2006/main" xmlns:r="http://schemas.openxmlformats.org/officeDocument/2006/relationships" xmlns:p="http://schemas.openxmlformats.org/presentationml/2006/main">
   <p:cSld>
     <p:bg>
       <p:bgPr>
@@ -5158,7 +5423,14 @@
         <p:cNvGrpSpPr/>
         <p:nvPr/>
       </p:nvGrpSpPr>
-      <p:grpSpPr/>
+      <p:grpSpPr>
+        <a:xfrm>
+          <a:off x="0" y="0"/>
+          <a:ext cx="0" cy="0"/>
+          <a:chOff x="0" y="0"/>
+          <a:chExt cx="0" cy="0"/>
+        </a:xfrm>
+      </p:grpSpPr>
       <p:sp>
         <p:nvSpPr>
           <p:cNvPr id="2" name="Rectangle 1"/>
@@ -5200,6 +5472,7 @@
           <a:lstStyle/>
           <a:p>
             <a:pPr algn="ctr"/>
+            <a:endParaRPr/>
           </a:p>
         </p:txBody>
       </p:sp>
@@ -5283,6 +5556,7 @@
           <a:lstStyle/>
           <a:p>
             <a:pPr algn="ctr"/>
+            <a:endParaRPr/>
           </a:p>
         </p:txBody>
       </p:sp>
@@ -5295,7 +5569,7 @@
           <p:nvPr/>
         </p:nvPicPr>
         <p:blipFill>
-          <a:blip r:embed="rId2"/>
+          <a:blip r:embed="rId3"/>
           <a:stretch>
             <a:fillRect/>
           </a:stretch>
@@ -5436,7 +5710,2879 @@
 </file>
 
 <file path=ppt/slides/slide11.xml><?xml version="1.0" encoding="utf-8"?>
-<p:sld xmlns:a="http://schemas.openxmlformats.org/drawingml/2006/main" xmlns:p="http://schemas.openxmlformats.org/presentationml/2006/main" xmlns:r="http://schemas.openxmlformats.org/officeDocument/2006/relationships">
+<p:sld xmlns:a="http://schemas.openxmlformats.org/drawingml/2006/main" xmlns:r="http://schemas.openxmlformats.org/officeDocument/2006/relationships" xmlns:p="http://schemas.openxmlformats.org/presentationml/2006/main">
+  <p:cSld>
+    <p:bg>
+      <p:bgPr>
+        <a:solidFill>
+          <a:srgbClr val="111111"/>
+        </a:solidFill>
+        <a:effectLst/>
+      </p:bgPr>
+    </p:bg>
+    <p:spTree>
+      <p:nvGrpSpPr>
+        <p:cNvPr id="1" name=""/>
+        <p:cNvGrpSpPr/>
+        <p:nvPr/>
+      </p:nvGrpSpPr>
+      <p:grpSpPr>
+        <a:xfrm>
+          <a:off x="0" y="0"/>
+          <a:ext cx="0" cy="0"/>
+          <a:chOff x="0" y="0"/>
+          <a:chExt cx="0" cy="0"/>
+        </a:xfrm>
+      </p:grpSpPr>
+      <p:sp>
+        <p:nvSpPr>
+          <p:cNvPr id="2" name="Shape 0"/>
+          <p:cNvSpPr/>
+          <p:nvPr/>
+        </p:nvSpPr>
+        <p:spPr>
+          <a:xfrm>
+            <a:off x="0" y="0"/>
+            <a:ext cx="12188952" cy="146304"/>
+          </a:xfrm>
+          <a:prstGeom prst="rect">
+            <a:avLst/>
+          </a:prstGeom>
+          <a:solidFill>
+            <a:srgbClr val="EB0000"/>
+          </a:solidFill>
+          <a:ln/>
+        </p:spPr>
+        <p:txBody>
+          <a:bodyPr/>
+          <a:lstStyle/>
+          <a:p>
+            <a:endParaRPr/>
+          </a:p>
+        </p:txBody>
+      </p:sp>
+      <p:sp>
+        <p:nvSpPr>
+          <p:cNvPr id="3" name="Text 1"/>
+          <p:cNvSpPr/>
+          <p:nvPr/>
+        </p:nvSpPr>
+        <p:spPr>
+          <a:xfrm>
+            <a:off x="822960" y="1325880"/>
+            <a:ext cx="10515600" cy="1828800"/>
+          </a:xfrm>
+          <a:prstGeom prst="rect">
+            <a:avLst/>
+          </a:prstGeom>
+          <a:noFill/>
+          <a:ln/>
+        </p:spPr>
+        <p:txBody>
+          <a:bodyPr wrap="square" lIns="0" tIns="0" rIns="0" bIns="0" rtlCol="0" anchor="ctr"/>
+          <a:lstStyle/>
+          <a:p>
+            <a:pPr marL="0" indent="0" algn="l">
+              <a:buNone/>
+            </a:pPr>
+            <a:r>
+              <a:rPr lang="en-US" sz="1500" b="1" kern="0" spc="400" dirty="0">
+                <a:solidFill>
+                  <a:srgbClr val="EB0000"/>
+                </a:solidFill>
+                <a:latin typeface="Segoe UI" pitchFamily="34" charset="0"/>
+                <a:ea typeface="Segoe UI" pitchFamily="34" charset="-122"/>
+                <a:cs typeface="Segoe UI" pitchFamily="34" charset="-120"/>
+              </a:rPr>
+              <a:t>ANWENDUNGSBEISPIEL</a:t>
+            </a:r>
+            <a:endParaRPr lang="en-US" sz="1500" dirty="0"/>
+          </a:p>
+          <a:p>
+            <a:pPr marL="0" indent="0" algn="l">
+              <a:buNone/>
+            </a:pPr>
+            <a:r>
+              <a:rPr lang="en-US" sz="4000" b="1" dirty="0">
+                <a:solidFill>
+                  <a:srgbClr val="FFFFFF"/>
+                </a:solidFill>
+                <a:latin typeface="Segoe UI" pitchFamily="34" charset="0"/>
+                <a:ea typeface="Segoe UI" pitchFamily="34" charset="-122"/>
+                <a:cs typeface="Segoe UI" pitchFamily="34" charset="-120"/>
+              </a:rPr>
+              <a:t>Grossis Reise zum Schloss Chillon</a:t>
+            </a:r>
+            <a:endParaRPr lang="en-US" sz="1500" dirty="0"/>
+          </a:p>
+        </p:txBody>
+      </p:sp>
+      <p:sp>
+        <p:nvSpPr>
+          <p:cNvPr id="4" name="Text 2"/>
+          <p:cNvSpPr/>
+          <p:nvPr/>
+        </p:nvSpPr>
+        <p:spPr>
+          <a:xfrm>
+            <a:off x="841248" y="3200400"/>
+            <a:ext cx="10058400" cy="457200"/>
+          </a:xfrm>
+          <a:prstGeom prst="rect">
+            <a:avLst/>
+          </a:prstGeom>
+          <a:noFill/>
+          <a:ln/>
+        </p:spPr>
+        <p:txBody>
+          <a:bodyPr wrap="square" rtlCol="0" anchor="ctr"/>
+          <a:lstStyle/>
+          <a:p>
+            <a:pPr marL="0" indent="0">
+              <a:buNone/>
+            </a:pPr>
+            <a:r>
+              <a:rPr lang="en-US" sz="1800" i="1" dirty="0">
+                <a:solidFill>
+                  <a:srgbClr val="C9C9C9"/>
+                </a:solidFill>
+                <a:latin typeface="Segoe UI" pitchFamily="34" charset="0"/>
+                <a:ea typeface="Segoe UI" pitchFamily="34" charset="-122"/>
+                <a:cs typeface="Segoe UI" pitchFamily="34" charset="-120"/>
+              </a:rPr>
+              <a:t>Wie zwei echte Menschen mit dem SBB Tracker eine stressfreie Reise planen</a:t>
+            </a:r>
+            <a:endParaRPr lang="en-US" sz="1800" dirty="0"/>
+          </a:p>
+        </p:txBody>
+      </p:sp>
+      <p:pic>
+        <p:nvPicPr>
+          <p:cNvPr id="5" name="Image 0" descr="/home/claude/assets/grossi_sq.png"/>
+          <p:cNvPicPr>
+            <a:picLocks noChangeAspect="1"/>
+          </p:cNvPicPr>
+          <p:nvPr/>
+        </p:nvPicPr>
+        <p:blipFill>
+          <a:blip r:embed="rId3"/>
+          <a:stretch>
+            <a:fillRect/>
+          </a:stretch>
+        </p:blipFill>
+        <p:spPr>
+          <a:xfrm>
+            <a:off x="7818120" y="3886200"/>
+            <a:ext cx="1828800" cy="1828800"/>
+          </a:xfrm>
+          <a:prstGeom prst="ellipse">
+            <a:avLst/>
+          </a:prstGeom>
+        </p:spPr>
+      </p:pic>
+      <p:pic>
+        <p:nvPicPr>
+          <p:cNvPr id="6" name="Image 1" descr="/home/claude/assets/thomas_sq.png"/>
+          <p:cNvPicPr>
+            <a:picLocks noChangeAspect="1"/>
+          </p:cNvPicPr>
+          <p:nvPr/>
+        </p:nvPicPr>
+        <p:blipFill>
+          <a:blip r:embed="rId4"/>
+          <a:stretch>
+            <a:fillRect/>
+          </a:stretch>
+        </p:blipFill>
+        <p:spPr>
+          <a:xfrm>
+            <a:off x="9829800" y="3886200"/>
+            <a:ext cx="1828800" cy="1828800"/>
+          </a:xfrm>
+          <a:prstGeom prst="ellipse">
+            <a:avLst/>
+          </a:prstGeom>
+        </p:spPr>
+      </p:pic>
+      <p:sp>
+        <p:nvSpPr>
+          <p:cNvPr id="7" name="Text 3"/>
+          <p:cNvSpPr/>
+          <p:nvPr/>
+        </p:nvSpPr>
+        <p:spPr>
+          <a:xfrm>
+            <a:off x="7818120" y="5760720"/>
+            <a:ext cx="1828800" cy="274320"/>
+          </a:xfrm>
+          <a:prstGeom prst="rect">
+            <a:avLst/>
+          </a:prstGeom>
+          <a:noFill/>
+          <a:ln/>
+        </p:spPr>
+        <p:txBody>
+          <a:bodyPr wrap="square" rtlCol="0" anchor="ctr"/>
+          <a:lstStyle/>
+          <a:p>
+            <a:pPr marL="0" indent="0" algn="ctr">
+              <a:buNone/>
+            </a:pPr>
+            <a:r>
+              <a:rPr lang="en-US" sz="1300" b="1" dirty="0">
+                <a:solidFill>
+                  <a:srgbClr val="FFFFFF"/>
+                </a:solidFill>
+                <a:latin typeface="Segoe UI" pitchFamily="34" charset="0"/>
+                <a:ea typeface="Segoe UI" pitchFamily="34" charset="-122"/>
+                <a:cs typeface="Segoe UI" pitchFamily="34" charset="-120"/>
+              </a:rPr>
+              <a:t>Grossi · 89</a:t>
+            </a:r>
+            <a:endParaRPr lang="en-US" sz="1300" dirty="0"/>
+          </a:p>
+        </p:txBody>
+      </p:sp>
+      <p:sp>
+        <p:nvSpPr>
+          <p:cNvPr id="8" name="Text 4"/>
+          <p:cNvSpPr/>
+          <p:nvPr/>
+        </p:nvSpPr>
+        <p:spPr>
+          <a:xfrm>
+            <a:off x="9829800" y="5760720"/>
+            <a:ext cx="1828800" cy="274320"/>
+          </a:xfrm>
+          <a:prstGeom prst="rect">
+            <a:avLst/>
+          </a:prstGeom>
+          <a:noFill/>
+          <a:ln/>
+        </p:spPr>
+        <p:txBody>
+          <a:bodyPr wrap="square" rtlCol="0" anchor="ctr"/>
+          <a:lstStyle/>
+          <a:p>
+            <a:pPr marL="0" indent="0" algn="ctr">
+              <a:buNone/>
+            </a:pPr>
+            <a:r>
+              <a:rPr lang="en-US" sz="1300" b="1" dirty="0">
+                <a:solidFill>
+                  <a:srgbClr val="FFFFFF"/>
+                </a:solidFill>
+                <a:latin typeface="Segoe UI" pitchFamily="34" charset="0"/>
+                <a:ea typeface="Segoe UI" pitchFamily="34" charset="-122"/>
+                <a:cs typeface="Segoe UI" pitchFamily="34" charset="-120"/>
+              </a:rPr>
+              <a:t>Thomas · 30</a:t>
+            </a:r>
+            <a:endParaRPr lang="en-US" sz="1300" dirty="0"/>
+          </a:p>
+        </p:txBody>
+      </p:sp>
+      <p:sp>
+        <p:nvSpPr>
+          <p:cNvPr id="9" name="TextBox 6"/>
+          <p:cNvSpPr txBox="1"/>
+          <p:nvPr/>
+        </p:nvSpPr>
+        <p:spPr>
+          <a:xfrm>
+            <a:off x="10972800" y="6446520"/>
+            <a:ext cx="822960" cy="320040"/>
+          </a:xfrm>
+          <a:prstGeom prst="rect">
+            <a:avLst/>
+          </a:prstGeom>
+          <a:noFill/>
+        </p:spPr>
+        <p:txBody>
+          <a:bodyPr wrap="square">
+            <a:spAutoFit/>
+          </a:bodyPr>
+          <a:lstStyle/>
+          <a:p>
+            <a:pPr algn="r">
+              <a:spcAft>
+                <a:spcPts val="800"/>
+              </a:spcAft>
+            </a:pPr>
+            <a:r>
+              <a:rPr sz="900" b="0">
+                <a:solidFill>
+                  <a:srgbClr val="999999"/>
+                </a:solidFill>
+                <a:latin typeface="Segoe UI"/>
+              </a:rPr>
+              <a:t>11</a:t>
+            </a:r>
+          </a:p>
+        </p:txBody>
+      </p:sp>
+    </p:spTree>
+  </p:cSld>
+  <p:clrMapOvr>
+    <a:masterClrMapping/>
+  </p:clrMapOvr>
+</p:sld>
+</file>
+
+<file path=ppt/slides/slide12.xml><?xml version="1.0" encoding="utf-8"?>
+<p:sld xmlns:a="http://schemas.openxmlformats.org/drawingml/2006/main" xmlns:r="http://schemas.openxmlformats.org/officeDocument/2006/relationships" xmlns:p="http://schemas.openxmlformats.org/presentationml/2006/main">
+  <p:cSld>
+    <p:spTree>
+      <p:nvGrpSpPr>
+        <p:cNvPr id="1" name=""/>
+        <p:cNvGrpSpPr/>
+        <p:nvPr/>
+      </p:nvGrpSpPr>
+      <p:grpSpPr>
+        <a:xfrm>
+          <a:off x="0" y="0"/>
+          <a:ext cx="0" cy="0"/>
+          <a:chOff x="0" y="0"/>
+          <a:chExt cx="0" cy="0"/>
+        </a:xfrm>
+      </p:grpSpPr>
+      <p:sp>
+        <p:nvSpPr>
+          <p:cNvPr id="2" name="Shape 0"/>
+          <p:cNvSpPr/>
+          <p:nvPr/>
+        </p:nvSpPr>
+        <p:spPr>
+          <a:xfrm>
+            <a:off x="0" y="0"/>
+            <a:ext cx="12188952" cy="146304"/>
+          </a:xfrm>
+          <a:prstGeom prst="rect">
+            <a:avLst/>
+          </a:prstGeom>
+          <a:solidFill>
+            <a:srgbClr val="EB0000"/>
+          </a:solidFill>
+          <a:ln/>
+        </p:spPr>
+        <p:txBody>
+          <a:bodyPr/>
+          <a:lstStyle/>
+          <a:p>
+            <a:endParaRPr/>
+          </a:p>
+        </p:txBody>
+      </p:sp>
+      <p:sp>
+        <p:nvSpPr>
+          <p:cNvPr id="3" name="Text 1"/>
+          <p:cNvSpPr/>
+          <p:nvPr/>
+        </p:nvSpPr>
+        <p:spPr>
+          <a:xfrm>
+            <a:off x="548640" y="384048"/>
+            <a:ext cx="11064240" cy="777240"/>
+          </a:xfrm>
+          <a:prstGeom prst="rect">
+            <a:avLst/>
+          </a:prstGeom>
+          <a:noFill/>
+          <a:ln/>
+        </p:spPr>
+        <p:txBody>
+          <a:bodyPr wrap="square" lIns="0" tIns="0" rIns="0" bIns="0" rtlCol="0" anchor="ctr"/>
+          <a:lstStyle/>
+          <a:p>
+            <a:pPr marL="0" indent="0" algn="l">
+              <a:buNone/>
+            </a:pPr>
+            <a:r>
+              <a:rPr lang="en-US" sz="2800" b="1" dirty="0">
+                <a:solidFill>
+                  <a:srgbClr val="EB0000"/>
+                </a:solidFill>
+                <a:latin typeface="Segoe UI" pitchFamily="34" charset="0"/>
+                <a:ea typeface="Segoe UI" pitchFamily="34" charset="-122"/>
+                <a:cs typeface="Segoe UI" pitchFamily="34" charset="-120"/>
+              </a:rPr>
+              <a:t>Die zwei Hauptpersonen</a:t>
+            </a:r>
+            <a:endParaRPr lang="en-US" sz="2800" dirty="0"/>
+          </a:p>
+        </p:txBody>
+      </p:sp>
+      <p:sp>
+        <p:nvSpPr>
+          <p:cNvPr id="4" name="Shape 2"/>
+          <p:cNvSpPr/>
+          <p:nvPr/>
+        </p:nvSpPr>
+        <p:spPr>
+          <a:xfrm>
+            <a:off x="566928" y="1170432"/>
+            <a:ext cx="2011680" cy="27432"/>
+          </a:xfrm>
+          <a:prstGeom prst="rect">
+            <a:avLst/>
+          </a:prstGeom>
+          <a:solidFill>
+            <a:srgbClr val="EB0000"/>
+          </a:solidFill>
+          <a:ln/>
+        </p:spPr>
+        <p:txBody>
+          <a:bodyPr/>
+          <a:lstStyle/>
+          <a:p>
+            <a:endParaRPr/>
+          </a:p>
+        </p:txBody>
+      </p:sp>
+      <p:sp>
+        <p:nvSpPr>
+          <p:cNvPr id="5" name="Shape 3"/>
+          <p:cNvSpPr/>
+          <p:nvPr/>
+        </p:nvSpPr>
+        <p:spPr>
+          <a:xfrm>
+            <a:off x="640080" y="1417320"/>
+            <a:ext cx="5349240" cy="4709160"/>
+          </a:xfrm>
+          <a:prstGeom prst="roundRect">
+            <a:avLst>
+              <a:gd name="adj" fmla="val 2330"/>
+            </a:avLst>
+          </a:prstGeom>
+          <a:solidFill>
+            <a:srgbClr val="F3E9E4"/>
+          </a:solidFill>
+          <a:ln/>
+        </p:spPr>
+        <p:txBody>
+          <a:bodyPr/>
+          <a:lstStyle/>
+          <a:p>
+            <a:endParaRPr/>
+          </a:p>
+        </p:txBody>
+      </p:sp>
+      <p:pic>
+        <p:nvPicPr>
+          <p:cNvPr id="6" name="Image 0" descr="/home/claude/assets/grossi_sq.png"/>
+          <p:cNvPicPr>
+            <a:picLocks noChangeAspect="1"/>
+          </p:cNvPicPr>
+          <p:nvPr/>
+        </p:nvPicPr>
+        <p:blipFill>
+          <a:blip r:embed="rId3"/>
+          <a:stretch>
+            <a:fillRect/>
+          </a:stretch>
+        </p:blipFill>
+        <p:spPr>
+          <a:xfrm>
+            <a:off x="2468880" y="1691640"/>
+            <a:ext cx="1691640" cy="1691640"/>
+          </a:xfrm>
+          <a:prstGeom prst="ellipse">
+            <a:avLst/>
+          </a:prstGeom>
+        </p:spPr>
+      </p:pic>
+      <p:sp>
+        <p:nvSpPr>
+          <p:cNvPr id="7" name="Text 4"/>
+          <p:cNvSpPr/>
+          <p:nvPr/>
+        </p:nvSpPr>
+        <p:spPr>
+          <a:xfrm>
+            <a:off x="640080" y="3520440"/>
+            <a:ext cx="5349240" cy="320040"/>
+          </a:xfrm>
+          <a:prstGeom prst="rect">
+            <a:avLst/>
+          </a:prstGeom>
+          <a:noFill/>
+          <a:ln/>
+        </p:spPr>
+        <p:txBody>
+          <a:bodyPr wrap="square" rtlCol="0" anchor="ctr"/>
+          <a:lstStyle/>
+          <a:p>
+            <a:pPr marL="0" indent="0" algn="ctr">
+              <a:buNone/>
+            </a:pPr>
+            <a:r>
+              <a:rPr lang="en-US" sz="1400" b="1" dirty="0">
+                <a:solidFill>
+                  <a:srgbClr val="EB0000"/>
+                </a:solidFill>
+                <a:latin typeface="Segoe UI" pitchFamily="34" charset="0"/>
+                <a:ea typeface="Segoe UI" pitchFamily="34" charset="-122"/>
+                <a:cs typeface="Segoe UI" pitchFamily="34" charset="-120"/>
+              </a:rPr>
+              <a:t>GROSSI · 89 JAHRE</a:t>
+            </a:r>
+            <a:endParaRPr lang="en-US" sz="1400" dirty="0"/>
+          </a:p>
+        </p:txBody>
+      </p:sp>
+      <p:sp>
+        <p:nvSpPr>
+          <p:cNvPr id="8" name="Text 5"/>
+          <p:cNvSpPr/>
+          <p:nvPr/>
+        </p:nvSpPr>
+        <p:spPr>
+          <a:xfrm>
+            <a:off x="1005840" y="3886200"/>
+            <a:ext cx="4663440" cy="2103120"/>
+          </a:xfrm>
+          <a:prstGeom prst="rect">
+            <a:avLst/>
+          </a:prstGeom>
+          <a:noFill/>
+          <a:ln/>
+        </p:spPr>
+        <p:txBody>
+          <a:bodyPr wrap="square" rtlCol="0" anchor="t"/>
+          <a:lstStyle/>
+          <a:p>
+            <a:pPr marL="342900" indent="-342900">
+              <a:lnSpc>
+                <a:spcPct val="108000"/>
+              </a:lnSpc>
+              <a:buSzPct val="100000"/>
+              <a:buChar char="•"/>
+            </a:pPr>
+            <a:r>
+              <a:rPr lang="en-US" sz="1400" dirty="0">
+                <a:solidFill>
+                  <a:srgbClr val="1A1A1A"/>
+                </a:solidFill>
+                <a:latin typeface="Segoe UI" pitchFamily="34" charset="0"/>
+                <a:ea typeface="Segoe UI" pitchFamily="34" charset="-122"/>
+                <a:cs typeface="Segoe UI" pitchFamily="34" charset="-120"/>
+              </a:rPr>
+              <a:t>War mit 21 Au-pair in Lausanne</a:t>
+            </a:r>
+            <a:endParaRPr lang="en-US" sz="1400" dirty="0"/>
+          </a:p>
+          <a:p>
+            <a:pPr marL="342900" indent="-342900">
+              <a:lnSpc>
+                <a:spcPct val="108000"/>
+              </a:lnSpc>
+              <a:buSzPct val="100000"/>
+              <a:buChar char="•"/>
+            </a:pPr>
+            <a:r>
+              <a:rPr lang="en-US" sz="1400" dirty="0">
+                <a:solidFill>
+                  <a:srgbClr val="1A1A1A"/>
+                </a:solidFill>
+                <a:latin typeface="Segoe UI" pitchFamily="34" charset="0"/>
+                <a:ea typeface="Segoe UI" pitchFamily="34" charset="-122"/>
+                <a:cs typeface="Segoe UI" pitchFamily="34" charset="-120"/>
+              </a:rPr>
+              <a:t>Lernte am Schloss Chillon den Maler Luc kennen — er verschwand, schickte ihr aber ein Gemälde des Schlosses</a:t>
+            </a:r>
+            <a:endParaRPr lang="en-US" sz="1400" dirty="0"/>
+          </a:p>
+          <a:p>
+            <a:pPr marL="342900" indent="-342900">
+              <a:lnSpc>
+                <a:spcPct val="108000"/>
+              </a:lnSpc>
+              <a:buSzPct val="100000"/>
+              <a:buChar char="•"/>
+            </a:pPr>
+            <a:r>
+              <a:rPr lang="en-US" sz="1400" dirty="0">
+                <a:solidFill>
+                  <a:srgbClr val="1A1A1A"/>
+                </a:solidFill>
+                <a:latin typeface="Segoe UI" pitchFamily="34" charset="0"/>
+                <a:ea typeface="Segoe UI" pitchFamily="34" charset="-122"/>
+                <a:cs typeface="Segoe UI" pitchFamily="34" charset="-120"/>
+              </a:rPr>
+              <a:t>Reist am liebsten mit dem Zug: ruhig statt wild</a:t>
+            </a:r>
+            <a:endParaRPr lang="en-US" sz="1400" dirty="0"/>
+          </a:p>
+          <a:p>
+            <a:pPr marL="342900" indent="-342900">
+              <a:lnSpc>
+                <a:spcPct val="108000"/>
+              </a:lnSpc>
+              <a:buSzPct val="100000"/>
+              <a:buChar char="•"/>
+            </a:pPr>
+            <a:r>
+              <a:rPr lang="en-US" sz="1400" dirty="0">
+                <a:solidFill>
+                  <a:srgbClr val="1A1A1A"/>
+                </a:solidFill>
+                <a:latin typeface="Segoe UI" pitchFamily="34" charset="0"/>
+                <a:ea typeface="Segoe UI" pitchFamily="34" charset="-122"/>
+                <a:cs typeface="Segoe UI" pitchFamily="34" charset="-120"/>
+              </a:rPr>
+              <a:t>Ihr Traum: einmal zurück zum Schloss</a:t>
+            </a:r>
+            <a:endParaRPr lang="en-US" sz="1400" dirty="0"/>
+          </a:p>
+        </p:txBody>
+      </p:sp>
+      <p:sp>
+        <p:nvSpPr>
+          <p:cNvPr id="9" name="Shape 6"/>
+          <p:cNvSpPr/>
+          <p:nvPr/>
+        </p:nvSpPr>
+        <p:spPr>
+          <a:xfrm>
+            <a:off x="6199632" y="1417320"/>
+            <a:ext cx="5349240" cy="4709160"/>
+          </a:xfrm>
+          <a:prstGeom prst="roundRect">
+            <a:avLst>
+              <a:gd name="adj" fmla="val 2330"/>
+            </a:avLst>
+          </a:prstGeom>
+          <a:solidFill>
+            <a:srgbClr val="E2EBE6"/>
+          </a:solidFill>
+          <a:ln/>
+        </p:spPr>
+        <p:txBody>
+          <a:bodyPr/>
+          <a:lstStyle/>
+          <a:p>
+            <a:endParaRPr/>
+          </a:p>
+        </p:txBody>
+      </p:sp>
+      <p:pic>
+        <p:nvPicPr>
+          <p:cNvPr id="10" name="Image 1" descr="/home/claude/assets/thomas_sq.png"/>
+          <p:cNvPicPr>
+            <a:picLocks noChangeAspect="1"/>
+          </p:cNvPicPr>
+          <p:nvPr/>
+        </p:nvPicPr>
+        <p:blipFill>
+          <a:blip r:embed="rId4"/>
+          <a:stretch>
+            <a:fillRect/>
+          </a:stretch>
+        </p:blipFill>
+        <p:spPr>
+          <a:xfrm>
+            <a:off x="8028432" y="1691640"/>
+            <a:ext cx="1691640" cy="1691640"/>
+          </a:xfrm>
+          <a:prstGeom prst="ellipse">
+            <a:avLst/>
+          </a:prstGeom>
+        </p:spPr>
+      </p:pic>
+      <p:sp>
+        <p:nvSpPr>
+          <p:cNvPr id="11" name="Text 7"/>
+          <p:cNvSpPr/>
+          <p:nvPr/>
+        </p:nvSpPr>
+        <p:spPr>
+          <a:xfrm>
+            <a:off x="6199632" y="3520440"/>
+            <a:ext cx="5349240" cy="320040"/>
+          </a:xfrm>
+          <a:prstGeom prst="rect">
+            <a:avLst/>
+          </a:prstGeom>
+          <a:noFill/>
+          <a:ln/>
+        </p:spPr>
+        <p:txBody>
+          <a:bodyPr wrap="square" rtlCol="0" anchor="ctr"/>
+          <a:lstStyle/>
+          <a:p>
+            <a:pPr marL="0" indent="0" algn="ctr">
+              <a:buNone/>
+            </a:pPr>
+            <a:r>
+              <a:rPr lang="en-US" sz="1400" b="1" dirty="0">
+                <a:solidFill>
+                  <a:srgbClr val="2E4A5C"/>
+                </a:solidFill>
+                <a:latin typeface="Segoe UI" pitchFamily="34" charset="0"/>
+                <a:ea typeface="Segoe UI" pitchFamily="34" charset="-122"/>
+                <a:cs typeface="Segoe UI" pitchFamily="34" charset="-120"/>
+              </a:rPr>
+              <a:t>THOMAS · 30 JAHRE</a:t>
+            </a:r>
+            <a:endParaRPr lang="en-US" sz="1400" dirty="0"/>
+          </a:p>
+        </p:txBody>
+      </p:sp>
+      <p:sp>
+        <p:nvSpPr>
+          <p:cNvPr id="12" name="Text 8"/>
+          <p:cNvSpPr/>
+          <p:nvPr/>
+        </p:nvSpPr>
+        <p:spPr>
+          <a:xfrm>
+            <a:off x="6565392" y="3886200"/>
+            <a:ext cx="4663440" cy="2103120"/>
+          </a:xfrm>
+          <a:prstGeom prst="rect">
+            <a:avLst/>
+          </a:prstGeom>
+          <a:noFill/>
+          <a:ln/>
+        </p:spPr>
+        <p:txBody>
+          <a:bodyPr wrap="square" rtlCol="0" anchor="t"/>
+          <a:lstStyle/>
+          <a:p>
+            <a:pPr marL="342900" indent="-342900">
+              <a:lnSpc>
+                <a:spcPct val="108000"/>
+              </a:lnSpc>
+              <a:buSzPct val="100000"/>
+              <a:buChar char="•"/>
+            </a:pPr>
+            <a:r>
+              <a:rPr lang="en-US" sz="1400" dirty="0">
+                <a:solidFill>
+                  <a:srgbClr val="1A1A1A"/>
+                </a:solidFill>
+                <a:latin typeface="Segoe UI" pitchFamily="34" charset="0"/>
+                <a:ea typeface="Segoe UI" pitchFamily="34" charset="-122"/>
+                <a:cs typeface="Segoe UI" pitchFamily="34" charset="-120"/>
+              </a:rPr>
+              <a:t>Grossis Enkel</a:t>
+            </a:r>
+            <a:endParaRPr lang="en-US" sz="1400" dirty="0"/>
+          </a:p>
+          <a:p>
+            <a:pPr marL="342900" indent="-342900">
+              <a:lnSpc>
+                <a:spcPct val="108000"/>
+              </a:lnSpc>
+              <a:buSzPct val="100000"/>
+              <a:buChar char="•"/>
+            </a:pPr>
+            <a:r>
+              <a:rPr lang="en-US" sz="1400" dirty="0">
+                <a:solidFill>
+                  <a:srgbClr val="1A1A1A"/>
+                </a:solidFill>
+                <a:latin typeface="Segoe UI" pitchFamily="34" charset="0"/>
+                <a:ea typeface="Segoe UI" pitchFamily="34" charset="-122"/>
+                <a:cs typeface="Segoe UI" pitchFamily="34" charset="-120"/>
+              </a:rPr>
+              <a:t>Will ihr den Traum erfüllen und die Reise schenken</a:t>
+            </a:r>
+            <a:endParaRPr lang="en-US" sz="1400" dirty="0"/>
+          </a:p>
+          <a:p>
+            <a:pPr marL="342900" indent="-342900">
+              <a:lnSpc>
+                <a:spcPct val="108000"/>
+              </a:lnSpc>
+              <a:buSzPct val="100000"/>
+              <a:buChar char="•"/>
+            </a:pPr>
+            <a:r>
+              <a:rPr lang="en-US" sz="1400" dirty="0">
+                <a:solidFill>
+                  <a:srgbClr val="1A1A1A"/>
+                </a:solidFill>
+                <a:latin typeface="Segoe UI" pitchFamily="34" charset="0"/>
+                <a:ea typeface="Segoe UI" pitchFamily="34" charset="-122"/>
+                <a:cs typeface="Segoe UI" pitchFamily="34" charset="-120"/>
+              </a:rPr>
+              <a:t>Grossi ist nicht mehr so stark — die Reise muss ruhig und planbar sein</a:t>
+            </a:r>
+            <a:endParaRPr lang="en-US" sz="1400" dirty="0"/>
+          </a:p>
+          <a:p>
+            <a:pPr marL="342900" indent="-342900">
+              <a:lnSpc>
+                <a:spcPct val="108000"/>
+              </a:lnSpc>
+              <a:buSzPct val="100000"/>
+              <a:buChar char="•"/>
+            </a:pPr>
+            <a:r>
+              <a:rPr lang="en-US" sz="1400" dirty="0">
+                <a:solidFill>
+                  <a:srgbClr val="1A1A1A"/>
+                </a:solidFill>
+                <a:latin typeface="Segoe UI" pitchFamily="34" charset="0"/>
+                <a:ea typeface="Segoe UI" pitchFamily="34" charset="-122"/>
+                <a:cs typeface="Segoe UI" pitchFamily="34" charset="-120"/>
+              </a:rPr>
+              <a:t>Sein Werkzeug: der SBB Tracker</a:t>
+            </a:r>
+            <a:endParaRPr lang="en-US" sz="1400" dirty="0"/>
+          </a:p>
+        </p:txBody>
+      </p:sp>
+      <p:sp>
+        <p:nvSpPr>
+          <p:cNvPr id="13" name="Text 9"/>
+          <p:cNvSpPr/>
+          <p:nvPr/>
+        </p:nvSpPr>
+        <p:spPr>
+          <a:xfrm>
+            <a:off x="457200" y="6446520"/>
+            <a:ext cx="8229600" cy="320040"/>
+          </a:xfrm>
+          <a:prstGeom prst="rect">
+            <a:avLst/>
+          </a:prstGeom>
+          <a:noFill/>
+          <a:ln/>
+        </p:spPr>
+        <p:txBody>
+          <a:bodyPr wrap="square" rtlCol="0" anchor="ctr"/>
+          <a:lstStyle/>
+          <a:p>
+            <a:pPr marL="0" indent="0" algn="l">
+              <a:buNone/>
+            </a:pPr>
+            <a:r>
+              <a:rPr lang="en-US" sz="900" dirty="0">
+                <a:solidFill>
+                  <a:srgbClr val="A0A0A0"/>
+                </a:solidFill>
+                <a:latin typeface="Segoe UI" pitchFamily="34" charset="0"/>
+                <a:ea typeface="Segoe UI" pitchFamily="34" charset="-122"/>
+                <a:cs typeface="Segoe UI" pitchFamily="34" charset="-120"/>
+              </a:rPr>
+              <a:t>SBB Tracker · ZHAW Scientific Programming FS2026</a:t>
+            </a:r>
+            <a:endParaRPr lang="en-US" sz="900" dirty="0"/>
+          </a:p>
+        </p:txBody>
+      </p:sp>
+      <p:sp>
+        <p:nvSpPr>
+          <p:cNvPr id="14" name="Text 10"/>
+          <p:cNvSpPr/>
+          <p:nvPr/>
+        </p:nvSpPr>
+        <p:spPr>
+          <a:xfrm>
+            <a:off x="10972800" y="6446520"/>
+            <a:ext cx="822960" cy="320040"/>
+          </a:xfrm>
+          <a:prstGeom prst="rect">
+            <a:avLst/>
+          </a:prstGeom>
+          <a:noFill/>
+          <a:ln/>
+        </p:spPr>
+        <p:txBody>
+          <a:bodyPr wrap="square" rtlCol="0" anchor="ctr"/>
+          <a:lstStyle/>
+          <a:p>
+            <a:pPr marL="0" indent="0" algn="r">
+              <a:buNone/>
+            </a:pPr>
+            <a:endParaRPr lang="en-US" sz="900" dirty="0"/>
+          </a:p>
+        </p:txBody>
+      </p:sp>
+      <p:sp>
+        <p:nvSpPr>
+          <p:cNvPr id="15" name="TextBox 6"/>
+          <p:cNvSpPr txBox="1"/>
+          <p:nvPr/>
+        </p:nvSpPr>
+        <p:spPr>
+          <a:xfrm>
+            <a:off x="10972800" y="6446520"/>
+            <a:ext cx="822960" cy="320040"/>
+          </a:xfrm>
+          <a:prstGeom prst="rect">
+            <a:avLst/>
+          </a:prstGeom>
+          <a:noFill/>
+        </p:spPr>
+        <p:txBody>
+          <a:bodyPr wrap="square">
+            <a:spAutoFit/>
+          </a:bodyPr>
+          <a:lstStyle/>
+          <a:p>
+            <a:pPr algn="r">
+              <a:spcAft>
+                <a:spcPts val="800"/>
+              </a:spcAft>
+            </a:pPr>
+            <a:r>
+              <a:rPr sz="900" b="0">
+                <a:solidFill>
+                  <a:srgbClr val="999999"/>
+                </a:solidFill>
+                <a:latin typeface="Segoe UI"/>
+              </a:rPr>
+              <a:t>12</a:t>
+            </a:r>
+          </a:p>
+        </p:txBody>
+      </p:sp>
+    </p:spTree>
+  </p:cSld>
+  <p:clrMapOvr>
+    <a:masterClrMapping/>
+  </p:clrMapOvr>
+</p:sld>
+</file>
+
+<file path=ppt/slides/slide13.xml><?xml version="1.0" encoding="utf-8"?>
+<p:sld xmlns:a="http://schemas.openxmlformats.org/drawingml/2006/main" xmlns:r="http://schemas.openxmlformats.org/officeDocument/2006/relationships" xmlns:p="http://schemas.openxmlformats.org/presentationml/2006/main">
+  <p:cSld>
+    <p:spTree>
+      <p:nvGrpSpPr>
+        <p:cNvPr id="1" name=""/>
+        <p:cNvGrpSpPr/>
+        <p:nvPr/>
+      </p:nvGrpSpPr>
+      <p:grpSpPr>
+        <a:xfrm>
+          <a:off x="0" y="0"/>
+          <a:ext cx="0" cy="0"/>
+          <a:chOff x="0" y="0"/>
+          <a:chExt cx="0" cy="0"/>
+        </a:xfrm>
+      </p:grpSpPr>
+      <p:sp>
+        <p:nvSpPr>
+          <p:cNvPr id="2" name="Shape 0"/>
+          <p:cNvSpPr/>
+          <p:nvPr/>
+        </p:nvSpPr>
+        <p:spPr>
+          <a:xfrm>
+            <a:off x="0" y="0"/>
+            <a:ext cx="12188952" cy="146304"/>
+          </a:xfrm>
+          <a:prstGeom prst="rect">
+            <a:avLst/>
+          </a:prstGeom>
+          <a:solidFill>
+            <a:srgbClr val="EB0000"/>
+          </a:solidFill>
+          <a:ln/>
+        </p:spPr>
+        <p:txBody>
+          <a:bodyPr/>
+          <a:lstStyle/>
+          <a:p>
+            <a:endParaRPr/>
+          </a:p>
+        </p:txBody>
+      </p:sp>
+      <p:sp>
+        <p:nvSpPr>
+          <p:cNvPr id="3" name="Text 1"/>
+          <p:cNvSpPr/>
+          <p:nvPr/>
+        </p:nvSpPr>
+        <p:spPr>
+          <a:xfrm>
+            <a:off x="548640" y="384048"/>
+            <a:ext cx="11064240" cy="777240"/>
+          </a:xfrm>
+          <a:prstGeom prst="rect">
+            <a:avLst/>
+          </a:prstGeom>
+          <a:noFill/>
+          <a:ln/>
+        </p:spPr>
+        <p:txBody>
+          <a:bodyPr wrap="square" lIns="0" tIns="0" rIns="0" bIns="0" rtlCol="0" anchor="ctr"/>
+          <a:lstStyle/>
+          <a:p>
+            <a:pPr marL="0" indent="0" algn="l">
+              <a:buNone/>
+            </a:pPr>
+            <a:r>
+              <a:rPr lang="en-US" sz="2800" b="1" dirty="0">
+                <a:solidFill>
+                  <a:srgbClr val="EB0000"/>
+                </a:solidFill>
+                <a:latin typeface="Segoe UI" pitchFamily="34" charset="0"/>
+                <a:ea typeface="Segoe UI" pitchFamily="34" charset="-122"/>
+                <a:cs typeface="Segoe UI" pitchFamily="34" charset="-120"/>
+              </a:rPr>
+              <a:t>Der Wunsch</a:t>
+            </a:r>
+            <a:endParaRPr lang="en-US" sz="2800" dirty="0"/>
+          </a:p>
+        </p:txBody>
+      </p:sp>
+      <p:sp>
+        <p:nvSpPr>
+          <p:cNvPr id="4" name="Shape 2"/>
+          <p:cNvSpPr/>
+          <p:nvPr/>
+        </p:nvSpPr>
+        <p:spPr>
+          <a:xfrm>
+            <a:off x="566928" y="1170432"/>
+            <a:ext cx="2011680" cy="27432"/>
+          </a:xfrm>
+          <a:prstGeom prst="rect">
+            <a:avLst/>
+          </a:prstGeom>
+          <a:solidFill>
+            <a:srgbClr val="EB0000"/>
+          </a:solidFill>
+          <a:ln/>
+        </p:spPr>
+        <p:txBody>
+          <a:bodyPr/>
+          <a:lstStyle/>
+          <a:p>
+            <a:endParaRPr/>
+          </a:p>
+        </p:txBody>
+      </p:sp>
+      <p:pic>
+        <p:nvPicPr>
+          <p:cNvPr id="5" name="Image 0" descr="/home/claude/assets/grossi_sq.png"/>
+          <p:cNvPicPr>
+            <a:picLocks noChangeAspect="1"/>
+          </p:cNvPicPr>
+          <p:nvPr/>
+        </p:nvPicPr>
+        <p:blipFill>
+          <a:blip r:embed="rId3"/>
+          <a:stretch>
+            <a:fillRect/>
+          </a:stretch>
+        </p:blipFill>
+        <p:spPr>
+          <a:xfrm>
+            <a:off x="731520" y="1920240"/>
+            <a:ext cx="2011680" cy="2011680"/>
+          </a:xfrm>
+          <a:prstGeom prst="ellipse">
+            <a:avLst/>
+          </a:prstGeom>
+        </p:spPr>
+      </p:pic>
+      <p:sp>
+        <p:nvSpPr>
+          <p:cNvPr id="6" name="Text 3"/>
+          <p:cNvSpPr/>
+          <p:nvPr/>
+        </p:nvSpPr>
+        <p:spPr>
+          <a:xfrm>
+            <a:off x="731520" y="3977640"/>
+            <a:ext cx="2011680" cy="274320"/>
+          </a:xfrm>
+          <a:prstGeom prst="rect">
+            <a:avLst/>
+          </a:prstGeom>
+          <a:noFill/>
+          <a:ln/>
+        </p:spPr>
+        <p:txBody>
+          <a:bodyPr wrap="square" rtlCol="0" anchor="ctr"/>
+          <a:lstStyle/>
+          <a:p>
+            <a:pPr marL="0" indent="0" algn="ctr">
+              <a:buNone/>
+            </a:pPr>
+            <a:r>
+              <a:rPr lang="en-US" sz="1300" b="1" dirty="0">
+                <a:solidFill>
+                  <a:srgbClr val="EB0000"/>
+                </a:solidFill>
+                <a:latin typeface="Segoe UI" pitchFamily="34" charset="0"/>
+                <a:ea typeface="Segoe UI" pitchFamily="34" charset="-122"/>
+                <a:cs typeface="Segoe UI" pitchFamily="34" charset="-120"/>
+              </a:rPr>
+              <a:t>Grossi</a:t>
+            </a:r>
+            <a:endParaRPr lang="en-US" sz="1300" dirty="0"/>
+          </a:p>
+        </p:txBody>
+      </p:sp>
+      <p:sp>
+        <p:nvSpPr>
+          <p:cNvPr id="7" name="Shape 4"/>
+          <p:cNvSpPr/>
+          <p:nvPr/>
+        </p:nvSpPr>
+        <p:spPr>
+          <a:xfrm>
+            <a:off x="3063240" y="1691640"/>
+            <a:ext cx="8321040" cy="1097280"/>
+          </a:xfrm>
+          <a:prstGeom prst="roundRect">
+            <a:avLst>
+              <a:gd name="adj" fmla="val 8333"/>
+            </a:avLst>
+          </a:prstGeom>
+          <a:solidFill>
+            <a:srgbClr val="FBEFE9"/>
+          </a:solidFill>
+          <a:ln/>
+          <a:effectLst>
+            <a:outerShdw blurRad="88900" dist="38100" dir="8100000" algn="bl" rotWithShape="0">
+              <a:srgbClr val="000000">
+                <a:alpha val="12000"/>
+              </a:srgbClr>
+            </a:outerShdw>
+          </a:effectLst>
+        </p:spPr>
+        <p:txBody>
+          <a:bodyPr/>
+          <a:lstStyle/>
+          <a:p>
+            <a:endParaRPr/>
+          </a:p>
+        </p:txBody>
+      </p:sp>
+      <p:sp>
+        <p:nvSpPr>
+          <p:cNvPr id="8" name="Shape 5"/>
+          <p:cNvSpPr/>
+          <p:nvPr/>
+        </p:nvSpPr>
+        <p:spPr>
+          <a:xfrm rot="10800000">
+            <a:off x="3566160" y="2770632"/>
+            <a:ext cx="320040" cy="256032"/>
+          </a:xfrm>
+          <a:prstGeom prst="triangle">
+            <a:avLst/>
+          </a:prstGeom>
+          <a:solidFill>
+            <a:srgbClr val="FBEFE9"/>
+          </a:solidFill>
+          <a:ln/>
+        </p:spPr>
+        <p:txBody>
+          <a:bodyPr/>
+          <a:lstStyle/>
+          <a:p>
+            <a:endParaRPr/>
+          </a:p>
+        </p:txBody>
+      </p:sp>
+      <p:sp>
+        <p:nvSpPr>
+          <p:cNvPr id="9" name="Text 6"/>
+          <p:cNvSpPr/>
+          <p:nvPr/>
+        </p:nvSpPr>
+        <p:spPr>
+          <a:xfrm>
+            <a:off x="3319272" y="1783080"/>
+            <a:ext cx="7808976" cy="914400"/>
+          </a:xfrm>
+          <a:prstGeom prst="rect">
+            <a:avLst/>
+          </a:prstGeom>
+          <a:noFill/>
+          <a:ln/>
+        </p:spPr>
+        <p:txBody>
+          <a:bodyPr wrap="square" lIns="0" tIns="0" rIns="0" bIns="0" rtlCol="0" anchor="ctr"/>
+          <a:lstStyle/>
+          <a:p>
+            <a:pPr marL="0" indent="0" algn="l">
+              <a:buNone/>
+            </a:pPr>
+            <a:r>
+              <a:rPr lang="en-US" sz="1500" i="1" dirty="0">
+                <a:solidFill>
+                  <a:srgbClr val="1A1A1A"/>
+                </a:solidFill>
+                <a:latin typeface="Segoe UI" pitchFamily="34" charset="0"/>
+                <a:ea typeface="Segoe UI" pitchFamily="34" charset="-122"/>
+                <a:cs typeface="Segoe UI" pitchFamily="34" charset="-120"/>
+              </a:rPr>
+              <a:t>«Den Zug mag ich am liebsten — schön ruhig. Aber so eine weite Reise … nur bitte nicht im grossen Gedränge.»</a:t>
+            </a:r>
+            <a:endParaRPr lang="en-US" sz="1500" dirty="0"/>
+          </a:p>
+        </p:txBody>
+      </p:sp>
+      <p:pic>
+        <p:nvPicPr>
+          <p:cNvPr id="10" name="Image 1" descr="/home/claude/assets/thomas_sq.png"/>
+          <p:cNvPicPr>
+            <a:picLocks noChangeAspect="1"/>
+          </p:cNvPicPr>
+          <p:nvPr/>
+        </p:nvPicPr>
+        <p:blipFill>
+          <a:blip r:embed="rId4"/>
+          <a:stretch>
+            <a:fillRect/>
+          </a:stretch>
+        </p:blipFill>
+        <p:spPr>
+          <a:xfrm>
+            <a:off x="9418320" y="4114800"/>
+            <a:ext cx="2011680" cy="2011680"/>
+          </a:xfrm>
+          <a:prstGeom prst="ellipse">
+            <a:avLst/>
+          </a:prstGeom>
+        </p:spPr>
+      </p:pic>
+      <p:sp>
+        <p:nvSpPr>
+          <p:cNvPr id="11" name="Text 7"/>
+          <p:cNvSpPr/>
+          <p:nvPr/>
+        </p:nvSpPr>
+        <p:spPr>
+          <a:xfrm>
+            <a:off x="9418320" y="6172200"/>
+            <a:ext cx="2011680" cy="274320"/>
+          </a:xfrm>
+          <a:prstGeom prst="rect">
+            <a:avLst/>
+          </a:prstGeom>
+          <a:noFill/>
+          <a:ln/>
+        </p:spPr>
+        <p:txBody>
+          <a:bodyPr wrap="square" rtlCol="0" anchor="ctr"/>
+          <a:lstStyle/>
+          <a:p>
+            <a:pPr marL="0" indent="0" algn="ctr">
+              <a:buNone/>
+            </a:pPr>
+            <a:r>
+              <a:rPr lang="en-US" sz="1300" b="1" dirty="0">
+                <a:solidFill>
+                  <a:srgbClr val="2E4A5C"/>
+                </a:solidFill>
+                <a:latin typeface="Segoe UI" pitchFamily="34" charset="0"/>
+                <a:ea typeface="Segoe UI" pitchFamily="34" charset="-122"/>
+                <a:cs typeface="Segoe UI" pitchFamily="34" charset="-120"/>
+              </a:rPr>
+              <a:t>Thomas</a:t>
+            </a:r>
+            <a:endParaRPr lang="en-US" sz="1300" dirty="0"/>
+          </a:p>
+        </p:txBody>
+      </p:sp>
+      <p:sp>
+        <p:nvSpPr>
+          <p:cNvPr id="12" name="Shape 8"/>
+          <p:cNvSpPr/>
+          <p:nvPr/>
+        </p:nvSpPr>
+        <p:spPr>
+          <a:xfrm>
+            <a:off x="777240" y="4526280"/>
+            <a:ext cx="8321040" cy="1097280"/>
+          </a:xfrm>
+          <a:prstGeom prst="roundRect">
+            <a:avLst>
+              <a:gd name="adj" fmla="val 8333"/>
+            </a:avLst>
+          </a:prstGeom>
+          <a:solidFill>
+            <a:srgbClr val="E9F1EC"/>
+          </a:solidFill>
+          <a:ln/>
+          <a:effectLst>
+            <a:outerShdw blurRad="88900" dist="38100" dir="8100000" algn="bl" rotWithShape="0">
+              <a:srgbClr val="000000">
+                <a:alpha val="12000"/>
+              </a:srgbClr>
+            </a:outerShdw>
+          </a:effectLst>
+        </p:spPr>
+        <p:txBody>
+          <a:bodyPr/>
+          <a:lstStyle/>
+          <a:p>
+            <a:endParaRPr/>
+          </a:p>
+        </p:txBody>
+      </p:sp>
+      <p:sp>
+        <p:nvSpPr>
+          <p:cNvPr id="13" name="Shape 9"/>
+          <p:cNvSpPr/>
+          <p:nvPr/>
+        </p:nvSpPr>
+        <p:spPr>
+          <a:xfrm rot="10800000">
+            <a:off x="8275320" y="5605272"/>
+            <a:ext cx="320040" cy="256032"/>
+          </a:xfrm>
+          <a:prstGeom prst="triangle">
+            <a:avLst/>
+          </a:prstGeom>
+          <a:solidFill>
+            <a:srgbClr val="E9F1EC"/>
+          </a:solidFill>
+          <a:ln/>
+        </p:spPr>
+        <p:txBody>
+          <a:bodyPr/>
+          <a:lstStyle/>
+          <a:p>
+            <a:endParaRPr/>
+          </a:p>
+        </p:txBody>
+      </p:sp>
+      <p:sp>
+        <p:nvSpPr>
+          <p:cNvPr id="14" name="Text 10"/>
+          <p:cNvSpPr/>
+          <p:nvPr/>
+        </p:nvSpPr>
+        <p:spPr>
+          <a:xfrm>
+            <a:off x="1033272" y="4617720"/>
+            <a:ext cx="7808976" cy="914400"/>
+          </a:xfrm>
+          <a:prstGeom prst="rect">
+            <a:avLst/>
+          </a:prstGeom>
+          <a:noFill/>
+          <a:ln/>
+        </p:spPr>
+        <p:txBody>
+          <a:bodyPr wrap="square" lIns="0" tIns="0" rIns="0" bIns="0" rtlCol="0" anchor="ctr"/>
+          <a:lstStyle/>
+          <a:p>
+            <a:pPr marL="0" indent="0" algn="l">
+              <a:buNone/>
+            </a:pPr>
+            <a:r>
+              <a:rPr lang="en-US" sz="1500" i="1" dirty="0">
+                <a:solidFill>
+                  <a:srgbClr val="1A1A1A"/>
+                </a:solidFill>
+                <a:latin typeface="Segoe UI" pitchFamily="34" charset="0"/>
+                <a:ea typeface="Segoe UI" pitchFamily="34" charset="-122"/>
+                <a:cs typeface="Segoe UI" pitchFamily="34" charset="-120"/>
+              </a:rPr>
+              <a:t>«Dann finden wir mit der App heraus, wann und wo am wenigsten los ist — und welcher Umstieg der entspannteste ist.»</a:t>
+            </a:r>
+            <a:endParaRPr lang="en-US" sz="1500" dirty="0"/>
+          </a:p>
+        </p:txBody>
+      </p:sp>
+      <p:sp>
+        <p:nvSpPr>
+          <p:cNvPr id="15" name="Text 11"/>
+          <p:cNvSpPr/>
+          <p:nvPr/>
+        </p:nvSpPr>
+        <p:spPr>
+          <a:xfrm>
+            <a:off x="457200" y="6446520"/>
+            <a:ext cx="8229600" cy="320040"/>
+          </a:xfrm>
+          <a:prstGeom prst="rect">
+            <a:avLst/>
+          </a:prstGeom>
+          <a:noFill/>
+          <a:ln/>
+        </p:spPr>
+        <p:txBody>
+          <a:bodyPr wrap="square" rtlCol="0" anchor="ctr"/>
+          <a:lstStyle/>
+          <a:p>
+            <a:pPr marL="0" indent="0" algn="l">
+              <a:buNone/>
+            </a:pPr>
+            <a:r>
+              <a:rPr lang="en-US" sz="900" dirty="0">
+                <a:solidFill>
+                  <a:srgbClr val="A0A0A0"/>
+                </a:solidFill>
+                <a:latin typeface="Segoe UI" pitchFamily="34" charset="0"/>
+                <a:ea typeface="Segoe UI" pitchFamily="34" charset="-122"/>
+                <a:cs typeface="Segoe UI" pitchFamily="34" charset="-120"/>
+              </a:rPr>
+              <a:t>SBB Tracker · ZHAW Scientific Programming FS2026</a:t>
+            </a:r>
+            <a:endParaRPr lang="en-US" sz="900" dirty="0"/>
+          </a:p>
+        </p:txBody>
+      </p:sp>
+      <p:sp>
+        <p:nvSpPr>
+          <p:cNvPr id="16" name="Text 12"/>
+          <p:cNvSpPr/>
+          <p:nvPr/>
+        </p:nvSpPr>
+        <p:spPr>
+          <a:xfrm>
+            <a:off x="10972800" y="6446520"/>
+            <a:ext cx="822960" cy="320040"/>
+          </a:xfrm>
+          <a:prstGeom prst="rect">
+            <a:avLst/>
+          </a:prstGeom>
+          <a:noFill/>
+          <a:ln/>
+        </p:spPr>
+        <p:txBody>
+          <a:bodyPr wrap="square" rtlCol="0" anchor="ctr"/>
+          <a:lstStyle/>
+          <a:p>
+            <a:pPr marL="0" indent="0" algn="r">
+              <a:buNone/>
+            </a:pPr>
+            <a:endParaRPr lang="en-US" sz="900" dirty="0"/>
+          </a:p>
+        </p:txBody>
+      </p:sp>
+      <p:sp>
+        <p:nvSpPr>
+          <p:cNvPr id="17" name="TextBox 6"/>
+          <p:cNvSpPr txBox="1"/>
+          <p:nvPr/>
+        </p:nvSpPr>
+        <p:spPr>
+          <a:xfrm>
+            <a:off x="10972800" y="6446520"/>
+            <a:ext cx="822960" cy="320040"/>
+          </a:xfrm>
+          <a:prstGeom prst="rect">
+            <a:avLst/>
+          </a:prstGeom>
+          <a:noFill/>
+        </p:spPr>
+        <p:txBody>
+          <a:bodyPr wrap="square">
+            <a:spAutoFit/>
+          </a:bodyPr>
+          <a:lstStyle/>
+          <a:p>
+            <a:pPr algn="r">
+              <a:spcAft>
+                <a:spcPts val="800"/>
+              </a:spcAft>
+            </a:pPr>
+            <a:r>
+              <a:rPr sz="900" b="0">
+                <a:solidFill>
+                  <a:srgbClr val="999999"/>
+                </a:solidFill>
+                <a:latin typeface="Segoe UI"/>
+              </a:rPr>
+              <a:t>13</a:t>
+            </a:r>
+          </a:p>
+        </p:txBody>
+      </p:sp>
+    </p:spTree>
+  </p:cSld>
+  <p:clrMapOvr>
+    <a:masterClrMapping/>
+  </p:clrMapOvr>
+</p:sld>
+</file>
+
+<file path=ppt/slides/slide14.xml><?xml version="1.0" encoding="utf-8"?>
+<p:sld xmlns:a="http://schemas.openxmlformats.org/drawingml/2006/main" xmlns:r="http://schemas.openxmlformats.org/officeDocument/2006/relationships" xmlns:p="http://schemas.openxmlformats.org/presentationml/2006/main">
+  <p:cSld>
+    <p:spTree>
+      <p:nvGrpSpPr>
+        <p:cNvPr id="1" name=""/>
+        <p:cNvGrpSpPr/>
+        <p:nvPr/>
+      </p:nvGrpSpPr>
+      <p:grpSpPr>
+        <a:xfrm>
+          <a:off x="0" y="0"/>
+          <a:ext cx="0" cy="0"/>
+          <a:chOff x="0" y="0"/>
+          <a:chExt cx="0" cy="0"/>
+        </a:xfrm>
+      </p:grpSpPr>
+      <p:sp>
+        <p:nvSpPr>
+          <p:cNvPr id="2" name="Shape 0"/>
+          <p:cNvSpPr/>
+          <p:nvPr/>
+        </p:nvSpPr>
+        <p:spPr>
+          <a:xfrm>
+            <a:off x="0" y="0"/>
+            <a:ext cx="12188952" cy="146304"/>
+          </a:xfrm>
+          <a:prstGeom prst="rect">
+            <a:avLst/>
+          </a:prstGeom>
+          <a:solidFill>
+            <a:srgbClr val="EB0000"/>
+          </a:solidFill>
+          <a:ln/>
+        </p:spPr>
+        <p:txBody>
+          <a:bodyPr/>
+          <a:lstStyle/>
+          <a:p>
+            <a:endParaRPr/>
+          </a:p>
+        </p:txBody>
+      </p:sp>
+      <p:sp>
+        <p:nvSpPr>
+          <p:cNvPr id="3" name="Text 1"/>
+          <p:cNvSpPr/>
+          <p:nvPr/>
+        </p:nvSpPr>
+        <p:spPr>
+          <a:xfrm>
+            <a:off x="548640" y="384048"/>
+            <a:ext cx="11064240" cy="777240"/>
+          </a:xfrm>
+          <a:prstGeom prst="rect">
+            <a:avLst/>
+          </a:prstGeom>
+          <a:noFill/>
+          <a:ln/>
+        </p:spPr>
+        <p:txBody>
+          <a:bodyPr wrap="square" lIns="0" tIns="0" rIns="0" bIns="0" rtlCol="0" anchor="ctr"/>
+          <a:lstStyle/>
+          <a:p>
+            <a:pPr marL="0" indent="0" algn="l">
+              <a:buNone/>
+            </a:pPr>
+            <a:r>
+              <a:rPr lang="en-US" sz="2800" b="1" dirty="0">
+                <a:solidFill>
+                  <a:srgbClr val="EB0000"/>
+                </a:solidFill>
+                <a:latin typeface="Segoe UI" pitchFamily="34" charset="0"/>
+                <a:ea typeface="Segoe UI" pitchFamily="34" charset="-122"/>
+                <a:cs typeface="Segoe UI" pitchFamily="34" charset="-120"/>
+              </a:rPr>
+              <a:t>Schritt 1 — die Karte: wo ist am meisten los?</a:t>
+            </a:r>
+            <a:endParaRPr lang="en-US" sz="2800" dirty="0"/>
+          </a:p>
+        </p:txBody>
+      </p:sp>
+      <p:sp>
+        <p:nvSpPr>
+          <p:cNvPr id="4" name="Shape 2"/>
+          <p:cNvSpPr/>
+          <p:nvPr/>
+        </p:nvSpPr>
+        <p:spPr>
+          <a:xfrm>
+            <a:off x="566928" y="1170432"/>
+            <a:ext cx="2011680" cy="27432"/>
+          </a:xfrm>
+          <a:prstGeom prst="rect">
+            <a:avLst/>
+          </a:prstGeom>
+          <a:solidFill>
+            <a:srgbClr val="EB0000"/>
+          </a:solidFill>
+          <a:ln/>
+        </p:spPr>
+        <p:txBody>
+          <a:bodyPr/>
+          <a:lstStyle/>
+          <a:p>
+            <a:endParaRPr/>
+          </a:p>
+        </p:txBody>
+      </p:sp>
+      <p:pic>
+        <p:nvPicPr>
+          <p:cNvPr id="5" name="Image 0" descr="/home/claude/assets/train.png"/>
+          <p:cNvPicPr>
+            <a:picLocks noChangeAspect="1"/>
+          </p:cNvPicPr>
+          <p:nvPr/>
+        </p:nvPicPr>
+        <p:blipFill>
+          <a:blip r:embed="rId3"/>
+          <a:stretch>
+            <a:fillRect/>
+          </a:stretch>
+        </p:blipFill>
+        <p:spPr>
+          <a:xfrm>
+            <a:off x="3108960" y="1371600"/>
+            <a:ext cx="5943600" cy="756231"/>
+          </a:xfrm>
+          <a:prstGeom prst="rect">
+            <a:avLst/>
+          </a:prstGeom>
+        </p:spPr>
+      </p:pic>
+      <p:sp>
+        <p:nvSpPr>
+          <p:cNvPr id="6" name="Text 3"/>
+          <p:cNvSpPr/>
+          <p:nvPr/>
+        </p:nvSpPr>
+        <p:spPr>
+          <a:xfrm>
+            <a:off x="3108960" y="2121408"/>
+            <a:ext cx="5943600" cy="320040"/>
+          </a:xfrm>
+          <a:prstGeom prst="rect">
+            <a:avLst/>
+          </a:prstGeom>
+          <a:noFill/>
+          <a:ln/>
+        </p:spPr>
+        <p:txBody>
+          <a:bodyPr wrap="square" rtlCol="0" anchor="ctr"/>
+          <a:lstStyle/>
+          <a:p>
+            <a:pPr marL="0" indent="0" algn="ctr">
+              <a:buNone/>
+            </a:pPr>
+            <a:r>
+              <a:rPr lang="en-US" sz="1200" i="1" dirty="0">
+                <a:solidFill>
+                  <a:srgbClr val="595959"/>
+                </a:solidFill>
+                <a:latin typeface="Segoe UI" pitchFamily="34" charset="0"/>
+                <a:ea typeface="Segoe UI" pitchFamily="34" charset="-122"/>
+                <a:cs typeface="Segoe UI" pitchFamily="34" charset="-120"/>
+              </a:rPr>
+              <a:t>Beim Laden fährt ein SBB-Zug über die Gleise — Grossi ist begeistert.</a:t>
+            </a:r>
+            <a:endParaRPr lang="en-US" sz="1200" dirty="0"/>
+          </a:p>
+        </p:txBody>
+      </p:sp>
+      <p:pic>
+        <p:nvPicPr>
+          <p:cNvPr id="7" name="Image 1" descr="/home/claude/assets/st_map.png"/>
+          <p:cNvPicPr>
+            <a:picLocks noChangeAspect="1"/>
+          </p:cNvPicPr>
+          <p:nvPr/>
+        </p:nvPicPr>
+        <p:blipFill>
+          <a:blip r:embed="rId4"/>
+          <a:srcRect l="-8629" r="-8629"/>
+          <a:stretch/>
+        </p:blipFill>
+        <p:spPr>
+          <a:xfrm>
+            <a:off x="3154680" y="2514600"/>
+            <a:ext cx="5879592" cy="3566160"/>
+          </a:xfrm>
+          <a:prstGeom prst="rect">
+            <a:avLst/>
+          </a:prstGeom>
+        </p:spPr>
+      </p:pic>
+      <p:pic>
+        <p:nvPicPr>
+          <p:cNvPr id="8" name="Image 2" descr="/home/claude/assets/grossi_sq.png"/>
+          <p:cNvPicPr>
+            <a:picLocks noChangeAspect="1"/>
+          </p:cNvPicPr>
+          <p:nvPr/>
+        </p:nvPicPr>
+        <p:blipFill>
+          <a:blip r:embed="rId5"/>
+          <a:stretch>
+            <a:fillRect/>
+          </a:stretch>
+        </p:blipFill>
+        <p:spPr>
+          <a:xfrm>
+            <a:off x="640080" y="2743200"/>
+            <a:ext cx="1371600" cy="1371600"/>
+          </a:xfrm>
+          <a:prstGeom prst="ellipse">
+            <a:avLst/>
+          </a:prstGeom>
+        </p:spPr>
+      </p:pic>
+      <p:sp>
+        <p:nvSpPr>
+          <p:cNvPr id="9" name="Shape 4"/>
+          <p:cNvSpPr/>
+          <p:nvPr/>
+        </p:nvSpPr>
+        <p:spPr>
+          <a:xfrm>
+            <a:off x="502920" y="4206240"/>
+            <a:ext cx="2514600" cy="1417320"/>
+          </a:xfrm>
+          <a:prstGeom prst="roundRect">
+            <a:avLst>
+              <a:gd name="adj" fmla="val 6452"/>
+            </a:avLst>
+          </a:prstGeom>
+          <a:solidFill>
+            <a:srgbClr val="FBEFE9"/>
+          </a:solidFill>
+          <a:ln/>
+          <a:effectLst>
+            <a:outerShdw blurRad="88900" dist="38100" dir="8100000" algn="bl" rotWithShape="0">
+              <a:srgbClr val="000000">
+                <a:alpha val="12000"/>
+              </a:srgbClr>
+            </a:outerShdw>
+          </a:effectLst>
+        </p:spPr>
+        <p:txBody>
+          <a:bodyPr/>
+          <a:lstStyle/>
+          <a:p>
+            <a:endParaRPr/>
+          </a:p>
+        </p:txBody>
+      </p:sp>
+      <p:sp>
+        <p:nvSpPr>
+          <p:cNvPr id="10" name="Shape 5"/>
+          <p:cNvSpPr/>
+          <p:nvPr/>
+        </p:nvSpPr>
+        <p:spPr>
+          <a:xfrm rot="10800000">
+            <a:off x="1005840" y="5605272"/>
+            <a:ext cx="320040" cy="256032"/>
+          </a:xfrm>
+          <a:prstGeom prst="triangle">
+            <a:avLst/>
+          </a:prstGeom>
+          <a:solidFill>
+            <a:srgbClr val="FBEFE9"/>
+          </a:solidFill>
+          <a:ln/>
+        </p:spPr>
+        <p:txBody>
+          <a:bodyPr/>
+          <a:lstStyle/>
+          <a:p>
+            <a:endParaRPr/>
+          </a:p>
+        </p:txBody>
+      </p:sp>
+      <p:sp>
+        <p:nvSpPr>
+          <p:cNvPr id="11" name="Text 6"/>
+          <p:cNvSpPr/>
+          <p:nvPr/>
+        </p:nvSpPr>
+        <p:spPr>
+          <a:xfrm>
+            <a:off x="758952" y="4297680"/>
+            <a:ext cx="2002536" cy="1234440"/>
+          </a:xfrm>
+          <a:prstGeom prst="rect">
+            <a:avLst/>
+          </a:prstGeom>
+          <a:noFill/>
+          <a:ln/>
+        </p:spPr>
+        <p:txBody>
+          <a:bodyPr wrap="square" lIns="0" tIns="0" rIns="0" bIns="0" rtlCol="0" anchor="ctr"/>
+          <a:lstStyle/>
+          <a:p>
+            <a:pPr marL="0" indent="0" algn="l">
+              <a:buNone/>
+            </a:pPr>
+            <a:r>
+              <a:rPr lang="en-US" sz="1200" i="1" dirty="0">
+                <a:solidFill>
+                  <a:srgbClr val="1A1A1A"/>
+                </a:solidFill>
+                <a:latin typeface="Segoe UI" pitchFamily="34" charset="0"/>
+                <a:ea typeface="Segoe UI" pitchFamily="34" charset="-122"/>
+                <a:cs typeface="Segoe UI" pitchFamily="34" charset="-120"/>
+              </a:rPr>
+              <a:t>«So viele Bahnhöfe! Und alles in Farbe.»</a:t>
+            </a:r>
+            <a:endParaRPr lang="en-US" sz="1200" dirty="0"/>
+          </a:p>
+        </p:txBody>
+      </p:sp>
+      <p:sp>
+        <p:nvSpPr>
+          <p:cNvPr id="12" name="Text 7"/>
+          <p:cNvSpPr/>
+          <p:nvPr/>
+        </p:nvSpPr>
+        <p:spPr>
+          <a:xfrm>
+            <a:off x="9189720" y="3108960"/>
+            <a:ext cx="2468880" cy="2286000"/>
+          </a:xfrm>
+          <a:prstGeom prst="rect">
+            <a:avLst/>
+          </a:prstGeom>
+          <a:noFill/>
+          <a:ln/>
+        </p:spPr>
+        <p:txBody>
+          <a:bodyPr wrap="square" rtlCol="0" anchor="t"/>
+          <a:lstStyle/>
+          <a:p>
+            <a:pPr marL="0" indent="0">
+              <a:lnSpc>
+                <a:spcPct val="105000"/>
+              </a:lnSpc>
+              <a:buNone/>
+            </a:pPr>
+            <a:r>
+              <a:rPr lang="en-US" sz="1400" b="1" dirty="0">
+                <a:solidFill>
+                  <a:srgbClr val="1A1A1A"/>
+                </a:solidFill>
+                <a:latin typeface="Segoe UI" pitchFamily="34" charset="0"/>
+                <a:ea typeface="Segoe UI" pitchFamily="34" charset="-122"/>
+                <a:cs typeface="Segoe UI" pitchFamily="34" charset="-120"/>
+              </a:rPr>
+              <a:t>Was Thomas zeigt:</a:t>
+            </a:r>
+            <a:endParaRPr lang="en-US" sz="1400" dirty="0"/>
+          </a:p>
+          <a:p>
+            <a:pPr marL="0" indent="0">
+              <a:lnSpc>
+                <a:spcPct val="105000"/>
+              </a:lnSpc>
+              <a:buNone/>
+            </a:pPr>
+            <a:r>
+              <a:rPr lang="en-US" sz="1300" dirty="0">
+                <a:solidFill>
+                  <a:srgbClr val="595959"/>
+                </a:solidFill>
+                <a:latin typeface="Segoe UI" pitchFamily="34" charset="0"/>
+                <a:ea typeface="Segoe UI" pitchFamily="34" charset="-122"/>
+                <a:cs typeface="Segoe UI" pitchFamily="34" charset="-120"/>
+              </a:rPr>
+              <a:t>Jeder Punkt ein Bahnhof, Farbe = Ø-Verspätung. Über den Umstieg vergleichen sie Zürich und Bern direkt auf der Karte.</a:t>
+            </a:r>
+            <a:endParaRPr lang="en-US" sz="1400" dirty="0"/>
+          </a:p>
+        </p:txBody>
+      </p:sp>
+      <p:sp>
+        <p:nvSpPr>
+          <p:cNvPr id="13" name="Text 8"/>
+          <p:cNvSpPr/>
+          <p:nvPr/>
+        </p:nvSpPr>
+        <p:spPr>
+          <a:xfrm>
+            <a:off x="457200" y="6446520"/>
+            <a:ext cx="8229600" cy="320040"/>
+          </a:xfrm>
+          <a:prstGeom prst="rect">
+            <a:avLst/>
+          </a:prstGeom>
+          <a:noFill/>
+          <a:ln/>
+        </p:spPr>
+        <p:txBody>
+          <a:bodyPr wrap="square" rtlCol="0" anchor="ctr"/>
+          <a:lstStyle/>
+          <a:p>
+            <a:pPr marL="0" indent="0" algn="l">
+              <a:buNone/>
+            </a:pPr>
+            <a:r>
+              <a:rPr lang="en-US" sz="900" dirty="0">
+                <a:solidFill>
+                  <a:srgbClr val="A0A0A0"/>
+                </a:solidFill>
+                <a:latin typeface="Segoe UI" pitchFamily="34" charset="0"/>
+                <a:ea typeface="Segoe UI" pitchFamily="34" charset="-122"/>
+                <a:cs typeface="Segoe UI" pitchFamily="34" charset="-120"/>
+              </a:rPr>
+              <a:t>SBB Tracker · ZHAW Scientific Programming FS2026</a:t>
+            </a:r>
+            <a:endParaRPr lang="en-US" sz="900" dirty="0"/>
+          </a:p>
+        </p:txBody>
+      </p:sp>
+      <p:sp>
+        <p:nvSpPr>
+          <p:cNvPr id="14" name="Text 9"/>
+          <p:cNvSpPr/>
+          <p:nvPr/>
+        </p:nvSpPr>
+        <p:spPr>
+          <a:xfrm>
+            <a:off x="10972800" y="6446520"/>
+            <a:ext cx="822960" cy="320040"/>
+          </a:xfrm>
+          <a:prstGeom prst="rect">
+            <a:avLst/>
+          </a:prstGeom>
+          <a:noFill/>
+          <a:ln/>
+        </p:spPr>
+        <p:txBody>
+          <a:bodyPr wrap="square" rtlCol="0" anchor="ctr"/>
+          <a:lstStyle/>
+          <a:p>
+            <a:pPr marL="0" indent="0" algn="r">
+              <a:buNone/>
+            </a:pPr>
+            <a:endParaRPr lang="en-US" sz="900" dirty="0"/>
+          </a:p>
+        </p:txBody>
+      </p:sp>
+      <p:sp>
+        <p:nvSpPr>
+          <p:cNvPr id="15" name="TextBox 6"/>
+          <p:cNvSpPr txBox="1"/>
+          <p:nvPr/>
+        </p:nvSpPr>
+        <p:spPr>
+          <a:xfrm>
+            <a:off x="10972800" y="6446520"/>
+            <a:ext cx="822960" cy="320040"/>
+          </a:xfrm>
+          <a:prstGeom prst="rect">
+            <a:avLst/>
+          </a:prstGeom>
+          <a:noFill/>
+        </p:spPr>
+        <p:txBody>
+          <a:bodyPr wrap="square">
+            <a:spAutoFit/>
+          </a:bodyPr>
+          <a:lstStyle/>
+          <a:p>
+            <a:pPr algn="r">
+              <a:spcAft>
+                <a:spcPts val="800"/>
+              </a:spcAft>
+            </a:pPr>
+            <a:r>
+              <a:rPr sz="900" b="0">
+                <a:solidFill>
+                  <a:srgbClr val="999999"/>
+                </a:solidFill>
+                <a:latin typeface="Segoe UI"/>
+              </a:rPr>
+              <a:t>14</a:t>
+            </a:r>
+          </a:p>
+        </p:txBody>
+      </p:sp>
+    </p:spTree>
+  </p:cSld>
+  <p:clrMapOvr>
+    <a:masterClrMapping/>
+  </p:clrMapOvr>
+</p:sld>
+</file>
+
+<file path=ppt/slides/slide15.xml><?xml version="1.0" encoding="utf-8"?>
+<p:sld xmlns:a="http://schemas.openxmlformats.org/drawingml/2006/main" xmlns:r="http://schemas.openxmlformats.org/officeDocument/2006/relationships" xmlns:p="http://schemas.openxmlformats.org/presentationml/2006/main">
+  <p:cSld>
+    <p:spTree>
+      <p:nvGrpSpPr>
+        <p:cNvPr id="1" name=""/>
+        <p:cNvGrpSpPr/>
+        <p:nvPr/>
+      </p:nvGrpSpPr>
+      <p:grpSpPr>
+        <a:xfrm>
+          <a:off x="0" y="0"/>
+          <a:ext cx="0" cy="0"/>
+          <a:chOff x="0" y="0"/>
+          <a:chExt cx="0" cy="0"/>
+        </a:xfrm>
+      </p:grpSpPr>
+      <p:sp>
+        <p:nvSpPr>
+          <p:cNvPr id="2" name="Shape 0"/>
+          <p:cNvSpPr/>
+          <p:nvPr/>
+        </p:nvSpPr>
+        <p:spPr>
+          <a:xfrm>
+            <a:off x="0" y="0"/>
+            <a:ext cx="12188952" cy="146304"/>
+          </a:xfrm>
+          <a:prstGeom prst="rect">
+            <a:avLst/>
+          </a:prstGeom>
+          <a:solidFill>
+            <a:srgbClr val="EB0000"/>
+          </a:solidFill>
+          <a:ln/>
+        </p:spPr>
+        <p:txBody>
+          <a:bodyPr/>
+          <a:lstStyle/>
+          <a:p>
+            <a:endParaRPr/>
+          </a:p>
+        </p:txBody>
+      </p:sp>
+      <p:sp>
+        <p:nvSpPr>
+          <p:cNvPr id="3" name="Text 1"/>
+          <p:cNvSpPr/>
+          <p:nvPr/>
+        </p:nvSpPr>
+        <p:spPr>
+          <a:xfrm>
+            <a:off x="548640" y="384048"/>
+            <a:ext cx="11064240" cy="777240"/>
+          </a:xfrm>
+          <a:prstGeom prst="rect">
+            <a:avLst/>
+          </a:prstGeom>
+          <a:noFill/>
+          <a:ln/>
+        </p:spPr>
+        <p:txBody>
+          <a:bodyPr wrap="square" lIns="0" tIns="0" rIns="0" bIns="0" rtlCol="0" anchor="ctr"/>
+          <a:lstStyle/>
+          <a:p>
+            <a:pPr marL="0" indent="0" algn="l">
+              <a:buNone/>
+            </a:pPr>
+            <a:r>
+              <a:rPr lang="en-US" sz="2800" b="1" dirty="0">
+                <a:solidFill>
+                  <a:srgbClr val="EB0000"/>
+                </a:solidFill>
+                <a:latin typeface="Segoe UI" pitchFamily="34" charset="0"/>
+                <a:ea typeface="Segoe UI" pitchFamily="34" charset="-122"/>
+                <a:cs typeface="Segoe UI" pitchFamily="34" charset="-120"/>
+              </a:rPr>
+              <a:t>Schritt 2 — wann reisen? Tages- &amp; Stunden-Heatmap</a:t>
+            </a:r>
+            <a:endParaRPr lang="en-US" sz="2800" dirty="0"/>
+          </a:p>
+        </p:txBody>
+      </p:sp>
+      <p:sp>
+        <p:nvSpPr>
+          <p:cNvPr id="4" name="Shape 2"/>
+          <p:cNvSpPr/>
+          <p:nvPr/>
+        </p:nvSpPr>
+        <p:spPr>
+          <a:xfrm>
+            <a:off x="566928" y="1170432"/>
+            <a:ext cx="2011680" cy="27432"/>
+          </a:xfrm>
+          <a:prstGeom prst="rect">
+            <a:avLst/>
+          </a:prstGeom>
+          <a:solidFill>
+            <a:srgbClr val="EB0000"/>
+          </a:solidFill>
+          <a:ln/>
+        </p:spPr>
+        <p:txBody>
+          <a:bodyPr/>
+          <a:lstStyle/>
+          <a:p>
+            <a:endParaRPr/>
+          </a:p>
+        </p:txBody>
+      </p:sp>
+      <p:pic>
+        <p:nvPicPr>
+          <p:cNvPr id="5" name="Image 0" descr="/home/claude/assets/st_tod.png"/>
+          <p:cNvPicPr>
+            <a:picLocks noChangeAspect="1"/>
+          </p:cNvPicPr>
+          <p:nvPr/>
+        </p:nvPicPr>
+        <p:blipFill>
+          <a:blip r:embed="rId3"/>
+          <a:srcRect l="-9741" r="-9741"/>
+          <a:stretch/>
+        </p:blipFill>
+        <p:spPr>
+          <a:xfrm>
+            <a:off x="594360" y="1417320"/>
+            <a:ext cx="7680960" cy="4572000"/>
+          </a:xfrm>
+          <a:prstGeom prst="rect">
+            <a:avLst/>
+          </a:prstGeom>
+        </p:spPr>
+      </p:pic>
+      <p:sp>
+        <p:nvSpPr>
+          <p:cNvPr id="6" name="Shape 3"/>
+          <p:cNvSpPr/>
+          <p:nvPr/>
+        </p:nvSpPr>
+        <p:spPr>
+          <a:xfrm>
+            <a:off x="8458200" y="1463040"/>
+            <a:ext cx="3200400" cy="4572000"/>
+          </a:xfrm>
+          <a:prstGeom prst="roundRect">
+            <a:avLst>
+              <a:gd name="adj" fmla="val 2857"/>
+            </a:avLst>
+          </a:prstGeom>
+          <a:solidFill>
+            <a:srgbClr val="F4F4F6"/>
+          </a:solidFill>
+          <a:ln/>
+        </p:spPr>
+        <p:txBody>
+          <a:bodyPr/>
+          <a:lstStyle/>
+          <a:p>
+            <a:endParaRPr/>
+          </a:p>
+        </p:txBody>
+      </p:sp>
+      <p:pic>
+        <p:nvPicPr>
+          <p:cNvPr id="7" name="Image 1" descr="/home/claude/assets/thomas_sq.png"/>
+          <p:cNvPicPr>
+            <a:picLocks noChangeAspect="1"/>
+          </p:cNvPicPr>
+          <p:nvPr/>
+        </p:nvPicPr>
+        <p:blipFill>
+          <a:blip r:embed="rId4"/>
+          <a:stretch>
+            <a:fillRect/>
+          </a:stretch>
+        </p:blipFill>
+        <p:spPr>
+          <a:xfrm>
+            <a:off x="9509760" y="1691640"/>
+            <a:ext cx="1097280" cy="1097280"/>
+          </a:xfrm>
+          <a:prstGeom prst="ellipse">
+            <a:avLst/>
+          </a:prstGeom>
+        </p:spPr>
+      </p:pic>
+      <p:sp>
+        <p:nvSpPr>
+          <p:cNvPr id="8" name="Text 4"/>
+          <p:cNvSpPr/>
+          <p:nvPr/>
+        </p:nvSpPr>
+        <p:spPr>
+          <a:xfrm>
+            <a:off x="8686800" y="2926080"/>
+            <a:ext cx="2743200" cy="2926080"/>
+          </a:xfrm>
+          <a:prstGeom prst="rect">
+            <a:avLst/>
+          </a:prstGeom>
+          <a:noFill/>
+          <a:ln/>
+        </p:spPr>
+        <p:txBody>
+          <a:bodyPr wrap="square" rtlCol="0" anchor="t"/>
+          <a:lstStyle/>
+          <a:p>
+            <a:pPr marL="0" indent="0">
+              <a:lnSpc>
+                <a:spcPct val="105000"/>
+              </a:lnSpc>
+              <a:buNone/>
+            </a:pPr>
+            <a:r>
+              <a:rPr lang="en-US" sz="1500" b="1" dirty="0">
+                <a:solidFill>
+                  <a:srgbClr val="1A1A1A"/>
+                </a:solidFill>
+                <a:latin typeface="Segoe UI" pitchFamily="34" charset="0"/>
+                <a:ea typeface="Segoe UI" pitchFamily="34" charset="-122"/>
+                <a:cs typeface="Segoe UI" pitchFamily="34" charset="-120"/>
+              </a:rPr>
+              <a:t>Der Plan</a:t>
+            </a:r>
+            <a:endParaRPr lang="en-US" sz="1500" dirty="0"/>
+          </a:p>
+          <a:p>
+            <a:pPr marL="0" indent="0">
+              <a:lnSpc>
+                <a:spcPct val="105000"/>
+              </a:lnSpc>
+              <a:buNone/>
+            </a:pPr>
+            <a:endParaRPr lang="en-US" sz="1500" dirty="0"/>
+          </a:p>
+          <a:p>
+            <a:pPr marL="0" indent="0">
+              <a:lnSpc>
+                <a:spcPct val="105000"/>
+              </a:lnSpc>
+              <a:buNone/>
+            </a:pPr>
+            <a:r>
+              <a:rPr lang="en-US" sz="1300" dirty="0">
+                <a:solidFill>
+                  <a:srgbClr val="595959"/>
+                </a:solidFill>
+                <a:latin typeface="Segoe UI" pitchFamily="34" charset="0"/>
+                <a:ea typeface="Segoe UI" pitchFamily="34" charset="-122"/>
+                <a:cs typeface="Segoe UI" pitchFamily="34" charset="-120"/>
+              </a:rPr>
+              <a:t>Dunkler = mehr Verspätung. Sie suchen ein Fenster mit wenig Last — aber nicht mitten in der Nacht.</a:t>
+            </a:r>
+            <a:endParaRPr lang="en-US" sz="1500" dirty="0"/>
+          </a:p>
+          <a:p>
+            <a:pPr marL="0" indent="0">
+              <a:lnSpc>
+                <a:spcPct val="105000"/>
+              </a:lnSpc>
+              <a:buNone/>
+            </a:pPr>
+            <a:endParaRPr lang="en-US" sz="1500" dirty="0"/>
+          </a:p>
+          <a:p>
+            <a:pPr marL="0" indent="0">
+              <a:lnSpc>
+                <a:spcPct val="105000"/>
+              </a:lnSpc>
+              <a:buNone/>
+            </a:pPr>
+            <a:r>
+              <a:rPr lang="en-US" sz="1300" dirty="0">
+                <a:solidFill>
+                  <a:srgbClr val="595959"/>
+                </a:solidFill>
+                <a:latin typeface="Segoe UI" pitchFamily="34" charset="0"/>
+                <a:ea typeface="Segoe UI" pitchFamily="34" charset="-122"/>
+                <a:cs typeface="Segoe UI" pitchFamily="34" charset="-120"/>
+              </a:rPr>
+              <a:t>Im Filter geben sie Grossis Wunschdatum ein und sehen, wie es an dem Tag aussieht.</a:t>
+            </a:r>
+            <a:endParaRPr lang="en-US" sz="1500" dirty="0"/>
+          </a:p>
+          <a:p>
+            <a:pPr marL="0" indent="0">
+              <a:lnSpc>
+                <a:spcPct val="105000"/>
+              </a:lnSpc>
+              <a:buNone/>
+            </a:pPr>
+            <a:endParaRPr lang="en-US" sz="1500" dirty="0"/>
+          </a:p>
+          <a:p>
+            <a:pPr marL="0" indent="0">
+              <a:lnSpc>
+                <a:spcPct val="105000"/>
+              </a:lnSpc>
+              <a:buNone/>
+            </a:pPr>
+            <a:r>
+              <a:rPr lang="en-US" sz="1300" dirty="0">
+                <a:solidFill>
+                  <a:srgbClr val="595959"/>
+                </a:solidFill>
+                <a:latin typeface="Segoe UI" pitchFamily="34" charset="0"/>
+                <a:ea typeface="Segoe UI" pitchFamily="34" charset="-122"/>
+                <a:cs typeface="Segoe UI" pitchFamily="34" charset="-120"/>
+              </a:rPr>
+              <a:t>Es wird eine 2-Tages-Reise mit Hotel — entspannter für Grossi.</a:t>
+            </a:r>
+            <a:endParaRPr lang="en-US" sz="1500" dirty="0"/>
+          </a:p>
+        </p:txBody>
+      </p:sp>
+      <p:sp>
+        <p:nvSpPr>
+          <p:cNvPr id="9" name="Text 5"/>
+          <p:cNvSpPr/>
+          <p:nvPr/>
+        </p:nvSpPr>
+        <p:spPr>
+          <a:xfrm>
+            <a:off x="457200" y="6446520"/>
+            <a:ext cx="8229600" cy="320040"/>
+          </a:xfrm>
+          <a:prstGeom prst="rect">
+            <a:avLst/>
+          </a:prstGeom>
+          <a:noFill/>
+          <a:ln/>
+        </p:spPr>
+        <p:txBody>
+          <a:bodyPr wrap="square" rtlCol="0" anchor="ctr"/>
+          <a:lstStyle/>
+          <a:p>
+            <a:pPr marL="0" indent="0" algn="l">
+              <a:buNone/>
+            </a:pPr>
+            <a:r>
+              <a:rPr lang="en-US" sz="900" dirty="0">
+                <a:solidFill>
+                  <a:srgbClr val="A0A0A0"/>
+                </a:solidFill>
+                <a:latin typeface="Segoe UI" pitchFamily="34" charset="0"/>
+                <a:ea typeface="Segoe UI" pitchFamily="34" charset="-122"/>
+                <a:cs typeface="Segoe UI" pitchFamily="34" charset="-120"/>
+              </a:rPr>
+              <a:t>SBB Tracker · ZHAW Scientific Programming FS2026</a:t>
+            </a:r>
+            <a:endParaRPr lang="en-US" sz="900" dirty="0"/>
+          </a:p>
+        </p:txBody>
+      </p:sp>
+      <p:sp>
+        <p:nvSpPr>
+          <p:cNvPr id="10" name="Text 6"/>
+          <p:cNvSpPr/>
+          <p:nvPr/>
+        </p:nvSpPr>
+        <p:spPr>
+          <a:xfrm>
+            <a:off x="10972800" y="6446520"/>
+            <a:ext cx="822960" cy="320040"/>
+          </a:xfrm>
+          <a:prstGeom prst="rect">
+            <a:avLst/>
+          </a:prstGeom>
+          <a:noFill/>
+          <a:ln/>
+        </p:spPr>
+        <p:txBody>
+          <a:bodyPr wrap="square" rtlCol="0" anchor="ctr"/>
+          <a:lstStyle/>
+          <a:p>
+            <a:pPr marL="0" indent="0" algn="r">
+              <a:buNone/>
+            </a:pPr>
+            <a:endParaRPr lang="en-US" sz="900" dirty="0"/>
+          </a:p>
+        </p:txBody>
+      </p:sp>
+      <p:sp>
+        <p:nvSpPr>
+          <p:cNvPr id="11" name="TextBox 6"/>
+          <p:cNvSpPr txBox="1"/>
+          <p:nvPr/>
+        </p:nvSpPr>
+        <p:spPr>
+          <a:xfrm>
+            <a:off x="10972800" y="6446520"/>
+            <a:ext cx="822960" cy="320040"/>
+          </a:xfrm>
+          <a:prstGeom prst="rect">
+            <a:avLst/>
+          </a:prstGeom>
+          <a:noFill/>
+        </p:spPr>
+        <p:txBody>
+          <a:bodyPr wrap="square">
+            <a:spAutoFit/>
+          </a:bodyPr>
+          <a:lstStyle/>
+          <a:p>
+            <a:pPr algn="r">
+              <a:spcAft>
+                <a:spcPts val="800"/>
+              </a:spcAft>
+            </a:pPr>
+            <a:r>
+              <a:rPr sz="900" b="0">
+                <a:solidFill>
+                  <a:srgbClr val="999999"/>
+                </a:solidFill>
+                <a:latin typeface="Segoe UI"/>
+              </a:rPr>
+              <a:t>15</a:t>
+            </a:r>
+          </a:p>
+        </p:txBody>
+      </p:sp>
+    </p:spTree>
+  </p:cSld>
+  <p:clrMapOvr>
+    <a:masterClrMapping/>
+  </p:clrMapOvr>
+</p:sld>
+</file>
+
+<file path=ppt/slides/slide16.xml><?xml version="1.0" encoding="utf-8"?>
+<p:sld xmlns:a="http://schemas.openxmlformats.org/drawingml/2006/main" xmlns:r="http://schemas.openxmlformats.org/officeDocument/2006/relationships" xmlns:p="http://schemas.openxmlformats.org/presentationml/2006/main">
+  <p:cSld>
+    <p:spTree>
+      <p:nvGrpSpPr>
+        <p:cNvPr id="1" name=""/>
+        <p:cNvGrpSpPr/>
+        <p:nvPr/>
+      </p:nvGrpSpPr>
+      <p:grpSpPr>
+        <a:xfrm>
+          <a:off x="0" y="0"/>
+          <a:ext cx="0" cy="0"/>
+          <a:chOff x="0" y="0"/>
+          <a:chExt cx="0" cy="0"/>
+        </a:xfrm>
+      </p:grpSpPr>
+      <p:sp>
+        <p:nvSpPr>
+          <p:cNvPr id="2" name="Shape 0"/>
+          <p:cNvSpPr/>
+          <p:nvPr/>
+        </p:nvSpPr>
+        <p:spPr>
+          <a:xfrm>
+            <a:off x="0" y="0"/>
+            <a:ext cx="12188952" cy="146304"/>
+          </a:xfrm>
+          <a:prstGeom prst="rect">
+            <a:avLst/>
+          </a:prstGeom>
+          <a:solidFill>
+            <a:srgbClr val="EB0000"/>
+          </a:solidFill>
+          <a:ln/>
+        </p:spPr>
+        <p:txBody>
+          <a:bodyPr/>
+          <a:lstStyle/>
+          <a:p>
+            <a:endParaRPr/>
+          </a:p>
+        </p:txBody>
+      </p:sp>
+      <p:sp>
+        <p:nvSpPr>
+          <p:cNvPr id="3" name="Text 1"/>
+          <p:cNvSpPr/>
+          <p:nvPr/>
+        </p:nvSpPr>
+        <p:spPr>
+          <a:xfrm>
+            <a:off x="548640" y="384048"/>
+            <a:ext cx="11064240" cy="777240"/>
+          </a:xfrm>
+          <a:prstGeom prst="rect">
+            <a:avLst/>
+          </a:prstGeom>
+          <a:noFill/>
+          <a:ln/>
+        </p:spPr>
+        <p:txBody>
+          <a:bodyPr wrap="square" lIns="0" tIns="0" rIns="0" bIns="0" rtlCol="0" anchor="ctr"/>
+          <a:lstStyle/>
+          <a:p>
+            <a:pPr marL="0" indent="0" algn="l">
+              <a:buNone/>
+            </a:pPr>
+            <a:r>
+              <a:rPr lang="en-US" sz="2800" b="1" dirty="0">
+                <a:solidFill>
+                  <a:srgbClr val="EB0000"/>
+                </a:solidFill>
+                <a:latin typeface="Segoe UI" pitchFamily="34" charset="0"/>
+                <a:ea typeface="Segoe UI" pitchFamily="34" charset="-122"/>
+                <a:cs typeface="Segoe UI" pitchFamily="34" charset="-120"/>
+              </a:rPr>
+              <a:t>Schritt 3 — Claude fragen, dann der Über-Tab</a:t>
+            </a:r>
+            <a:endParaRPr lang="en-US" sz="2800" dirty="0"/>
+          </a:p>
+        </p:txBody>
+      </p:sp>
+      <p:sp>
+        <p:nvSpPr>
+          <p:cNvPr id="4" name="Shape 2"/>
+          <p:cNvSpPr/>
+          <p:nvPr/>
+        </p:nvSpPr>
+        <p:spPr>
+          <a:xfrm>
+            <a:off x="566928" y="1170432"/>
+            <a:ext cx="2011680" cy="27432"/>
+          </a:xfrm>
+          <a:prstGeom prst="rect">
+            <a:avLst/>
+          </a:prstGeom>
+          <a:solidFill>
+            <a:srgbClr val="EB0000"/>
+          </a:solidFill>
+          <a:ln/>
+        </p:spPr>
+        <p:txBody>
+          <a:bodyPr/>
+          <a:lstStyle/>
+          <a:p>
+            <a:endParaRPr/>
+          </a:p>
+        </p:txBody>
+      </p:sp>
+      <p:pic>
+        <p:nvPicPr>
+          <p:cNvPr id="5" name="Image 0" descr="/home/claude/assets/st_llm.png"/>
+          <p:cNvPicPr>
+            <a:picLocks noChangeAspect="1"/>
+          </p:cNvPicPr>
+          <p:nvPr/>
+        </p:nvPicPr>
+        <p:blipFill>
+          <a:blip r:embed="rId3"/>
+          <a:srcRect l="-4465" r="-4465"/>
+          <a:stretch/>
+        </p:blipFill>
+        <p:spPr>
+          <a:xfrm>
+            <a:off x="594360" y="1417320"/>
+            <a:ext cx="6858000" cy="4206240"/>
+          </a:xfrm>
+          <a:prstGeom prst="rect">
+            <a:avLst/>
+          </a:prstGeom>
+        </p:spPr>
+      </p:pic>
+      <p:pic>
+        <p:nvPicPr>
+          <p:cNvPr id="6" name="Image 1" descr="/home/claude/assets/st_llm_answer.png"/>
+          <p:cNvPicPr>
+            <a:picLocks noChangeAspect="1"/>
+          </p:cNvPicPr>
+          <p:nvPr/>
+        </p:nvPicPr>
+        <p:blipFill>
+          <a:blip r:embed="rId4"/>
+          <a:stretch>
+            <a:fillRect/>
+          </a:stretch>
+        </p:blipFill>
+        <p:spPr>
+          <a:xfrm>
+            <a:off x="7680960" y="1554480"/>
+            <a:ext cx="3931920" cy="2671689"/>
+          </a:xfrm>
+          <a:prstGeom prst="rect">
+            <a:avLst/>
+          </a:prstGeom>
+        </p:spPr>
+      </p:pic>
+      <p:sp>
+        <p:nvSpPr>
+          <p:cNvPr id="7" name="Text 3"/>
+          <p:cNvSpPr/>
+          <p:nvPr/>
+        </p:nvSpPr>
+        <p:spPr>
+          <a:xfrm>
+            <a:off x="7680960" y="4251960"/>
+            <a:ext cx="3931920" cy="320040"/>
+          </a:xfrm>
+          <a:prstGeom prst="rect">
+            <a:avLst/>
+          </a:prstGeom>
+          <a:noFill/>
+          <a:ln/>
+        </p:spPr>
+        <p:txBody>
+          <a:bodyPr wrap="square" rtlCol="0" anchor="ctr"/>
+          <a:lstStyle/>
+          <a:p>
+            <a:pPr marL="0" indent="0" algn="ctr">
+              <a:buNone/>
+            </a:pPr>
+            <a:r>
+              <a:rPr lang="en-US" sz="1100" i="1" dirty="0">
+                <a:solidFill>
+                  <a:srgbClr val="595959"/>
+                </a:solidFill>
+                <a:latin typeface="Segoe UI" pitchFamily="34" charset="0"/>
+                <a:ea typeface="Segoe UI" pitchFamily="34" charset="-122"/>
+                <a:cs typeface="Segoe UI" pitchFamily="34" charset="-120"/>
+              </a:rPr>
+              <a:t>«Claude wertet die Fahrplandaten aus …» — wieder der Zug.</a:t>
+            </a:r>
+            <a:endParaRPr lang="en-US" sz="1100" dirty="0"/>
+          </a:p>
+        </p:txBody>
+      </p:sp>
+      <p:sp>
+        <p:nvSpPr>
+          <p:cNvPr id="8" name="Shape 4"/>
+          <p:cNvSpPr/>
+          <p:nvPr/>
+        </p:nvSpPr>
+        <p:spPr>
+          <a:xfrm>
+            <a:off x="7680960" y="4709160"/>
+            <a:ext cx="3977640" cy="1234440"/>
+          </a:xfrm>
+          <a:prstGeom prst="roundRect">
+            <a:avLst>
+              <a:gd name="adj" fmla="val 7407"/>
+            </a:avLst>
+          </a:prstGeom>
+          <a:solidFill>
+            <a:srgbClr val="FBEFE9"/>
+          </a:solidFill>
+          <a:ln/>
+          <a:effectLst>
+            <a:outerShdw blurRad="88900" dist="38100" dir="8100000" algn="bl" rotWithShape="0">
+              <a:srgbClr val="000000">
+                <a:alpha val="12000"/>
+              </a:srgbClr>
+            </a:outerShdw>
+          </a:effectLst>
+        </p:spPr>
+        <p:txBody>
+          <a:bodyPr/>
+          <a:lstStyle/>
+          <a:p>
+            <a:endParaRPr/>
+          </a:p>
+        </p:txBody>
+      </p:sp>
+      <p:sp>
+        <p:nvSpPr>
+          <p:cNvPr id="9" name="Shape 5"/>
+          <p:cNvSpPr/>
+          <p:nvPr/>
+        </p:nvSpPr>
+        <p:spPr>
+          <a:xfrm rot="10800000">
+            <a:off x="8183880" y="5925312"/>
+            <a:ext cx="320040" cy="256032"/>
+          </a:xfrm>
+          <a:prstGeom prst="triangle">
+            <a:avLst/>
+          </a:prstGeom>
+          <a:solidFill>
+            <a:srgbClr val="FBEFE9"/>
+          </a:solidFill>
+          <a:ln/>
+        </p:spPr>
+        <p:txBody>
+          <a:bodyPr/>
+          <a:lstStyle/>
+          <a:p>
+            <a:endParaRPr/>
+          </a:p>
+        </p:txBody>
+      </p:sp>
+      <p:sp>
+        <p:nvSpPr>
+          <p:cNvPr id="10" name="Text 6"/>
+          <p:cNvSpPr/>
+          <p:nvPr/>
+        </p:nvSpPr>
+        <p:spPr>
+          <a:xfrm>
+            <a:off x="7936992" y="4800600"/>
+            <a:ext cx="3465576" cy="1051560"/>
+          </a:xfrm>
+          <a:prstGeom prst="rect">
+            <a:avLst/>
+          </a:prstGeom>
+          <a:noFill/>
+          <a:ln/>
+        </p:spPr>
+        <p:txBody>
+          <a:bodyPr wrap="square" lIns="0" tIns="0" rIns="0" bIns="0" rtlCol="0" anchor="ctr"/>
+          <a:lstStyle/>
+          <a:p>
+            <a:pPr marL="0" indent="0" algn="l">
+              <a:buNone/>
+            </a:pPr>
+            <a:r>
+              <a:rPr lang="en-US" sz="1250" i="1" dirty="0">
+                <a:solidFill>
+                  <a:srgbClr val="1A1A1A"/>
+                </a:solidFill>
+                <a:latin typeface="Segoe UI" pitchFamily="34" charset="0"/>
+                <a:ea typeface="Segoe UI" pitchFamily="34" charset="-122"/>
+                <a:cs typeface="Segoe UI" pitchFamily="34" charset="-120"/>
+              </a:rPr>
+              <a:t>«Es antwortet mir wie ein Mensch — und nur mit euren echten Zahlen.»</a:t>
+            </a:r>
+            <a:endParaRPr lang="en-US" sz="1250" dirty="0"/>
+          </a:p>
+        </p:txBody>
+      </p:sp>
+      <p:sp>
+        <p:nvSpPr>
+          <p:cNvPr id="11" name="Text 7"/>
+          <p:cNvSpPr/>
+          <p:nvPr/>
+        </p:nvSpPr>
+        <p:spPr>
+          <a:xfrm>
+            <a:off x="640080" y="5897880"/>
+            <a:ext cx="6766560" cy="548640"/>
+          </a:xfrm>
+          <a:prstGeom prst="rect">
+            <a:avLst/>
+          </a:prstGeom>
+          <a:noFill/>
+          <a:ln/>
+        </p:spPr>
+        <p:txBody>
+          <a:bodyPr wrap="square" rtlCol="0" anchor="ctr"/>
+          <a:lstStyle/>
+          <a:p>
+            <a:pPr marL="0" indent="0">
+              <a:buNone/>
+            </a:pPr>
+            <a:r>
+              <a:rPr lang="en-US" sz="1200" i="1" dirty="0">
+                <a:solidFill>
+                  <a:srgbClr val="595959"/>
+                </a:solidFill>
+                <a:latin typeface="Segoe UI" pitchFamily="34" charset="0"/>
+                <a:ea typeface="Segoe UI" pitchFamily="34" charset="-122"/>
+                <a:cs typeface="Segoe UI" pitchFamily="34" charset="-120"/>
+              </a:rPr>
+              <a:t>Erst eine Beispiel-Frage anklicken, dann selbst tippen. Zum Schluss zeigt der Über-Tab transparent alle Datenquellen und Lizenzen.</a:t>
+            </a:r>
+            <a:endParaRPr lang="en-US" sz="1200" dirty="0"/>
+          </a:p>
+        </p:txBody>
+      </p:sp>
+      <p:sp>
+        <p:nvSpPr>
+          <p:cNvPr id="12" name="Text 8"/>
+          <p:cNvSpPr/>
+          <p:nvPr/>
+        </p:nvSpPr>
+        <p:spPr>
+          <a:xfrm>
+            <a:off x="457200" y="6446520"/>
+            <a:ext cx="8229600" cy="320040"/>
+          </a:xfrm>
+          <a:prstGeom prst="rect">
+            <a:avLst/>
+          </a:prstGeom>
+          <a:noFill/>
+          <a:ln/>
+        </p:spPr>
+        <p:txBody>
+          <a:bodyPr wrap="square" rtlCol="0" anchor="ctr"/>
+          <a:lstStyle/>
+          <a:p>
+            <a:pPr marL="0" indent="0" algn="l">
+              <a:buNone/>
+            </a:pPr>
+            <a:r>
+              <a:rPr lang="en-US" sz="900" dirty="0">
+                <a:solidFill>
+                  <a:srgbClr val="A0A0A0"/>
+                </a:solidFill>
+                <a:latin typeface="Segoe UI" pitchFamily="34" charset="0"/>
+                <a:ea typeface="Segoe UI" pitchFamily="34" charset="-122"/>
+                <a:cs typeface="Segoe UI" pitchFamily="34" charset="-120"/>
+              </a:rPr>
+              <a:t>SBB Tracker · ZHAW Scientific Programming FS2026</a:t>
+            </a:r>
+            <a:endParaRPr lang="en-US" sz="900" dirty="0"/>
+          </a:p>
+        </p:txBody>
+      </p:sp>
+      <p:sp>
+        <p:nvSpPr>
+          <p:cNvPr id="13" name="Text 9"/>
+          <p:cNvSpPr/>
+          <p:nvPr/>
+        </p:nvSpPr>
+        <p:spPr>
+          <a:xfrm>
+            <a:off x="10972800" y="6446520"/>
+            <a:ext cx="822960" cy="320040"/>
+          </a:xfrm>
+          <a:prstGeom prst="rect">
+            <a:avLst/>
+          </a:prstGeom>
+          <a:noFill/>
+          <a:ln/>
+        </p:spPr>
+        <p:txBody>
+          <a:bodyPr wrap="square" rtlCol="0" anchor="ctr"/>
+          <a:lstStyle/>
+          <a:p>
+            <a:pPr marL="0" indent="0" algn="r">
+              <a:buNone/>
+            </a:pPr>
+            <a:endParaRPr lang="en-US" sz="900" dirty="0"/>
+          </a:p>
+        </p:txBody>
+      </p:sp>
+      <p:sp>
+        <p:nvSpPr>
+          <p:cNvPr id="14" name="TextBox 6"/>
+          <p:cNvSpPr txBox="1"/>
+          <p:nvPr/>
+        </p:nvSpPr>
+        <p:spPr>
+          <a:xfrm>
+            <a:off x="10972800" y="6446520"/>
+            <a:ext cx="822960" cy="320040"/>
+          </a:xfrm>
+          <a:prstGeom prst="rect">
+            <a:avLst/>
+          </a:prstGeom>
+          <a:noFill/>
+        </p:spPr>
+        <p:txBody>
+          <a:bodyPr wrap="square">
+            <a:spAutoFit/>
+          </a:bodyPr>
+          <a:lstStyle/>
+          <a:p>
+            <a:pPr algn="r">
+              <a:spcAft>
+                <a:spcPts val="800"/>
+              </a:spcAft>
+            </a:pPr>
+            <a:r>
+              <a:rPr sz="900" b="0">
+                <a:solidFill>
+                  <a:srgbClr val="999999"/>
+                </a:solidFill>
+                <a:latin typeface="Segoe UI"/>
+              </a:rPr>
+              <a:t>16</a:t>
+            </a:r>
+          </a:p>
+        </p:txBody>
+      </p:sp>
+    </p:spTree>
+  </p:cSld>
+  <p:clrMapOvr>
+    <a:masterClrMapping/>
+  </p:clrMapOvr>
+</p:sld>
+</file>
+
+<file path=ppt/slides/slide17.xml><?xml version="1.0" encoding="utf-8"?>
+<p:sld xmlns:a="http://schemas.openxmlformats.org/drawingml/2006/main" xmlns:r="http://schemas.openxmlformats.org/officeDocument/2006/relationships" xmlns:p="http://schemas.openxmlformats.org/presentationml/2006/main">
   <p:cSld>
     <p:bg>
       <p:bgPr>
@@ -5452,7 +8598,14 @@
         <p:cNvGrpSpPr/>
         <p:nvPr/>
       </p:nvGrpSpPr>
-      <p:grpSpPr/>
+      <p:grpSpPr>
+        <a:xfrm>
+          <a:off x="0" y="0"/>
+          <a:ext cx="0" cy="0"/>
+          <a:chOff x="0" y="0"/>
+          <a:chExt cx="0" cy="0"/>
+        </a:xfrm>
+      </p:grpSpPr>
       <p:sp>
         <p:nvSpPr>
           <p:cNvPr id="2" name="Rectangle 1"/>
@@ -5494,6 +8647,7 @@
           <a:lstStyle/>
           <a:p>
             <a:pPr algn="ctr"/>
+            <a:endParaRPr/>
           </a:p>
         </p:txBody>
       </p:sp>
@@ -5577,6 +8731,7 @@
           <a:lstStyle/>
           <a:p>
             <a:pPr algn="ctr"/>
+            <a:endParaRPr/>
           </a:p>
         </p:txBody>
       </p:sp>
@@ -5589,7 +8744,7 @@
           <p:nvPr/>
         </p:nvPicPr>
         <p:blipFill>
-          <a:blip r:embed="rId2"/>
+          <a:blip r:embed="rId3"/>
           <a:stretch>
             <a:fillRect/>
           </a:stretch>
@@ -5716,7 +8871,7 @@
                 </a:solidFill>
                 <a:latin typeface="Segoe UI"/>
               </a:rPr>
-              <a:t>11</a:t>
+              <a:t>17</a:t>
             </a:r>
           </a:p>
         </p:txBody>
@@ -5729,8 +8884,8 @@
 </p:sld>
 </file>
 
-<file path=ppt/slides/slide12.xml><?xml version="1.0" encoding="utf-8"?>
-<p:sld xmlns:a="http://schemas.openxmlformats.org/drawingml/2006/main" xmlns:p="http://schemas.openxmlformats.org/presentationml/2006/main" xmlns:r="http://schemas.openxmlformats.org/officeDocument/2006/relationships">
+<file path=ppt/slides/slide18.xml><?xml version="1.0" encoding="utf-8"?>
+<p:sld xmlns:a="http://schemas.openxmlformats.org/drawingml/2006/main" xmlns:r="http://schemas.openxmlformats.org/officeDocument/2006/relationships" xmlns:p="http://schemas.openxmlformats.org/presentationml/2006/main">
   <p:cSld>
     <p:bg>
       <p:bgPr>
@@ -5746,7 +8901,14 @@
         <p:cNvGrpSpPr/>
         <p:nvPr/>
       </p:nvGrpSpPr>
-      <p:grpSpPr/>
+      <p:grpSpPr>
+        <a:xfrm>
+          <a:off x="0" y="0"/>
+          <a:ext cx="0" cy="0"/>
+          <a:chOff x="0" y="0"/>
+          <a:chExt cx="0" cy="0"/>
+        </a:xfrm>
+      </p:grpSpPr>
       <p:sp>
         <p:nvSpPr>
           <p:cNvPr id="2" name="Rectangle 1"/>
@@ -5788,6 +8950,7 @@
           <a:lstStyle/>
           <a:p>
             <a:pPr algn="ctr"/>
+            <a:endParaRPr/>
           </a:p>
         </p:txBody>
       </p:sp>
@@ -5871,6 +9034,7 @@
           <a:lstStyle/>
           <a:p>
             <a:pPr algn="ctr"/>
+            <a:endParaRPr/>
           </a:p>
         </p:txBody>
       </p:sp>
@@ -5883,7 +9047,7 @@
           <p:nvPr/>
         </p:nvPicPr>
         <p:blipFill>
-          <a:blip r:embed="rId2"/>
+          <a:blip r:embed="rId3"/>
           <a:stretch>
             <a:fillRect/>
           </a:stretch>
@@ -6010,7 +9174,7 @@
                 </a:solidFill>
                 <a:latin typeface="Segoe UI"/>
               </a:rPr>
-              <a:t>12</a:t>
+              <a:t>18</a:t>
             </a:r>
           </a:p>
         </p:txBody>
@@ -6023,8 +9187,8 @@
 </p:sld>
 </file>
 
-<file path=ppt/slides/slide13.xml><?xml version="1.0" encoding="utf-8"?>
-<p:sld xmlns:a="http://schemas.openxmlformats.org/drawingml/2006/main" xmlns:p="http://schemas.openxmlformats.org/presentationml/2006/main" xmlns:r="http://schemas.openxmlformats.org/officeDocument/2006/relationships">
+<file path=ppt/slides/slide19.xml><?xml version="1.0" encoding="utf-8"?>
+<p:sld xmlns:a="http://schemas.openxmlformats.org/drawingml/2006/main" xmlns:r="http://schemas.openxmlformats.org/officeDocument/2006/relationships" xmlns:p="http://schemas.openxmlformats.org/presentationml/2006/main">
   <p:cSld>
     <p:bg>
       <p:bgPr>
@@ -6040,7 +9204,14 @@
         <p:cNvGrpSpPr/>
         <p:nvPr/>
       </p:nvGrpSpPr>
-      <p:grpSpPr/>
+      <p:grpSpPr>
+        <a:xfrm>
+          <a:off x="0" y="0"/>
+          <a:ext cx="0" cy="0"/>
+          <a:chOff x="0" y="0"/>
+          <a:chExt cx="0" cy="0"/>
+        </a:xfrm>
+      </p:grpSpPr>
       <p:sp>
         <p:nvSpPr>
           <p:cNvPr id="2" name="Rectangle 1"/>
@@ -6082,6 +9253,7 @@
           <a:lstStyle/>
           <a:p>
             <a:pPr algn="ctr"/>
+            <a:endParaRPr/>
           </a:p>
         </p:txBody>
       </p:sp>
@@ -6165,6 +9337,7 @@
           <a:lstStyle/>
           <a:p>
             <a:pPr algn="ctr"/>
+            <a:endParaRPr/>
           </a:p>
         </p:txBody>
       </p:sp>
@@ -6254,7 +9427,7 @@
             </a:r>
           </a:p>
           <a:p>
-            <a:pPr algn="l" lvl="1">
+            <a:pPr lvl="1" algn="l">
               <a:spcAft>
                 <a:spcPts val="800"/>
               </a:spcAft>
@@ -6344,7 +9517,7 @@
                 </a:solidFill>
                 <a:latin typeface="Segoe UI"/>
               </a:rPr>
-              <a:t>13</a:t>
+              <a:t>19</a:t>
             </a:r>
           </a:p>
         </p:txBody>
@@ -6357,8 +9530,8 @@
 </p:sld>
 </file>
 
-<file path=ppt/slides/slide14.xml><?xml version="1.0" encoding="utf-8"?>
-<p:sld xmlns:a="http://schemas.openxmlformats.org/drawingml/2006/main" xmlns:p="http://schemas.openxmlformats.org/presentationml/2006/main" xmlns:r="http://schemas.openxmlformats.org/officeDocument/2006/relationships">
+<file path=ppt/slides/slide2.xml><?xml version="1.0" encoding="utf-8"?>
+<p:sld xmlns:a="http://schemas.openxmlformats.org/drawingml/2006/main" xmlns:r="http://schemas.openxmlformats.org/officeDocument/2006/relationships" xmlns:p="http://schemas.openxmlformats.org/presentationml/2006/main">
   <p:cSld>
     <p:bg>
       <p:bgPr>
@@ -6374,7 +9547,14 @@
         <p:cNvGrpSpPr/>
         <p:nvPr/>
       </p:nvGrpSpPr>
-      <p:grpSpPr/>
+      <p:grpSpPr>
+        <a:xfrm>
+          <a:off x="0" y="0"/>
+          <a:ext cx="0" cy="0"/>
+          <a:chOff x="0" y="0"/>
+          <a:chExt cx="0" cy="0"/>
+        </a:xfrm>
+      </p:grpSpPr>
       <p:sp>
         <p:nvSpPr>
           <p:cNvPr id="2" name="Rectangle 1"/>
@@ -6416,6 +9596,7 @@
           <a:lstStyle/>
           <a:p>
             <a:pPr algn="ctr"/>
+            <a:endParaRPr/>
           </a:p>
         </p:txBody>
       </p:sp>
@@ -6453,7 +9634,7 @@
                 </a:solidFill>
                 <a:latin typeface="Segoe UI"/>
               </a:rPr>
-              <a:t>Limitationen</a:t>
+              <a:t>Agenda</a:t>
             </a:r>
           </a:p>
         </p:txBody>
@@ -6499,6 +9680,7 @@
           <a:lstStyle/>
           <a:p>
             <a:pPr algn="ctr"/>
+            <a:endParaRPr/>
           </a:p>
         </p:txBody>
       </p:sp>
@@ -6530,29 +9712,13 @@
               </a:spcAft>
             </a:pPr>
             <a:r>
-              <a:rPr sz="1800" b="0">
+              <a:rPr sz="2000" b="0">
                 <a:solidFill>
                   <a:srgbClr val="1A1A1A"/>
                 </a:solidFill>
                 <a:latin typeface="Segoe UI"/>
               </a:rPr>
-              <a:t>•  Beobachtungen nicht unabhängig (gleicher Zug/Bahnhof/Tag) — Pseudoreplikation</a:t>
-            </a:r>
-          </a:p>
-          <a:p>
-            <a:pPr algn="l" lvl="1">
-              <a:spcAft>
-                <a:spcPts val="800"/>
-              </a:spcAft>
-            </a:pPr>
-            <a:r>
-              <a:rPr sz="1500" b="0">
-                <a:solidFill>
-                  <a:srgbClr val="595959"/>
-                </a:solidFill>
-                <a:latin typeface="Segoe UI"/>
-              </a:rPr>
-              <a:t>–  dagegen: Tagesmittel-Gegencheck + Fokus auf Effektstärken</a:t>
+              <a:t>•  Motivation und Forschungsfragen</a:t>
             </a:r>
           </a:p>
           <a:p>
@@ -6562,13 +9728,13 @@
               </a:spcAft>
             </a:pPr>
             <a:r>
-              <a:rPr sz="1800" b="0">
+              <a:rPr sz="2000" b="0">
                 <a:solidFill>
                   <a:srgbClr val="1A1A1A"/>
                 </a:solidFill>
                 <a:latin typeface="Segoe UI"/>
               </a:rPr>
-              <a:t>•  Nur 48 Tage im Frühling — keine Saisonalität (Winter, Bausaison fehlen)</a:t>
+              <a:t>•  Datengrundlage und eine zentrale Design-Entscheidung</a:t>
             </a:r>
           </a:p>
           <a:p>
@@ -6578,13 +9744,13 @@
               </a:spcAft>
             </a:pPr>
             <a:r>
-              <a:rPr sz="1800" b="0">
+              <a:rPr sz="2000" b="0">
                 <a:solidFill>
                   <a:srgbClr val="1A1A1A"/>
                 </a:solidFill>
                 <a:latin typeface="Segoe UI"/>
               </a:rPr>
-              <a:t>•  Nur SBB; Wetter-Station bis ~40 km entfernt (Mikroklima geht verloren)</a:t>
+              <a:t>•  Methodik: vier statistische Tests plus ein Sprachmodell</a:t>
             </a:r>
           </a:p>
           <a:p>
@@ -6594,38 +9760,15 @@
               </a:spcAft>
             </a:pPr>
             <a:r>
-              <a:rPr sz="1800" b="0">
+              <a:rPr sz="2000" b="0">
                 <a:solidFill>
                   <a:srgbClr val="1A1A1A"/>
                 </a:solidFill>
                 <a:latin typeface="Segoe UI"/>
               </a:rPr>
-              <a:t>•  Korrelation ist nicht Kausalität (mögliche versteckte Faktoren)</a:t>
-            </a:r>
-          </a:p>
-        </p:txBody>
-      </p:sp>
-      <p:sp>
-        <p:nvSpPr>
-          <p:cNvPr id="6" name="TextBox 5"/>
-          <p:cNvSpPr txBox="1"/>
-          <p:nvPr/>
-        </p:nvSpPr>
-        <p:spPr>
-          <a:xfrm>
-            <a:off x="457200" y="6446520"/>
-            <a:ext cx="8229600" cy="320040"/>
-          </a:xfrm>
-          <a:prstGeom prst="rect">
-            <a:avLst/>
-          </a:prstGeom>
-          <a:noFill/>
-        </p:spPr>
-        <p:txBody>
-          <a:bodyPr wrap="square">
-            <a:spAutoFit/>
-          </a:bodyPr>
-          <a:lstStyle/>
+              <a:t>•  Ergebnisse — mit Fokus auf Effektstärken</a:t>
+            </a:r>
+          </a:p>
           <a:p>
             <a:pPr algn="l">
               <a:spcAft>
@@ -6633,6 +9776,61 @@
               </a:spcAft>
             </a:pPr>
             <a:r>
+              <a:rPr sz="2000" b="0">
+                <a:solidFill>
+                  <a:srgbClr val="1A1A1A"/>
+                </a:solidFill>
+                <a:latin typeface="Segoe UI"/>
+              </a:rPr>
+              <a:t>•  Live-Demo der Webapp</a:t>
+            </a:r>
+          </a:p>
+          <a:p>
+            <a:pPr algn="l">
+              <a:spcAft>
+                <a:spcPts val="800"/>
+              </a:spcAft>
+            </a:pPr>
+            <a:r>
+              <a:rPr sz="2000" b="0">
+                <a:solidFill>
+                  <a:srgbClr val="1A1A1A"/>
+                </a:solidFill>
+                <a:latin typeface="Segoe UI"/>
+              </a:rPr>
+              <a:t>•  Limitationen und Schlussfolgerungen</a:t>
+            </a:r>
+          </a:p>
+        </p:txBody>
+      </p:sp>
+      <p:sp>
+        <p:nvSpPr>
+          <p:cNvPr id="6" name="TextBox 5"/>
+          <p:cNvSpPr txBox="1"/>
+          <p:nvPr/>
+        </p:nvSpPr>
+        <p:spPr>
+          <a:xfrm>
+            <a:off x="457200" y="6446520"/>
+            <a:ext cx="8229600" cy="320040"/>
+          </a:xfrm>
+          <a:prstGeom prst="rect">
+            <a:avLst/>
+          </a:prstGeom>
+          <a:noFill/>
+        </p:spPr>
+        <p:txBody>
+          <a:bodyPr wrap="square">
+            <a:spAutoFit/>
+          </a:bodyPr>
+          <a:lstStyle/>
+          <a:p>
+            <a:pPr algn="l">
+              <a:spcAft>
+                <a:spcPts val="800"/>
+              </a:spcAft>
+            </a:pPr>
+            <a:r>
               <a:rPr sz="900" b="0">
                 <a:solidFill>
                   <a:srgbClr val="999999"/>
@@ -6678,7 +9876,7 @@
                 </a:solidFill>
                 <a:latin typeface="Segoe UI"/>
               </a:rPr>
-              <a:t>14</a:t>
+              <a:t>2</a:t>
             </a:r>
           </a:p>
         </p:txBody>
@@ -6691,8 +9889,8 @@
 </p:sld>
 </file>
 
-<file path=ppt/slides/slide15.xml><?xml version="1.0" encoding="utf-8"?>
-<p:sld xmlns:a="http://schemas.openxmlformats.org/drawingml/2006/main" xmlns:p="http://schemas.openxmlformats.org/presentationml/2006/main" xmlns:r="http://schemas.openxmlformats.org/officeDocument/2006/relationships">
+<file path=ppt/slides/slide20.xml><?xml version="1.0" encoding="utf-8"?>
+<p:sld xmlns:a="http://schemas.openxmlformats.org/drawingml/2006/main" xmlns:r="http://schemas.openxmlformats.org/officeDocument/2006/relationships" xmlns:p="http://schemas.openxmlformats.org/presentationml/2006/main">
   <p:cSld>
     <p:bg>
       <p:bgPr>
@@ -6708,7 +9906,14 @@
         <p:cNvGrpSpPr/>
         <p:nvPr/>
       </p:nvGrpSpPr>
-      <p:grpSpPr/>
+      <p:grpSpPr>
+        <a:xfrm>
+          <a:off x="0" y="0"/>
+          <a:ext cx="0" cy="0"/>
+          <a:chOff x="0" y="0"/>
+          <a:chExt cx="0" cy="0"/>
+        </a:xfrm>
+      </p:grpSpPr>
       <p:sp>
         <p:nvSpPr>
           <p:cNvPr id="2" name="Rectangle 1"/>
@@ -6750,6 +9955,7 @@
           <a:lstStyle/>
           <a:p>
             <a:pPr algn="ctr"/>
+            <a:endParaRPr/>
           </a:p>
         </p:txBody>
       </p:sp>
@@ -6787,7 +9993,7 @@
                 </a:solidFill>
                 <a:latin typeface="Segoe UI"/>
               </a:rPr>
-              <a:t>Schlussfolgerungen</a:t>
+              <a:t>Limitationen</a:t>
             </a:r>
           </a:p>
         </p:txBody>
@@ -6833,6 +10039,7 @@
           <a:lstStyle/>
           <a:p>
             <a:pPr algn="ctr"/>
+            <a:endParaRPr/>
           </a:p>
         </p:txBody>
       </p:sp>
@@ -6870,7 +10077,23 @@
                 </a:solidFill>
                 <a:latin typeface="Segoe UI"/>
               </a:rPr>
-              <a:t>•  Die SBB ist sehr pünktlich (~95 % unter 3 Minuten) und räumlich stabil</a:t>
+              <a:t>•  Beobachtungen nicht unabhängig (gleicher Zug/Bahnhof/Tag) — Pseudoreplikation</a:t>
+            </a:r>
+          </a:p>
+          <a:p>
+            <a:pPr lvl="1" algn="l">
+              <a:spcAft>
+                <a:spcPts val="800"/>
+              </a:spcAft>
+            </a:pPr>
+            <a:r>
+              <a:rPr sz="1500" b="0">
+                <a:solidFill>
+                  <a:srgbClr val="595959"/>
+                </a:solidFill>
+                <a:latin typeface="Segoe UI"/>
+              </a:rPr>
+              <a:t>–  dagegen: Tagesmittel-Gegencheck + Fokus auf Effektstärken</a:t>
             </a:r>
           </a:p>
           <a:p>
@@ -6886,7 +10109,7 @@
                 </a:solidFill>
                 <a:latin typeface="Segoe UI"/>
               </a:rPr>
-              <a:t>•  Tag, Linientyp und Wetter wirken messbar, aber praktisch klein</a:t>
+              <a:t>•  Nur 48 Tage im Frühling — keine Saisonalität (Winter, Bausaison fehlen)</a:t>
             </a:r>
           </a:p>
           <a:p>
@@ -6902,7 +10125,7 @@
                 </a:solidFill>
                 <a:latin typeface="Segoe UI"/>
               </a:rPr>
-              <a:t>•  Verspätung ist überwiegend idiosynkratisch (Modell erklärt nur ~4 %)</a:t>
+              <a:t>•  Nur SBB; Wetter-Station bis ~40 km entfernt (Mikroklima geht verloren)</a:t>
             </a:r>
           </a:p>
           <a:p>
@@ -6918,9 +10141,32 @@
                 </a:solidFill>
                 <a:latin typeface="Segoe UI"/>
               </a:rPr>
-              <a:t>•  Die grössten Hotspots sind Grenzbahnhöfe (Import-Effekt aus dem Ausland)</a:t>
-            </a:r>
-          </a:p>
+              <a:t>•  Korrelation ist nicht Kausalität (mögliche versteckte Faktoren)</a:t>
+            </a:r>
+          </a:p>
+        </p:txBody>
+      </p:sp>
+      <p:sp>
+        <p:nvSpPr>
+          <p:cNvPr id="6" name="TextBox 5"/>
+          <p:cNvSpPr txBox="1"/>
+          <p:nvPr/>
+        </p:nvSpPr>
+        <p:spPr>
+          <a:xfrm>
+            <a:off x="457200" y="6446520"/>
+            <a:ext cx="8229600" cy="320040"/>
+          </a:xfrm>
+          <a:prstGeom prst="rect">
+            <a:avLst/>
+          </a:prstGeom>
+          <a:noFill/>
+        </p:spPr>
+        <p:txBody>
+          <a:bodyPr wrap="square">
+            <a:spAutoFit/>
+          </a:bodyPr>
+          <a:lstStyle/>
           <a:p>
             <a:pPr algn="l">
               <a:spcAft>
@@ -6928,45 +10174,6 @@
               </a:spcAft>
             </a:pPr>
             <a:r>
-              <a:rPr sz="1800" b="0">
-                <a:solidFill>
-                  <a:srgbClr val="1A1A1A"/>
-                </a:solidFill>
-                <a:latin typeface="Segoe UI"/>
-              </a:rPr>
-              <a:t>•  Mehrwert: Webapp und Sprachmodell machen die Daten zugänglich</a:t>
-            </a:r>
-          </a:p>
-        </p:txBody>
-      </p:sp>
-      <p:sp>
-        <p:nvSpPr>
-          <p:cNvPr id="6" name="TextBox 5"/>
-          <p:cNvSpPr txBox="1"/>
-          <p:nvPr/>
-        </p:nvSpPr>
-        <p:spPr>
-          <a:xfrm>
-            <a:off x="457200" y="6446520"/>
-            <a:ext cx="8229600" cy="320040"/>
-          </a:xfrm>
-          <a:prstGeom prst="rect">
-            <a:avLst/>
-          </a:prstGeom>
-          <a:noFill/>
-        </p:spPr>
-        <p:txBody>
-          <a:bodyPr wrap="square">
-            <a:spAutoFit/>
-          </a:bodyPr>
-          <a:lstStyle/>
-          <a:p>
-            <a:pPr algn="l">
-              <a:spcAft>
-                <a:spcPts val="800"/>
-              </a:spcAft>
-            </a:pPr>
-            <a:r>
               <a:rPr sz="900" b="0">
                 <a:solidFill>
                   <a:srgbClr val="999999"/>
@@ -7012,7 +10219,7 @@
                 </a:solidFill>
                 <a:latin typeface="Segoe UI"/>
               </a:rPr>
-              <a:t>15</a:t>
+              <a:t>20</a:t>
             </a:r>
           </a:p>
         </p:txBody>
@@ -7025,8 +10232,8 @@
 </p:sld>
 </file>
 
-<file path=ppt/slides/slide16.xml><?xml version="1.0" encoding="utf-8"?>
-<p:sld xmlns:a="http://schemas.openxmlformats.org/drawingml/2006/main" xmlns:p="http://schemas.openxmlformats.org/presentationml/2006/main" xmlns:r="http://schemas.openxmlformats.org/officeDocument/2006/relationships">
+<file path=ppt/slides/slide21.xml><?xml version="1.0" encoding="utf-8"?>
+<p:sld xmlns:a="http://schemas.openxmlformats.org/drawingml/2006/main" xmlns:r="http://schemas.openxmlformats.org/officeDocument/2006/relationships" xmlns:p="http://schemas.openxmlformats.org/presentationml/2006/main">
   <p:cSld>
     <p:bg>
       <p:bgPr>
@@ -7042,7 +10249,14 @@
         <p:cNvGrpSpPr/>
         <p:nvPr/>
       </p:nvGrpSpPr>
-      <p:grpSpPr/>
+      <p:grpSpPr>
+        <a:xfrm>
+          <a:off x="0" y="0"/>
+          <a:ext cx="0" cy="0"/>
+          <a:chOff x="0" y="0"/>
+          <a:chExt cx="0" cy="0"/>
+        </a:xfrm>
+      </p:grpSpPr>
       <p:sp>
         <p:nvSpPr>
           <p:cNvPr id="2" name="Rectangle 1"/>
@@ -7084,6 +10298,7 @@
           <a:lstStyle/>
           <a:p>
             <a:pPr algn="ctr"/>
+            <a:endParaRPr/>
           </a:p>
         </p:txBody>
       </p:sp>
@@ -7121,7 +10336,7 @@
                 </a:solidFill>
                 <a:latin typeface="Segoe UI"/>
               </a:rPr>
-              <a:t>Quellen, Code und Reproduzierbarkeit</a:t>
+              <a:t>Schlussfolgerungen</a:t>
             </a:r>
           </a:p>
         </p:txBody>
@@ -7167,6 +10382,7 @@
           <a:lstStyle/>
           <a:p>
             <a:pPr algn="ctr"/>
+            <a:endParaRPr/>
           </a:p>
         </p:txBody>
       </p:sp>
@@ -7204,7 +10420,7 @@
                 </a:solidFill>
                 <a:latin typeface="Segoe UI"/>
               </a:rPr>
-              <a:t>•  Daten: opentransportdata.swiss · data.sbb.ch · MeteoSchweiz (alle CC-BY)</a:t>
+              <a:t>•  Die SBB ist sehr pünktlich (~95 % unter 3 Minuten) und räumlich stabil</a:t>
             </a:r>
           </a:p>
           <a:p>
@@ -7220,7 +10436,7 @@
                 </a:solidFill>
                 <a:latin typeface="Segoe UI"/>
               </a:rPr>
-              <a:t>•  Code (MIT-Lizenz): github.com/Mrgincinamon/SBB-Tracking</a:t>
+              <a:t>•  Tag, Linientyp und Wetter wirken messbar, aber praktisch klein</a:t>
             </a:r>
           </a:p>
           <a:p>
@@ -7236,7 +10452,7 @@
                 </a:solidFill>
                 <a:latin typeface="Segoe UI"/>
               </a:rPr>
-              <a:t>•  Vollständig reproduzierbar: requirements.txt + Build-Skripte</a:t>
+              <a:t>•  Verspätung ist überwiegend idiosynkratisch (Modell erklärt nur ~4 %)</a:t>
             </a:r>
           </a:p>
           <a:p>
@@ -7252,7 +10468,7 @@
                 </a:solidFill>
                 <a:latin typeface="Segoe UI"/>
               </a:rPr>
-              <a:t>•  Stack: Python 3.12 · pandas/scipy/statsmodels · SQLite · Streamlit · Anthropic</a:t>
+              <a:t>•  Die grössten Hotspots sind Grenzbahnhöfe (Import-Effekt aus dem Ausland)</a:t>
             </a:r>
           </a:p>
           <a:p>
@@ -7268,7 +10484,7 @@
                 </a:solidFill>
                 <a:latin typeface="Segoe UI"/>
               </a:rPr>
-              <a:t>•  Vielen Dank — gerne Fragen!</a:t>
+              <a:t>•  Mehrwert: Webapp und Sprachmodell machen die Daten zugänglich</a:t>
             </a:r>
           </a:p>
         </p:txBody>
@@ -7346,7 +10562,7 @@
                 </a:solidFill>
                 <a:latin typeface="Segoe UI"/>
               </a:rPr>
-              <a:t>16</a:t>
+              <a:t>21</a:t>
             </a:r>
           </a:p>
         </p:txBody>
@@ -7359,8 +10575,8 @@
 </p:sld>
 </file>
 
-<file path=ppt/slides/slide2.xml><?xml version="1.0" encoding="utf-8"?>
-<p:sld xmlns:a="http://schemas.openxmlformats.org/drawingml/2006/main" xmlns:p="http://schemas.openxmlformats.org/presentationml/2006/main" xmlns:r="http://schemas.openxmlformats.org/officeDocument/2006/relationships">
+<file path=ppt/slides/slide22.xml><?xml version="1.0" encoding="utf-8"?>
+<p:sld xmlns:a="http://schemas.openxmlformats.org/drawingml/2006/main" xmlns:r="http://schemas.openxmlformats.org/officeDocument/2006/relationships" xmlns:p="http://schemas.openxmlformats.org/presentationml/2006/main">
   <p:cSld>
     <p:bg>
       <p:bgPr>
@@ -7376,7 +10592,14 @@
         <p:cNvGrpSpPr/>
         <p:nvPr/>
       </p:nvGrpSpPr>
-      <p:grpSpPr/>
+      <p:grpSpPr>
+        <a:xfrm>
+          <a:off x="0" y="0"/>
+          <a:ext cx="0" cy="0"/>
+          <a:chOff x="0" y="0"/>
+          <a:chExt cx="0" cy="0"/>
+        </a:xfrm>
+      </p:grpSpPr>
       <p:sp>
         <p:nvSpPr>
           <p:cNvPr id="2" name="Rectangle 1"/>
@@ -7418,6 +10641,7 @@
           <a:lstStyle/>
           <a:p>
             <a:pPr algn="ctr"/>
+            <a:endParaRPr/>
           </a:p>
         </p:txBody>
       </p:sp>
@@ -7455,7 +10679,7 @@
                 </a:solidFill>
                 <a:latin typeface="Segoe UI"/>
               </a:rPr>
-              <a:t>Agenda</a:t>
+              <a:t>Quellen, Code und Reproduzierbarkeit</a:t>
             </a:r>
           </a:p>
         </p:txBody>
@@ -7501,6 +10725,7 @@
           <a:lstStyle/>
           <a:p>
             <a:pPr algn="ctr"/>
+            <a:endParaRPr/>
           </a:p>
         </p:txBody>
       </p:sp>
@@ -7532,13 +10757,13 @@
               </a:spcAft>
             </a:pPr>
             <a:r>
-              <a:rPr sz="2000" b="0">
+              <a:rPr sz="1800" b="0">
                 <a:solidFill>
                   <a:srgbClr val="1A1A1A"/>
                 </a:solidFill>
                 <a:latin typeface="Segoe UI"/>
               </a:rPr>
-              <a:t>•  Motivation und Forschungsfragen</a:t>
+              <a:t>•  Daten: opentransportdata.swiss · data.sbb.ch · MeteoSchweiz (alle CC-BY)</a:t>
             </a:r>
           </a:p>
           <a:p>
@@ -7548,13 +10773,13 @@
               </a:spcAft>
             </a:pPr>
             <a:r>
-              <a:rPr sz="2000" b="0">
+              <a:rPr sz="1800" b="0">
                 <a:solidFill>
                   <a:srgbClr val="1A1A1A"/>
                 </a:solidFill>
                 <a:latin typeface="Segoe UI"/>
               </a:rPr>
-              <a:t>•  Datengrundlage und eine zentrale Design-Entscheidung</a:t>
+              <a:t>•  Code (MIT-Lizenz): github.com/Mrgincinamon/SBB-Tracking</a:t>
             </a:r>
           </a:p>
           <a:p>
@@ -7564,13 +10789,13 @@
               </a:spcAft>
             </a:pPr>
             <a:r>
-              <a:rPr sz="2000" b="0">
+              <a:rPr sz="1800" b="0">
                 <a:solidFill>
                   <a:srgbClr val="1A1A1A"/>
                 </a:solidFill>
                 <a:latin typeface="Segoe UI"/>
               </a:rPr>
-              <a:t>•  Methodik: vier statistische Tests plus ein Sprachmodell</a:t>
+              <a:t>•  Vollständig reproduzierbar: requirements.txt + Build-Skripte</a:t>
             </a:r>
           </a:p>
           <a:p>
@@ -7580,13 +10805,13 @@
               </a:spcAft>
             </a:pPr>
             <a:r>
-              <a:rPr sz="2000" b="0">
+              <a:rPr sz="1800" b="0">
                 <a:solidFill>
                   <a:srgbClr val="1A1A1A"/>
                 </a:solidFill>
                 <a:latin typeface="Segoe UI"/>
               </a:rPr>
-              <a:t>•  Ergebnisse — mit Fokus auf Effektstärken</a:t>
+              <a:t>•  Stack: Python 3.12 · pandas/scipy/statsmodels · SQLite · Streamlit · Anthropic</a:t>
             </a:r>
           </a:p>
           <a:p>
@@ -7596,15 +10821,38 @@
               </a:spcAft>
             </a:pPr>
             <a:r>
-              <a:rPr sz="2000" b="0">
+              <a:rPr sz="1800" b="0">
                 <a:solidFill>
                   <a:srgbClr val="1A1A1A"/>
                 </a:solidFill>
                 <a:latin typeface="Segoe UI"/>
               </a:rPr>
-              <a:t>•  Live-Demo der Webapp</a:t>
-            </a:r>
-          </a:p>
+              <a:t>•  Vielen Dank — gerne Fragen!</a:t>
+            </a:r>
+          </a:p>
+        </p:txBody>
+      </p:sp>
+      <p:sp>
+        <p:nvSpPr>
+          <p:cNvPr id="6" name="TextBox 5"/>
+          <p:cNvSpPr txBox="1"/>
+          <p:nvPr/>
+        </p:nvSpPr>
+        <p:spPr>
+          <a:xfrm>
+            <a:off x="457200" y="6446520"/>
+            <a:ext cx="8229600" cy="320040"/>
+          </a:xfrm>
+          <a:prstGeom prst="rect">
+            <a:avLst/>
+          </a:prstGeom>
+          <a:noFill/>
+        </p:spPr>
+        <p:txBody>
+          <a:bodyPr wrap="square">
+            <a:spAutoFit/>
+          </a:bodyPr>
+          <a:lstStyle/>
           <a:p>
             <a:pPr algn="l">
               <a:spcAft>
@@ -7612,45 +10860,6 @@
               </a:spcAft>
             </a:pPr>
             <a:r>
-              <a:rPr sz="2000" b="0">
-                <a:solidFill>
-                  <a:srgbClr val="1A1A1A"/>
-                </a:solidFill>
-                <a:latin typeface="Segoe UI"/>
-              </a:rPr>
-              <a:t>•  Limitationen und Schlussfolgerungen</a:t>
-            </a:r>
-          </a:p>
-        </p:txBody>
-      </p:sp>
-      <p:sp>
-        <p:nvSpPr>
-          <p:cNvPr id="6" name="TextBox 5"/>
-          <p:cNvSpPr txBox="1"/>
-          <p:nvPr/>
-        </p:nvSpPr>
-        <p:spPr>
-          <a:xfrm>
-            <a:off x="457200" y="6446520"/>
-            <a:ext cx="8229600" cy="320040"/>
-          </a:xfrm>
-          <a:prstGeom prst="rect">
-            <a:avLst/>
-          </a:prstGeom>
-          <a:noFill/>
-        </p:spPr>
-        <p:txBody>
-          <a:bodyPr wrap="square">
-            <a:spAutoFit/>
-          </a:bodyPr>
-          <a:lstStyle/>
-          <a:p>
-            <a:pPr algn="l">
-              <a:spcAft>
-                <a:spcPts val="800"/>
-              </a:spcAft>
-            </a:pPr>
-            <a:r>
               <a:rPr sz="900" b="0">
                 <a:solidFill>
                   <a:srgbClr val="999999"/>
@@ -7696,7 +10905,7 @@
                 </a:solidFill>
                 <a:latin typeface="Segoe UI"/>
               </a:rPr>
-              <a:t>2</a:t>
+              <a:t>22</a:t>
             </a:r>
           </a:p>
         </p:txBody>
@@ -7710,7 +10919,7 @@
 </file>
 
 <file path=ppt/slides/slide3.xml><?xml version="1.0" encoding="utf-8"?>
-<p:sld xmlns:a="http://schemas.openxmlformats.org/drawingml/2006/main" xmlns:p="http://schemas.openxmlformats.org/presentationml/2006/main" xmlns:r="http://schemas.openxmlformats.org/officeDocument/2006/relationships">
+<p:sld xmlns:a="http://schemas.openxmlformats.org/drawingml/2006/main" xmlns:r="http://schemas.openxmlformats.org/officeDocument/2006/relationships" xmlns:p="http://schemas.openxmlformats.org/presentationml/2006/main">
   <p:cSld>
     <p:bg>
       <p:bgPr>
@@ -7726,7 +10935,14 @@
         <p:cNvGrpSpPr/>
         <p:nvPr/>
       </p:nvGrpSpPr>
-      <p:grpSpPr/>
+      <p:grpSpPr>
+        <a:xfrm>
+          <a:off x="0" y="0"/>
+          <a:ext cx="0" cy="0"/>
+          <a:chOff x="0" y="0"/>
+          <a:chExt cx="0" cy="0"/>
+        </a:xfrm>
+      </p:grpSpPr>
       <p:sp>
         <p:nvSpPr>
           <p:cNvPr id="2" name="Rectangle 1"/>
@@ -7768,6 +10984,7 @@
           <a:lstStyle/>
           <a:p>
             <a:pPr algn="ctr"/>
+            <a:endParaRPr/>
           </a:p>
         </p:txBody>
       </p:sp>
@@ -7851,6 +11068,7 @@
           <a:lstStyle/>
           <a:p>
             <a:pPr algn="ctr"/>
+            <a:endParaRPr/>
           </a:p>
         </p:txBody>
       </p:sp>
@@ -7908,7 +11126,7 @@
             </a:r>
           </a:p>
           <a:p>
-            <a:pPr algn="l" lvl="1">
+            <a:pPr lvl="1" algn="l">
               <a:spcAft>
                 <a:spcPts val="800"/>
               </a:spcAft>
@@ -7924,7 +11142,7 @@
             </a:r>
           </a:p>
           <a:p>
-            <a:pPr algn="l" lvl="1">
+            <a:pPr lvl="1" algn="l">
               <a:spcAft>
                 <a:spcPts val="800"/>
               </a:spcAft>
@@ -7940,7 +11158,7 @@
             </a:r>
           </a:p>
           <a:p>
-            <a:pPr algn="l" lvl="1">
+            <a:pPr lvl="1" algn="l">
               <a:spcAft>
                 <a:spcPts val="800"/>
               </a:spcAft>
@@ -7956,7 +11174,7 @@
             </a:r>
           </a:p>
           <a:p>
-            <a:pPr algn="l" lvl="1">
+            <a:pPr lvl="1" algn="l">
               <a:spcAft>
                 <a:spcPts val="800"/>
               </a:spcAft>
@@ -8060,7 +11278,7 @@
 </file>
 
 <file path=ppt/slides/slide4.xml><?xml version="1.0" encoding="utf-8"?>
-<p:sld xmlns:a="http://schemas.openxmlformats.org/drawingml/2006/main" xmlns:p="http://schemas.openxmlformats.org/presentationml/2006/main" xmlns:r="http://schemas.openxmlformats.org/officeDocument/2006/relationships">
+<p:sld xmlns:a="http://schemas.openxmlformats.org/drawingml/2006/main" xmlns:r="http://schemas.openxmlformats.org/officeDocument/2006/relationships" xmlns:p="http://schemas.openxmlformats.org/presentationml/2006/main">
   <p:cSld>
     <p:bg>
       <p:bgPr>
@@ -8076,7 +11294,14 @@
         <p:cNvGrpSpPr/>
         <p:nvPr/>
       </p:nvGrpSpPr>
-      <p:grpSpPr/>
+      <p:grpSpPr>
+        <a:xfrm>
+          <a:off x="0" y="0"/>
+          <a:ext cx="0" cy="0"/>
+          <a:chOff x="0" y="0"/>
+          <a:chExt cx="0" cy="0"/>
+        </a:xfrm>
+      </p:grpSpPr>
       <p:sp>
         <p:nvSpPr>
           <p:cNvPr id="2" name="Rectangle 1"/>
@@ -8118,6 +11343,7 @@
           <a:lstStyle/>
           <a:p>
             <a:pPr algn="ctr"/>
+            <a:endParaRPr/>
           </a:p>
         </p:txBody>
       </p:sp>
@@ -8201,6 +11427,7 @@
           <a:lstStyle/>
           <a:p>
             <a:pPr algn="ctr"/>
+            <a:endParaRPr/>
           </a:p>
         </p:txBody>
       </p:sp>
@@ -8290,7 +11517,7 @@
             </a:r>
           </a:p>
           <a:p>
-            <a:pPr algn="l" lvl="1">
+            <a:pPr lvl="1" algn="l">
               <a:spcAft>
                 <a:spcPts val="800"/>
               </a:spcAft>
@@ -8306,7 +11533,7 @@
             </a:r>
           </a:p>
           <a:p>
-            <a:pPr algn="l" lvl="1">
+            <a:pPr lvl="1" algn="l">
               <a:spcAft>
                 <a:spcPts val="800"/>
               </a:spcAft>
@@ -8426,7 +11653,7 @@
 </file>
 
 <file path=ppt/slides/slide5.xml><?xml version="1.0" encoding="utf-8"?>
-<p:sld xmlns:a="http://schemas.openxmlformats.org/drawingml/2006/main" xmlns:p="http://schemas.openxmlformats.org/presentationml/2006/main" xmlns:r="http://schemas.openxmlformats.org/officeDocument/2006/relationships">
+<p:sld xmlns:a="http://schemas.openxmlformats.org/drawingml/2006/main" xmlns:r="http://schemas.openxmlformats.org/officeDocument/2006/relationships" xmlns:p="http://schemas.openxmlformats.org/presentationml/2006/main">
   <p:cSld>
     <p:bg>
       <p:bgPr>
@@ -8442,7 +11669,14 @@
         <p:cNvGrpSpPr/>
         <p:nvPr/>
       </p:nvGrpSpPr>
-      <p:grpSpPr/>
+      <p:grpSpPr>
+        <a:xfrm>
+          <a:off x="0" y="0"/>
+          <a:ext cx="0" cy="0"/>
+          <a:chOff x="0" y="0"/>
+          <a:chExt cx="0" cy="0"/>
+        </a:xfrm>
+      </p:grpSpPr>
       <p:sp>
         <p:nvSpPr>
           <p:cNvPr id="2" name="Rectangle 1"/>
@@ -8484,6 +11718,7 @@
           <a:lstStyle/>
           <a:p>
             <a:pPr algn="ctr"/>
+            <a:endParaRPr/>
           </a:p>
         </p:txBody>
       </p:sp>
@@ -8567,6 +11802,7 @@
           <a:lstStyle/>
           <a:p>
             <a:pPr algn="ctr"/>
+            <a:endParaRPr/>
           </a:p>
         </p:txBody>
       </p:sp>
@@ -8640,7 +11876,7 @@
             </a:r>
           </a:p>
           <a:p>
-            <a:pPr algn="l" lvl="1">
+            <a:pPr lvl="1" algn="l">
               <a:spcAft>
                 <a:spcPts val="800"/>
               </a:spcAft>
@@ -8792,7 +12028,7 @@
 </file>
 
 <file path=ppt/slides/slide6.xml><?xml version="1.0" encoding="utf-8"?>
-<p:sld xmlns:a="http://schemas.openxmlformats.org/drawingml/2006/main" xmlns:p="http://schemas.openxmlformats.org/presentationml/2006/main" xmlns:r="http://schemas.openxmlformats.org/officeDocument/2006/relationships">
+<p:sld xmlns:a="http://schemas.openxmlformats.org/drawingml/2006/main" xmlns:r="http://schemas.openxmlformats.org/officeDocument/2006/relationships" xmlns:p="http://schemas.openxmlformats.org/presentationml/2006/main">
   <p:cSld>
     <p:bg>
       <p:bgPr>
@@ -8808,7 +12044,14 @@
         <p:cNvGrpSpPr/>
         <p:nvPr/>
       </p:nvGrpSpPr>
-      <p:grpSpPr/>
+      <p:grpSpPr>
+        <a:xfrm>
+          <a:off x="0" y="0"/>
+          <a:ext cx="0" cy="0"/>
+          <a:chOff x="0" y="0"/>
+          <a:chExt cx="0" cy="0"/>
+        </a:xfrm>
+      </p:grpSpPr>
       <p:sp>
         <p:nvSpPr>
           <p:cNvPr id="2" name="Rectangle 1"/>
@@ -8850,6 +12093,7 @@
           <a:lstStyle/>
           <a:p>
             <a:pPr algn="ctr"/>
+            <a:endParaRPr/>
           </a:p>
         </p:txBody>
       </p:sp>
@@ -8933,6 +12177,7 @@
           <a:lstStyle/>
           <a:p>
             <a:pPr algn="ctr"/>
+            <a:endParaRPr/>
           </a:p>
         </p:txBody>
       </p:sp>
@@ -9078,7 +12323,7 @@
           </a:fontRef>
         </p:style>
         <p:txBody>
-          <a:bodyPr rtlCol="0" anchor="ctr" wrap="square" lIns="182880" rIns="182880" tIns="54864" bIns="54864"/>
+          <a:bodyPr wrap="square" lIns="182880" tIns="54864" rIns="182880" bIns="54864" rtlCol="0" anchor="ctr"/>
           <a:lstStyle/>
           <a:p>
             <a:pPr algn="ctr"/>
@@ -9181,7 +12426,7 @@
 </file>
 
 <file path=ppt/slides/slide7.xml><?xml version="1.0" encoding="utf-8"?>
-<p:sld xmlns:a="http://schemas.openxmlformats.org/drawingml/2006/main" xmlns:p="http://schemas.openxmlformats.org/presentationml/2006/main" xmlns:r="http://schemas.openxmlformats.org/officeDocument/2006/relationships">
+<p:sld xmlns:a="http://schemas.openxmlformats.org/drawingml/2006/main" xmlns:r="http://schemas.openxmlformats.org/officeDocument/2006/relationships" xmlns:p="http://schemas.openxmlformats.org/presentationml/2006/main">
   <p:cSld>
     <p:bg>
       <p:bgPr>
@@ -9197,7 +12442,14 @@
         <p:cNvGrpSpPr/>
         <p:nvPr/>
       </p:nvGrpSpPr>
-      <p:grpSpPr/>
+      <p:grpSpPr>
+        <a:xfrm>
+          <a:off x="0" y="0"/>
+          <a:ext cx="0" cy="0"/>
+          <a:chOff x="0" y="0"/>
+          <a:chExt cx="0" cy="0"/>
+        </a:xfrm>
+      </p:grpSpPr>
       <p:sp>
         <p:nvSpPr>
           <p:cNvPr id="2" name="Rectangle 1"/>
@@ -9239,6 +12491,7 @@
           <a:lstStyle/>
           <a:p>
             <a:pPr algn="ctr"/>
+            <a:endParaRPr/>
           </a:p>
         </p:txBody>
       </p:sp>
@@ -9322,6 +12575,7 @@
           <a:lstStyle/>
           <a:p>
             <a:pPr algn="ctr"/>
+            <a:endParaRPr/>
           </a:p>
         </p:txBody>
       </p:sp>
@@ -9334,7 +12588,7 @@
           <p:nvPr/>
         </p:nvPicPr>
         <p:blipFill>
-          <a:blip r:embed="rId2"/>
+          <a:blip r:embed="rId3"/>
           <a:stretch>
             <a:fillRect/>
           </a:stretch>
@@ -9475,7 +12729,7 @@
 </file>
 
 <file path=ppt/slides/slide8.xml><?xml version="1.0" encoding="utf-8"?>
-<p:sld xmlns:a="http://schemas.openxmlformats.org/drawingml/2006/main" xmlns:p="http://schemas.openxmlformats.org/presentationml/2006/main" xmlns:r="http://schemas.openxmlformats.org/officeDocument/2006/relationships">
+<p:sld xmlns:a="http://schemas.openxmlformats.org/drawingml/2006/main" xmlns:r="http://schemas.openxmlformats.org/officeDocument/2006/relationships" xmlns:p="http://schemas.openxmlformats.org/presentationml/2006/main">
   <p:cSld>
     <p:bg>
       <p:bgPr>
@@ -9491,7 +12745,14 @@
         <p:cNvGrpSpPr/>
         <p:nvPr/>
       </p:nvGrpSpPr>
-      <p:grpSpPr/>
+      <p:grpSpPr>
+        <a:xfrm>
+          <a:off x="0" y="0"/>
+          <a:ext cx="0" cy="0"/>
+          <a:chOff x="0" y="0"/>
+          <a:chExt cx="0" cy="0"/>
+        </a:xfrm>
+      </p:grpSpPr>
       <p:sp>
         <p:nvSpPr>
           <p:cNvPr id="2" name="Rectangle 1"/>
@@ -9533,6 +12794,7 @@
           <a:lstStyle/>
           <a:p>
             <a:pPr algn="ctr"/>
+            <a:endParaRPr/>
           </a:p>
         </p:txBody>
       </p:sp>
@@ -9616,6 +12878,7 @@
           <a:lstStyle/>
           <a:p>
             <a:pPr algn="ctr"/>
+            <a:endParaRPr/>
           </a:p>
         </p:txBody>
       </p:sp>
@@ -9761,7 +13024,7 @@
           </a:fontRef>
         </p:style>
         <p:txBody>
-          <a:bodyPr rtlCol="0" anchor="ctr" wrap="square" lIns="182880" rIns="182880" tIns="54864" bIns="54864"/>
+          <a:bodyPr wrap="square" lIns="182880" tIns="54864" rIns="182880" bIns="54864" rtlCol="0" anchor="ctr"/>
           <a:lstStyle/>
           <a:p>
             <a:pPr algn="ctr"/>
@@ -9864,7 +13127,7 @@
 </file>
 
 <file path=ppt/slides/slide9.xml><?xml version="1.0" encoding="utf-8"?>
-<p:sld xmlns:a="http://schemas.openxmlformats.org/drawingml/2006/main" xmlns:p="http://schemas.openxmlformats.org/presentationml/2006/main" xmlns:r="http://schemas.openxmlformats.org/officeDocument/2006/relationships">
+<p:sld xmlns:a="http://schemas.openxmlformats.org/drawingml/2006/main" xmlns:r="http://schemas.openxmlformats.org/officeDocument/2006/relationships" xmlns:p="http://schemas.openxmlformats.org/presentationml/2006/main">
   <p:cSld>
     <p:bg>
       <p:bgPr>
@@ -9880,7 +13143,14 @@
         <p:cNvGrpSpPr/>
         <p:nvPr/>
       </p:nvGrpSpPr>
-      <p:grpSpPr/>
+      <p:grpSpPr>
+        <a:xfrm>
+          <a:off x="0" y="0"/>
+          <a:ext cx="0" cy="0"/>
+          <a:chOff x="0" y="0"/>
+          <a:chExt cx="0" cy="0"/>
+        </a:xfrm>
+      </p:grpSpPr>
       <p:sp>
         <p:nvSpPr>
           <p:cNvPr id="2" name="Rectangle 1"/>
@@ -9922,6 +13192,7 @@
           <a:lstStyle/>
           <a:p>
             <a:pPr algn="ctr"/>
+            <a:endParaRPr/>
           </a:p>
         </p:txBody>
       </p:sp>
@@ -10005,6 +13276,7 @@
           <a:lstStyle/>
           <a:p>
             <a:pPr algn="ctr"/>
+            <a:endParaRPr/>
           </a:p>
         </p:txBody>
       </p:sp>
@@ -10017,7 +13289,7 @@
           <p:nvPr/>
         </p:nvPicPr>
         <p:blipFill>
-          <a:blip r:embed="rId2"/>
+          <a:blip r:embed="rId3"/>
           <a:stretch>
             <a:fillRect/>
           </a:stretch>
@@ -10478,7 +13750,7 @@
 </file>
 
 <file path=ppt/theme/theme2.xml><?xml version="1.0" encoding="utf-8"?>
-<a:theme xmlns:a="http://schemas.openxmlformats.org/drawingml/2006/main" name="Office Theme">
+<a:theme xmlns:a="http://schemas.openxmlformats.org/drawingml/2006/main" name="Office">
   <a:themeElements>
     <a:clrScheme name="Office">
       <a:dk1>
@@ -10488,44 +13760,44 @@
         <a:sysClr val="window" lastClr="FFFFFF"/>
       </a:lt1>
       <a:dk2>
-        <a:srgbClr val="1F497D"/>
+        <a:srgbClr val="0E2841"/>
       </a:dk2>
       <a:lt2>
-        <a:srgbClr val="EEECE1"/>
+        <a:srgbClr val="E8E8E8"/>
       </a:lt2>
       <a:accent1>
-        <a:srgbClr val="4F81BD"/>
+        <a:srgbClr val="156082"/>
       </a:accent1>
       <a:accent2>
-        <a:srgbClr val="C0504D"/>
+        <a:srgbClr val="E97132"/>
       </a:accent2>
       <a:accent3>
-        <a:srgbClr val="9BBB59"/>
+        <a:srgbClr val="196B24"/>
       </a:accent3>
       <a:accent4>
-        <a:srgbClr val="8064A2"/>
+        <a:srgbClr val="0F9ED5"/>
       </a:accent4>
       <a:accent5>
-        <a:srgbClr val="4BACC6"/>
+        <a:srgbClr val="A02B93"/>
       </a:accent5>
       <a:accent6>
-        <a:srgbClr val="F79646"/>
+        <a:srgbClr val="4EA72E"/>
       </a:accent6>
       <a:hlink>
-        <a:srgbClr val="0000FF"/>
+        <a:srgbClr val="467886"/>
       </a:hlink>
       <a:folHlink>
-        <a:srgbClr val="800080"/>
+        <a:srgbClr val="96607D"/>
       </a:folHlink>
     </a:clrScheme>
     <a:fontScheme name="Office">
       <a:majorFont>
-        <a:latin typeface="Calibri"/>
+        <a:latin typeface="Aptos Display" panose="02110004020202020204"/>
         <a:ea typeface=""/>
         <a:cs typeface=""/>
-        <a:font script="Jpan" typeface="ＭＳ Ｐゴシック"/>
+        <a:font script="Jpan" typeface="游ゴシック Light"/>
         <a:font script="Hang" typeface="맑은 고딕"/>
-        <a:font script="Hans" typeface="宋体"/>
+        <a:font script="Hans" typeface="等线 Light"/>
         <a:font script="Hant" typeface="新細明體"/>
         <a:font script="Arab" typeface="Times New Roman"/>
         <a:font script="Hebr" typeface="Times New Roman"/>
@@ -10553,14 +13825,31 @@
         <a:font script="Viet" typeface="Times New Roman"/>
         <a:font script="Uigh" typeface="Microsoft Uighur"/>
         <a:font script="Geor" typeface="Sylfaen"/>
+        <a:font script="Armn" typeface="Arial"/>
+        <a:font script="Bugi" typeface="Leelawadee UI"/>
+        <a:font script="Bopo" typeface="Microsoft JhengHei"/>
+        <a:font script="Java" typeface="Javanese Text"/>
+        <a:font script="Lisu" typeface="Segoe UI"/>
+        <a:font script="Mymr" typeface="Myanmar Text"/>
+        <a:font script="Nkoo" typeface="Ebrima"/>
+        <a:font script="Olck" typeface="Nirmala UI"/>
+        <a:font script="Osma" typeface="Ebrima"/>
+        <a:font script="Phag" typeface="Phagspa"/>
+        <a:font script="Syrn" typeface="Estrangelo Edessa"/>
+        <a:font script="Syrj" typeface="Estrangelo Edessa"/>
+        <a:font script="Syre" typeface="Estrangelo Edessa"/>
+        <a:font script="Sora" typeface="Nirmala UI"/>
+        <a:font script="Tale" typeface="Microsoft Tai Le"/>
+        <a:font script="Talu" typeface="Microsoft New Tai Lue"/>
+        <a:font script="Tfng" typeface="Ebrima"/>
       </a:majorFont>
       <a:minorFont>
-        <a:latin typeface="Calibri"/>
+        <a:latin typeface="Aptos" panose="02110004020202020204"/>
         <a:ea typeface=""/>
         <a:cs typeface=""/>
-        <a:font script="Jpan" typeface="ＭＳ Ｐゴシック"/>
+        <a:font script="Jpan" typeface="游ゴシック"/>
         <a:font script="Hang" typeface="맑은 고딕"/>
-        <a:font script="Hans" typeface="宋体"/>
+        <a:font script="Hans" typeface="等线"/>
         <a:font script="Hant" typeface="新細明體"/>
         <a:font script="Arab" typeface="Arial"/>
         <a:font script="Hebr" typeface="Arial"/>
@@ -10588,6 +13877,23 @@
         <a:font script="Viet" typeface="Arial"/>
         <a:font script="Uigh" typeface="Microsoft Uighur"/>
         <a:font script="Geor" typeface="Sylfaen"/>
+        <a:font script="Armn" typeface="Arial"/>
+        <a:font script="Bugi" typeface="Leelawadee UI"/>
+        <a:font script="Bopo" typeface="Microsoft JhengHei"/>
+        <a:font script="Java" typeface="Javanese Text"/>
+        <a:font script="Lisu" typeface="Segoe UI"/>
+        <a:font script="Mymr" typeface="Myanmar Text"/>
+        <a:font script="Nkoo" typeface="Ebrima"/>
+        <a:font script="Olck" typeface="Nirmala UI"/>
+        <a:font script="Osma" typeface="Ebrima"/>
+        <a:font script="Phag" typeface="Phagspa"/>
+        <a:font script="Syrn" typeface="Estrangelo Edessa"/>
+        <a:font script="Syrj" typeface="Estrangelo Edessa"/>
+        <a:font script="Syre" typeface="Estrangelo Edessa"/>
+        <a:font script="Sora" typeface="Nirmala UI"/>
+        <a:font script="Tale" typeface="Microsoft Tai Le"/>
+        <a:font script="Talu" typeface="Microsoft New Tai Lue"/>
+        <a:font script="Tfng" typeface="Ebrima"/>
       </a:minorFont>
     </a:fontScheme>
     <a:fmtScheme name="Office">
@@ -10599,180 +13905,136 @@
           <a:gsLst>
             <a:gs pos="0">
               <a:schemeClr val="phClr">
-                <a:tint val="50000"/>
-                <a:satMod val="300000"/>
+                <a:lumMod val="110000"/>
+                <a:satMod val="105000"/>
+                <a:tint val="67000"/>
               </a:schemeClr>
             </a:gs>
-            <a:gs pos="35000">
+            <a:gs pos="50000">
               <a:schemeClr val="phClr">
-                <a:tint val="37000"/>
-                <a:satMod val="300000"/>
+                <a:lumMod val="105000"/>
+                <a:satMod val="103000"/>
+                <a:tint val="73000"/>
               </a:schemeClr>
             </a:gs>
             <a:gs pos="100000">
               <a:schemeClr val="phClr">
-                <a:tint val="15000"/>
-                <a:satMod val="350000"/>
+                <a:lumMod val="105000"/>
+                <a:satMod val="109000"/>
+                <a:tint val="81000"/>
               </a:schemeClr>
             </a:gs>
           </a:gsLst>
-          <a:lin ang="16200000" scaled="1"/>
+          <a:lin ang="5400000" scaled="0"/>
         </a:gradFill>
         <a:gradFill rotWithShape="1">
           <a:gsLst>
             <a:gs pos="0">
               <a:schemeClr val="phClr">
-                <a:tint val="100000"/>
+                <a:satMod val="103000"/>
+                <a:lumMod val="102000"/>
+                <a:tint val="94000"/>
+              </a:schemeClr>
+            </a:gs>
+            <a:gs pos="50000">
+              <a:schemeClr val="phClr">
+                <a:satMod val="110000"/>
+                <a:lumMod val="100000"/>
                 <a:shade val="100000"/>
-                <a:satMod val="130000"/>
               </a:schemeClr>
             </a:gs>
             <a:gs pos="100000">
               <a:schemeClr val="phClr">
-                <a:tint val="50000"/>
-                <a:shade val="100000"/>
-                <a:satMod val="350000"/>
+                <a:lumMod val="99000"/>
+                <a:satMod val="120000"/>
+                <a:shade val="78000"/>
               </a:schemeClr>
             </a:gs>
           </a:gsLst>
-          <a:lin ang="16200000" scaled="0"/>
+          <a:lin ang="5400000" scaled="0"/>
         </a:gradFill>
       </a:fillStyleLst>
       <a:lnStyleLst>
-        <a:ln w="9525" cap="flat" cmpd="sng" algn="ctr">
+        <a:ln w="12700" cap="flat" cmpd="sng" algn="ctr">
           <a:solidFill>
-            <a:schemeClr val="phClr">
-              <a:shade val="95000"/>
-              <a:satMod val="105000"/>
-            </a:schemeClr>
+            <a:schemeClr val="phClr"/>
           </a:solidFill>
           <a:prstDash val="solid"/>
+          <a:miter lim="800000"/>
+        </a:ln>
+        <a:ln w="19050" cap="flat" cmpd="sng" algn="ctr">
+          <a:solidFill>
+            <a:schemeClr val="phClr"/>
+          </a:solidFill>
+          <a:prstDash val="solid"/>
+          <a:miter lim="800000"/>
         </a:ln>
         <a:ln w="25400" cap="flat" cmpd="sng" algn="ctr">
           <a:solidFill>
             <a:schemeClr val="phClr"/>
           </a:solidFill>
           <a:prstDash val="solid"/>
-        </a:ln>
-        <a:ln w="38100" cap="flat" cmpd="sng" algn="ctr">
-          <a:solidFill>
-            <a:schemeClr val="phClr"/>
-          </a:solidFill>
-          <a:prstDash val="solid"/>
+          <a:miter lim="800000"/>
         </a:ln>
       </a:lnStyleLst>
       <a:effectStyleLst>
         <a:effectStyle>
+          <a:effectLst/>
+        </a:effectStyle>
+        <a:effectStyle>
+          <a:effectLst/>
+        </a:effectStyle>
+        <a:effectStyle>
           <a:effectLst>
-            <a:outerShdw blurRad="40000" dist="20000" dir="5400000" rotWithShape="0">
+            <a:outerShdw blurRad="57150" dist="19050" dir="5400000" algn="ctr" rotWithShape="0">
               <a:srgbClr val="000000">
-                <a:alpha val="38000"/>
+                <a:alpha val="63000"/>
               </a:srgbClr>
             </a:outerShdw>
           </a:effectLst>
-        </a:effectStyle>
-        <a:effectStyle>
-          <a:effectLst>
-            <a:outerShdw blurRad="40000" dist="23000" dir="5400000" rotWithShape="0">
-              <a:srgbClr val="000000">
-                <a:alpha val="35000"/>
-              </a:srgbClr>
-            </a:outerShdw>
-          </a:effectLst>
-        </a:effectStyle>
-        <a:effectStyle>
-          <a:effectLst>
-            <a:outerShdw blurRad="40000" dist="23000" dir="5400000" rotWithShape="0">
-              <a:srgbClr val="000000">
-                <a:alpha val="35000"/>
-              </a:srgbClr>
-            </a:outerShdw>
-          </a:effectLst>
-          <a:scene3d>
-            <a:camera prst="orthographicFront">
-              <a:rot lat="0" lon="0" rev="0"/>
-            </a:camera>
-            <a:lightRig rig="threePt" dir="t">
-              <a:rot lat="0" lon="0" rev="1200000"/>
-            </a:lightRig>
-          </a:scene3d>
-          <a:sp3d>
-            <a:bevelT w="63500" h="25400"/>
-          </a:sp3d>
         </a:effectStyle>
       </a:effectStyleLst>
       <a:bgFillStyleLst>
         <a:solidFill>
           <a:schemeClr val="phClr"/>
         </a:solidFill>
+        <a:solidFill>
+          <a:schemeClr val="phClr">
+            <a:tint val="95000"/>
+            <a:satMod val="170000"/>
+          </a:schemeClr>
+        </a:solidFill>
         <a:gradFill rotWithShape="1">
           <a:gsLst>
             <a:gs pos="0">
               <a:schemeClr val="phClr">
-                <a:tint val="40000"/>
-                <a:satMod val="350000"/>
+                <a:tint val="93000"/>
+                <a:satMod val="150000"/>
+                <a:shade val="98000"/>
+                <a:lumMod val="102000"/>
               </a:schemeClr>
             </a:gs>
-            <a:gs pos="40000">
+            <a:gs pos="50000">
               <a:schemeClr val="phClr">
-                <a:tint val="45000"/>
-                <a:shade val="99000"/>
-                <a:satMod val="350000"/>
+                <a:tint val="98000"/>
+                <a:satMod val="130000"/>
+                <a:shade val="90000"/>
+                <a:lumMod val="103000"/>
               </a:schemeClr>
             </a:gs>
             <a:gs pos="100000">
               <a:schemeClr val="phClr">
-                <a:shade val="20000"/>
-                <a:satMod val="255000"/>
+                <a:shade val="63000"/>
+                <a:satMod val="120000"/>
               </a:schemeClr>
             </a:gs>
           </a:gsLst>
-          <a:path path="circle">
-            <a:fillToRect l="50000" t="-80000" r="50000" b="180000"/>
-          </a:path>
-        </a:gradFill>
-        <a:gradFill rotWithShape="1">
-          <a:gsLst>
-            <a:gs pos="0">
-              <a:schemeClr val="phClr">
-                <a:tint val="80000"/>
-                <a:satMod val="300000"/>
-              </a:schemeClr>
-            </a:gs>
-            <a:gs pos="100000">
-              <a:schemeClr val="phClr">
-                <a:shade val="30000"/>
-                <a:satMod val="200000"/>
-              </a:schemeClr>
-            </a:gs>
-          </a:gsLst>
-          <a:path path="circle">
-            <a:fillToRect l="50000" t="50000" r="50000" b="50000"/>
-          </a:path>
+          <a:lin ang="5400000" scaled="0"/>
         </a:gradFill>
       </a:bgFillStyleLst>
     </a:fmtScheme>
   </a:themeElements>
   <a:objectDefaults>
-    <a:spDef>
-      <a:spPr/>
-      <a:bodyPr/>
-      <a:lstStyle/>
-      <a:style>
-        <a:lnRef idx="1">
-          <a:schemeClr val="accent1"/>
-        </a:lnRef>
-        <a:fillRef idx="3">
-          <a:schemeClr val="accent1"/>
-        </a:fillRef>
-        <a:effectRef idx="2">
-          <a:schemeClr val="accent1"/>
-        </a:effectRef>
-        <a:fontRef idx="minor">
-          <a:schemeClr val="lt1"/>
-        </a:fontRef>
-      </a:style>
-    </a:spDef>
     <a:lnDef>
       <a:spPr/>
       <a:bodyPr/>
@@ -10794,5 +14056,10 @@
     </a:lnDef>
   </a:objectDefaults>
   <a:extraClrSchemeLst/>
+  <a:extLst>
+    <a:ext uri="{05A4C25C-085E-4340-85A3-A5531E510DB2}">
+      <thm15:themeFamily xmlns:thm15="http://schemas.microsoft.com/office/thememl/2012/main" name="Office Theme" id="{2E142A2C-CD16-42D6-873A-C26D2A0506FA}" vid="{1BDDFF52-6CD6-40A5-AB3C-68EB2F1E4D0A}"/>
+    </a:ext>
+  </a:extLst>
 </a:theme>
 </file>